--- a/docs/2_Value_Creation/2a_Product/Industry_Innovation/Industry_Innovation_v1_Lean_Business_Case.pptx
+++ b/docs/2_Value_Creation/2a_Product/Industry_Innovation/Industry_Innovation_v1_Lean_Business_Case.pptx
@@ -6,7 +6,7 @@
     <p:sldMasterId id="2147483660" r:id="rId2"/>
   </p:sldMasterIdLst>
   <p:notesMasterIdLst>
-    <p:notesMasterId r:id="rId18"/>
+    <p:notesMasterId r:id="rId14"/>
   </p:notesMasterIdLst>
   <p:sldIdLst>
     <p:sldId id="256" r:id="rId3"/>
@@ -17,13 +17,9 @@
     <p:sldId id="282" r:id="rId8"/>
     <p:sldId id="277" r:id="rId9"/>
     <p:sldId id="268" r:id="rId10"/>
-    <p:sldId id="269" r:id="rId11"/>
-    <p:sldId id="270" r:id="rId12"/>
-    <p:sldId id="271" r:id="rId13"/>
-    <p:sldId id="272" r:id="rId14"/>
-    <p:sldId id="283" r:id="rId15"/>
-    <p:sldId id="280" r:id="rId16"/>
-    <p:sldId id="275" r:id="rId17"/>
+    <p:sldId id="283" r:id="rId11"/>
+    <p:sldId id="280" r:id="rId12"/>
+    <p:sldId id="275" r:id="rId13"/>
   </p:sldIdLst>
   <p:sldSz cx="12192000" cy="6858000"/>
   <p:notesSz cx="6858000" cy="9144000"/>
@@ -261,7 +257,7 @@
       <p15:sldGuideLst xmlns:p15="http://schemas.microsoft.com/office/powerpoint/2012/main"/>
     </p:ext>
     <p:ext uri="GoogleSlidesCustomDataVersion2">
-      <go:slidesCustomData xmlns="" xmlns:mc="http://schemas.openxmlformats.org/markup-compatibility/2006" xmlns:mv="urn:schemas-microsoft-com:mac:vml" xmlns:c="http://schemas.openxmlformats.org/drawingml/2006/chart" xmlns:dgm="http://schemas.openxmlformats.org/drawingml/2006/diagram" xmlns:o="urn:schemas-microsoft-com:office:office" xmlns:v="urn:schemas-microsoft-com:vml" xmlns:pvml="urn:schemas-microsoft-com:office:powerpoint" xmlns:com="http://schemas.openxmlformats.org/drawingml/2006/compatibility" xmlns:p14="http://schemas.microsoft.com/office/powerpoint/2010/main" xmlns:p15="http://schemas.microsoft.com/office/powerpoint/2012/main" xmlns:ahyp="http://schemas.microsoft.com/office/drawing/2018/hyperlinkcolor" xmlns:go="http://customooxmlschemas.google.com/" r:id="rId19" roundtripDataSignature="AMtx7mhwEp+Eio5qReXqYqUwMP31HB0A8A=="/>
+      <go:slidesCustomData xmlns:go="http://customooxmlschemas.google.com/" xmlns:ahyp="http://schemas.microsoft.com/office/drawing/2018/hyperlinkcolor" xmlns:p15="http://schemas.microsoft.com/office/powerpoint/2012/main" xmlns:p14="http://schemas.microsoft.com/office/powerpoint/2010/main" xmlns:com="http://schemas.openxmlformats.org/drawingml/2006/compatibility" xmlns:pvml="urn:schemas-microsoft-com:office:powerpoint" xmlns:v="urn:schemas-microsoft-com:vml" xmlns:o="urn:schemas-microsoft-com:office:office" xmlns:dgm="http://schemas.openxmlformats.org/drawingml/2006/diagram" xmlns:c="http://schemas.openxmlformats.org/drawingml/2006/chart" xmlns:mv="urn:schemas-microsoft-com:mac:vml" xmlns:mc="http://schemas.openxmlformats.org/markup-compatibility/2006" xmlns="" r:id="rId19" roundtripDataSignature="AMtx7mhwEp+Eio5qReXqYqUwMP31HB0A8A=="/>
     </p:ext>
   </p:extLst>
 </p:presentation>
@@ -279,8 +275,8 @@
 <pc:chgInfo xmlns:a="http://schemas.openxmlformats.org/drawingml/2006/main" xmlns:r="http://schemas.openxmlformats.org/officeDocument/2006/relationships" xmlns:ac="http://schemas.microsoft.com/office/drawing/2013/main/command" xmlns:pc="http://schemas.microsoft.com/office/powerpoint/2013/main/command">
   <pc:docChgLst>
     <pc:chgData name="Rich Reba" userId="55db41ab6eb3f845" providerId="LiveId" clId="{0E19DA16-244C-5B50-BE0F-52911DD4CA7E}"/>
-    <pc:docChg chg="modSld">
-      <pc:chgData name="Rich Reba" userId="55db41ab6eb3f845" providerId="LiveId" clId="{0E19DA16-244C-5B50-BE0F-52911DD4CA7E}" dt="2026-08-09T19:59:58.427" v="865" actId="20577"/>
+    <pc:docChg chg="custSel delSld modSld">
+      <pc:chgData name="Rich Reba" userId="55db41ab6eb3f845" providerId="LiveId" clId="{0E19DA16-244C-5B50-BE0F-52911DD4CA7E}" dt="2026-08-13T03:07:03.419" v="877" actId="478"/>
       <pc:docMkLst>
         <pc:docMk/>
       </pc:docMkLst>
@@ -299,14 +295,14 @@
           </ac:spMkLst>
         </pc:spChg>
       </pc:sldChg>
-      <pc:sldChg chg="modSp mod">
-        <pc:chgData name="Rich Reba" userId="55db41ab6eb3f845" providerId="LiveId" clId="{0E19DA16-244C-5B50-BE0F-52911DD4CA7E}" dt="2026-08-09T19:52:56.255" v="261" actId="20577"/>
+      <pc:sldChg chg="delSp modSp mod">
+        <pc:chgData name="Rich Reba" userId="55db41ab6eb3f845" providerId="LiveId" clId="{0E19DA16-244C-5B50-BE0F-52911DD4CA7E}" dt="2026-08-13T03:07:03.419" v="877" actId="478"/>
         <pc:sldMkLst>
           <pc:docMk/>
           <pc:sldMk cId="1272635936" sldId="264"/>
         </pc:sldMkLst>
-        <pc:graphicFrameChg chg="modGraphic">
-          <ac:chgData name="Rich Reba" userId="55db41ab6eb3f845" providerId="LiveId" clId="{0E19DA16-244C-5B50-BE0F-52911DD4CA7E}" dt="2026-08-09T19:52:56.255" v="261" actId="20577"/>
+        <pc:graphicFrameChg chg="del modGraphic">
+          <ac:chgData name="Rich Reba" userId="55db41ab6eb3f845" providerId="LiveId" clId="{0E19DA16-244C-5B50-BE0F-52911DD4CA7E}" dt="2026-08-13T03:07:03.419" v="877" actId="478"/>
           <ac:graphicFrameMkLst>
             <pc:docMk/>
             <pc:sldMk cId="1272635936" sldId="264"/>
@@ -329,14 +325,22 @@
           </ac:graphicFrameMkLst>
         </pc:graphicFrameChg>
       </pc:sldChg>
-      <pc:sldChg chg="modSp mod">
-        <pc:chgData name="Rich Reba" userId="55db41ab6eb3f845" providerId="LiveId" clId="{0E19DA16-244C-5B50-BE0F-52911DD4CA7E}" dt="2026-08-09T19:59:58.427" v="865" actId="20577"/>
+      <pc:sldChg chg="delSp modSp mod">
+        <pc:chgData name="Rich Reba" userId="55db41ab6eb3f845" providerId="LiveId" clId="{0E19DA16-244C-5B50-BE0F-52911DD4CA7E}" dt="2026-08-13T03:01:54.228" v="876" actId="20577"/>
         <pc:sldMkLst>
           <pc:docMk/>
           <pc:sldMk cId="1243007551" sldId="268"/>
         </pc:sldMkLst>
-        <pc:graphicFrameChg chg="modGraphic">
-          <ac:chgData name="Rich Reba" userId="55db41ab6eb3f845" providerId="LiveId" clId="{0E19DA16-244C-5B50-BE0F-52911DD4CA7E}" dt="2026-08-09T19:59:58.427" v="865" actId="20577"/>
+        <pc:spChg chg="mod">
+          <ac:chgData name="Rich Reba" userId="55db41ab6eb3f845" providerId="LiveId" clId="{0E19DA16-244C-5B50-BE0F-52911DD4CA7E}" dt="2026-08-13T03:01:54.228" v="876" actId="20577"/>
+          <ac:spMkLst>
+            <pc:docMk/>
+            <pc:sldMk cId="1243007551" sldId="268"/>
+            <ac:spMk id="96" creationId="{00000000-0000-0000-0000-000000000000}"/>
+          </ac:spMkLst>
+        </pc:spChg>
+        <pc:graphicFrameChg chg="del modGraphic">
+          <ac:chgData name="Rich Reba" userId="55db41ab6eb3f845" providerId="LiveId" clId="{0E19DA16-244C-5B50-BE0F-52911DD4CA7E}" dt="2026-08-13T03:01:50.073" v="870" actId="478"/>
           <ac:graphicFrameMkLst>
             <pc:docMk/>
             <pc:sldMk cId="1243007551" sldId="268"/>
@@ -344,65 +348,33 @@
           </ac:graphicFrameMkLst>
         </pc:graphicFrameChg>
       </pc:sldChg>
-      <pc:sldChg chg="modSp mod">
-        <pc:chgData name="Rich Reba" userId="55db41ab6eb3f845" providerId="LiveId" clId="{0E19DA16-244C-5B50-BE0F-52911DD4CA7E}" dt="2026-08-09T19:54:35.048" v="413" actId="20577"/>
+      <pc:sldChg chg="modSp del mod">
+        <pc:chgData name="Rich Reba" userId="55db41ab6eb3f845" providerId="LiveId" clId="{0E19DA16-244C-5B50-BE0F-52911DD4CA7E}" dt="2026-08-13T03:01:44.359" v="869" actId="2696"/>
         <pc:sldMkLst>
           <pc:docMk/>
           <pc:sldMk cId="450257364" sldId="269"/>
         </pc:sldMkLst>
-        <pc:graphicFrameChg chg="modGraphic">
-          <ac:chgData name="Rich Reba" userId="55db41ab6eb3f845" providerId="LiveId" clId="{0E19DA16-244C-5B50-BE0F-52911DD4CA7E}" dt="2026-08-09T19:54:35.048" v="413" actId="20577"/>
-          <ac:graphicFrameMkLst>
-            <pc:docMk/>
-            <pc:sldMk cId="450257364" sldId="269"/>
-            <ac:graphicFrameMk id="2" creationId="{849548E0-A616-4177-21C8-C63119ADCD53}"/>
-          </ac:graphicFrameMkLst>
-        </pc:graphicFrameChg>
       </pc:sldChg>
-      <pc:sldChg chg="modSp mod">
-        <pc:chgData name="Rich Reba" userId="55db41ab6eb3f845" providerId="LiveId" clId="{0E19DA16-244C-5B50-BE0F-52911DD4CA7E}" dt="2026-08-09T19:56:01.815" v="583" actId="20577"/>
+      <pc:sldChg chg="modSp del mod">
+        <pc:chgData name="Rich Reba" userId="55db41ab6eb3f845" providerId="LiveId" clId="{0E19DA16-244C-5B50-BE0F-52911DD4CA7E}" dt="2026-08-13T03:01:43.407" v="868" actId="2696"/>
         <pc:sldMkLst>
           <pc:docMk/>
           <pc:sldMk cId="4255637138" sldId="270"/>
         </pc:sldMkLst>
-        <pc:graphicFrameChg chg="modGraphic">
-          <ac:chgData name="Rich Reba" userId="55db41ab6eb3f845" providerId="LiveId" clId="{0E19DA16-244C-5B50-BE0F-52911DD4CA7E}" dt="2026-08-09T19:56:01.815" v="583" actId="20577"/>
-          <ac:graphicFrameMkLst>
-            <pc:docMk/>
-            <pc:sldMk cId="4255637138" sldId="270"/>
-            <ac:graphicFrameMk id="3" creationId="{14B79CD4-17D9-A460-45EE-070B6CD3DAFF}"/>
-          </ac:graphicFrameMkLst>
-        </pc:graphicFrameChg>
       </pc:sldChg>
-      <pc:sldChg chg="modSp mod">
-        <pc:chgData name="Rich Reba" userId="55db41ab6eb3f845" providerId="LiveId" clId="{0E19DA16-244C-5B50-BE0F-52911DD4CA7E}" dt="2026-08-09T19:56:16.672" v="626" actId="20577"/>
+      <pc:sldChg chg="modSp del mod">
+        <pc:chgData name="Rich Reba" userId="55db41ab6eb3f845" providerId="LiveId" clId="{0E19DA16-244C-5B50-BE0F-52911DD4CA7E}" dt="2026-08-13T03:01:42.496" v="867" actId="2696"/>
         <pc:sldMkLst>
           <pc:docMk/>
           <pc:sldMk cId="67448461" sldId="271"/>
         </pc:sldMkLst>
-        <pc:graphicFrameChg chg="modGraphic">
-          <ac:chgData name="Rich Reba" userId="55db41ab6eb3f845" providerId="LiveId" clId="{0E19DA16-244C-5B50-BE0F-52911DD4CA7E}" dt="2026-08-09T19:56:16.672" v="626" actId="20577"/>
-          <ac:graphicFrameMkLst>
-            <pc:docMk/>
-            <pc:sldMk cId="67448461" sldId="271"/>
-            <ac:graphicFrameMk id="2" creationId="{59DCEAC8-DB72-C8D9-0DB4-F8D83D801ADB}"/>
-          </ac:graphicFrameMkLst>
-        </pc:graphicFrameChg>
       </pc:sldChg>
-      <pc:sldChg chg="modSp mod">
-        <pc:chgData name="Rich Reba" userId="55db41ab6eb3f845" providerId="LiveId" clId="{0E19DA16-244C-5B50-BE0F-52911DD4CA7E}" dt="2026-08-09T19:56:55.372" v="673" actId="20577"/>
+      <pc:sldChg chg="modSp del mod">
+        <pc:chgData name="Rich Reba" userId="55db41ab6eb3f845" providerId="LiveId" clId="{0E19DA16-244C-5B50-BE0F-52911DD4CA7E}" dt="2026-08-13T03:01:41.451" v="866" actId="2696"/>
         <pc:sldMkLst>
           <pc:docMk/>
           <pc:sldMk cId="3088802820" sldId="272"/>
         </pc:sldMkLst>
-        <pc:graphicFrameChg chg="modGraphic">
-          <ac:chgData name="Rich Reba" userId="55db41ab6eb3f845" providerId="LiveId" clId="{0E19DA16-244C-5B50-BE0F-52911DD4CA7E}" dt="2026-08-09T19:56:55.372" v="673" actId="20577"/>
-          <ac:graphicFrameMkLst>
-            <pc:docMk/>
-            <pc:sldMk cId="3088802820" sldId="272"/>
-            <ac:graphicFrameMk id="3" creationId="{F1699409-9005-50C8-4771-BC86CF9F9048}"/>
-          </ac:graphicFrameMkLst>
-        </pc:graphicFrameChg>
       </pc:sldChg>
       <pc:sldChg chg="modSp">
         <pc:chgData name="Rich Reba" userId="55db41ab6eb3f845" providerId="LiveId" clId="{0E19DA16-244C-5B50-BE0F-52911DD4CA7E}" dt="2026-08-09T19:57:56.318" v="817"/>
@@ -1014,333 +986,6 @@
 </p:notes>
 </file>
 
-<file path=ppt/notesSlides/notesSlide10.xml><?xml version="1.0" encoding="utf-8"?>
-<p:notes xmlns:a="http://schemas.openxmlformats.org/drawingml/2006/main" xmlns:r="http://schemas.openxmlformats.org/officeDocument/2006/relationships" xmlns:p="http://schemas.openxmlformats.org/presentationml/2006/main" showMasterSp="0" showMasterPhAnim="0">
-  <p:cSld>
-    <p:spTree>
-      <p:nvGrpSpPr>
-        <p:cNvPr id="1" name="Shape 92"/>
-        <p:cNvGrpSpPr/>
-        <p:nvPr/>
-      </p:nvGrpSpPr>
-      <p:grpSpPr>
-        <a:xfrm>
-          <a:off x="0" y="0"/>
-          <a:ext cx="0" cy="0"/>
-          <a:chOff x="0" y="0"/>
-          <a:chExt cx="0" cy="0"/>
-        </a:xfrm>
-      </p:grpSpPr>
-      <p:sp>
-        <p:nvSpPr>
-          <p:cNvPr id="93" name="Google Shape;93;p2:notes"/>
-          <p:cNvSpPr txBox="1">
-            <a:spLocks noGrp="1"/>
-          </p:cNvSpPr>
-          <p:nvPr>
-            <p:ph type="body" idx="1"/>
-          </p:nvPr>
-        </p:nvSpPr>
-        <p:spPr>
-          <a:xfrm>
-            <a:off x="685800" y="4343400"/>
-            <a:ext cx="5486400" cy="4114800"/>
-          </a:xfrm>
-          <a:prstGeom prst="rect">
-            <a:avLst/>
-          </a:prstGeom>
-        </p:spPr>
-        <p:txBody>
-          <a:bodyPr spcFirstLastPara="1" wrap="square" lIns="91425" tIns="91425" rIns="91425" bIns="91425" anchor="t" anchorCtr="0">
-            <a:noAutofit/>
-          </a:bodyPr>
-          <a:lstStyle/>
-          <a:p>
-            <a:pPr marL="0" lvl="0" indent="0" algn="l" rtl="0">
-              <a:spcBef>
-                <a:spcPts val="0"/>
-              </a:spcBef>
-              <a:spcAft>
-                <a:spcPts val="0"/>
-              </a:spcAft>
-              <a:buNone/>
-            </a:pPr>
-            <a:endParaRPr/>
-          </a:p>
-        </p:txBody>
-      </p:sp>
-      <p:sp>
-        <p:nvSpPr>
-          <p:cNvPr id="94" name="Google Shape;94;p2:notes"/>
-          <p:cNvSpPr>
-            <a:spLocks noGrp="1" noRot="1" noChangeAspect="1"/>
-          </p:cNvSpPr>
-          <p:nvPr>
-            <p:ph type="sldImg" idx="2"/>
-          </p:nvPr>
-        </p:nvSpPr>
-        <p:spPr>
-          <a:xfrm>
-            <a:off x="381000" y="685800"/>
-            <a:ext cx="6096000" cy="3429000"/>
-          </a:xfrm>
-          <a:custGeom>
-            <a:avLst/>
-            <a:gdLst/>
-            <a:ahLst/>
-            <a:cxnLst/>
-            <a:rect l="l" t="t" r="r" b="b"/>
-            <a:pathLst>
-              <a:path w="120000" h="120000" extrusionOk="0">
-                <a:moveTo>
-                  <a:pt x="0" y="0"/>
-                </a:moveTo>
-                <a:lnTo>
-                  <a:pt x="120000" y="0"/>
-                </a:lnTo>
-                <a:lnTo>
-                  <a:pt x="120000" y="120000"/>
-                </a:lnTo>
-                <a:lnTo>
-                  <a:pt x="0" y="120000"/>
-                </a:lnTo>
-                <a:close/>
-              </a:path>
-            </a:pathLst>
-          </a:custGeom>
-        </p:spPr>
-      </p:sp>
-    </p:spTree>
-    <p:extLst>
-      <p:ext uri="{BB962C8B-B14F-4D97-AF65-F5344CB8AC3E}">
-        <p14:creationId xmlns:p14="http://schemas.microsoft.com/office/powerpoint/2010/main" val="686330490"/>
-      </p:ext>
-    </p:extLst>
-  </p:cSld>
-  <p:clrMapOvr>
-    <a:masterClrMapping/>
-  </p:clrMapOvr>
-</p:notes>
-</file>
-
-<file path=ppt/notesSlides/notesSlide11.xml><?xml version="1.0" encoding="utf-8"?>
-<p:notes xmlns:a="http://schemas.openxmlformats.org/drawingml/2006/main" xmlns:r="http://schemas.openxmlformats.org/officeDocument/2006/relationships" xmlns:p="http://schemas.openxmlformats.org/presentationml/2006/main" showMasterSp="0" showMasterPhAnim="0">
-  <p:cSld>
-    <p:spTree>
-      <p:nvGrpSpPr>
-        <p:cNvPr id="1" name="Shape 92"/>
-        <p:cNvGrpSpPr/>
-        <p:nvPr/>
-      </p:nvGrpSpPr>
-      <p:grpSpPr>
-        <a:xfrm>
-          <a:off x="0" y="0"/>
-          <a:ext cx="0" cy="0"/>
-          <a:chOff x="0" y="0"/>
-          <a:chExt cx="0" cy="0"/>
-        </a:xfrm>
-      </p:grpSpPr>
-      <p:sp>
-        <p:nvSpPr>
-          <p:cNvPr id="93" name="Google Shape;93;p2:notes"/>
-          <p:cNvSpPr txBox="1">
-            <a:spLocks noGrp="1"/>
-          </p:cNvSpPr>
-          <p:nvPr>
-            <p:ph type="body" idx="1"/>
-          </p:nvPr>
-        </p:nvSpPr>
-        <p:spPr>
-          <a:xfrm>
-            <a:off x="685800" y="4343400"/>
-            <a:ext cx="5486400" cy="4114800"/>
-          </a:xfrm>
-          <a:prstGeom prst="rect">
-            <a:avLst/>
-          </a:prstGeom>
-        </p:spPr>
-        <p:txBody>
-          <a:bodyPr spcFirstLastPara="1" wrap="square" lIns="91425" tIns="91425" rIns="91425" bIns="91425" anchor="t" anchorCtr="0">
-            <a:noAutofit/>
-          </a:bodyPr>
-          <a:lstStyle/>
-          <a:p>
-            <a:pPr marL="0" lvl="0" indent="0" algn="l" rtl="0">
-              <a:spcBef>
-                <a:spcPts val="0"/>
-              </a:spcBef>
-              <a:spcAft>
-                <a:spcPts val="0"/>
-              </a:spcAft>
-              <a:buNone/>
-            </a:pPr>
-            <a:endParaRPr/>
-          </a:p>
-        </p:txBody>
-      </p:sp>
-      <p:sp>
-        <p:nvSpPr>
-          <p:cNvPr id="94" name="Google Shape;94;p2:notes"/>
-          <p:cNvSpPr>
-            <a:spLocks noGrp="1" noRot="1" noChangeAspect="1"/>
-          </p:cNvSpPr>
-          <p:nvPr>
-            <p:ph type="sldImg" idx="2"/>
-          </p:nvPr>
-        </p:nvSpPr>
-        <p:spPr>
-          <a:xfrm>
-            <a:off x="381000" y="685800"/>
-            <a:ext cx="6096000" cy="3429000"/>
-          </a:xfrm>
-          <a:custGeom>
-            <a:avLst/>
-            <a:gdLst/>
-            <a:ahLst/>
-            <a:cxnLst/>
-            <a:rect l="l" t="t" r="r" b="b"/>
-            <a:pathLst>
-              <a:path w="120000" h="120000" extrusionOk="0">
-                <a:moveTo>
-                  <a:pt x="0" y="0"/>
-                </a:moveTo>
-                <a:lnTo>
-                  <a:pt x="120000" y="0"/>
-                </a:lnTo>
-                <a:lnTo>
-                  <a:pt x="120000" y="120000"/>
-                </a:lnTo>
-                <a:lnTo>
-                  <a:pt x="0" y="120000"/>
-                </a:lnTo>
-                <a:close/>
-              </a:path>
-            </a:pathLst>
-          </a:custGeom>
-        </p:spPr>
-      </p:sp>
-    </p:spTree>
-    <p:extLst>
-      <p:ext uri="{BB962C8B-B14F-4D97-AF65-F5344CB8AC3E}">
-        <p14:creationId xmlns:p14="http://schemas.microsoft.com/office/powerpoint/2010/main" val="3799184939"/>
-      </p:ext>
-    </p:extLst>
-  </p:cSld>
-  <p:clrMapOvr>
-    <a:masterClrMapping/>
-  </p:clrMapOvr>
-</p:notes>
-</file>
-
-<file path=ppt/notesSlides/notesSlide12.xml><?xml version="1.0" encoding="utf-8"?>
-<p:notes xmlns:a="http://schemas.openxmlformats.org/drawingml/2006/main" xmlns:r="http://schemas.openxmlformats.org/officeDocument/2006/relationships" xmlns:p="http://schemas.openxmlformats.org/presentationml/2006/main" showMasterSp="0" showMasterPhAnim="0">
-  <p:cSld>
-    <p:spTree>
-      <p:nvGrpSpPr>
-        <p:cNvPr id="1" name="Shape 92"/>
-        <p:cNvGrpSpPr/>
-        <p:nvPr/>
-      </p:nvGrpSpPr>
-      <p:grpSpPr>
-        <a:xfrm>
-          <a:off x="0" y="0"/>
-          <a:ext cx="0" cy="0"/>
-          <a:chOff x="0" y="0"/>
-          <a:chExt cx="0" cy="0"/>
-        </a:xfrm>
-      </p:grpSpPr>
-      <p:sp>
-        <p:nvSpPr>
-          <p:cNvPr id="93" name="Google Shape;93;p2:notes"/>
-          <p:cNvSpPr txBox="1">
-            <a:spLocks noGrp="1"/>
-          </p:cNvSpPr>
-          <p:nvPr>
-            <p:ph type="body" idx="1"/>
-          </p:nvPr>
-        </p:nvSpPr>
-        <p:spPr>
-          <a:xfrm>
-            <a:off x="685800" y="4343400"/>
-            <a:ext cx="5486400" cy="4114800"/>
-          </a:xfrm>
-          <a:prstGeom prst="rect">
-            <a:avLst/>
-          </a:prstGeom>
-        </p:spPr>
-        <p:txBody>
-          <a:bodyPr spcFirstLastPara="1" wrap="square" lIns="91425" tIns="91425" rIns="91425" bIns="91425" anchor="t" anchorCtr="0">
-            <a:noAutofit/>
-          </a:bodyPr>
-          <a:lstStyle/>
-          <a:p>
-            <a:pPr marL="0" lvl="0" indent="0" algn="l" rtl="0">
-              <a:spcBef>
-                <a:spcPts val="0"/>
-              </a:spcBef>
-              <a:spcAft>
-                <a:spcPts val="0"/>
-              </a:spcAft>
-              <a:buNone/>
-            </a:pPr>
-            <a:endParaRPr/>
-          </a:p>
-        </p:txBody>
-      </p:sp>
-      <p:sp>
-        <p:nvSpPr>
-          <p:cNvPr id="94" name="Google Shape;94;p2:notes"/>
-          <p:cNvSpPr>
-            <a:spLocks noGrp="1" noRot="1" noChangeAspect="1"/>
-          </p:cNvSpPr>
-          <p:nvPr>
-            <p:ph type="sldImg" idx="2"/>
-          </p:nvPr>
-        </p:nvSpPr>
-        <p:spPr>
-          <a:xfrm>
-            <a:off x="381000" y="685800"/>
-            <a:ext cx="6096000" cy="3429000"/>
-          </a:xfrm>
-          <a:custGeom>
-            <a:avLst/>
-            <a:gdLst/>
-            <a:ahLst/>
-            <a:cxnLst/>
-            <a:rect l="l" t="t" r="r" b="b"/>
-            <a:pathLst>
-              <a:path w="120000" h="120000" extrusionOk="0">
-                <a:moveTo>
-                  <a:pt x="0" y="0"/>
-                </a:moveTo>
-                <a:lnTo>
-                  <a:pt x="120000" y="0"/>
-                </a:lnTo>
-                <a:lnTo>
-                  <a:pt x="120000" y="120000"/>
-                </a:lnTo>
-                <a:lnTo>
-                  <a:pt x="0" y="120000"/>
-                </a:lnTo>
-                <a:close/>
-              </a:path>
-            </a:pathLst>
-          </a:custGeom>
-        </p:spPr>
-      </p:sp>
-    </p:spTree>
-    <p:extLst>
-      <p:ext uri="{BB962C8B-B14F-4D97-AF65-F5344CB8AC3E}">
-        <p14:creationId xmlns:p14="http://schemas.microsoft.com/office/powerpoint/2010/main" val="1667367495"/>
-      </p:ext>
-    </p:extLst>
-  </p:cSld>
-  <p:clrMapOvr>
-    <a:masterClrMapping/>
-  </p:clrMapOvr>
-</p:notes>
-</file>
-
 <file path=ppt/notesSlides/notesSlide2.xml><?xml version="1.0" encoding="utf-8"?>
 <p:notes xmlns:a="http://schemas.openxmlformats.org/drawingml/2006/main" xmlns:r="http://schemas.openxmlformats.org/officeDocument/2006/relationships" xmlns:p="http://schemas.openxmlformats.org/presentationml/2006/main" showMasterSp="0" showMasterPhAnim="0">
   <p:cSld>
@@ -1985,7 +1630,7 @@
     </p:spTree>
     <p:extLst>
       <p:ext uri="{BB962C8B-B14F-4D97-AF65-F5344CB8AC3E}">
-        <p14:creationId xmlns:p14="http://schemas.microsoft.com/office/powerpoint/2010/main" val="152019790"/>
+        <p14:creationId xmlns:p14="http://schemas.microsoft.com/office/powerpoint/2010/main" val="3799184939"/>
       </p:ext>
     </p:extLst>
   </p:cSld>
@@ -2094,116 +1739,7 @@
     </p:spTree>
     <p:extLst>
       <p:ext uri="{BB962C8B-B14F-4D97-AF65-F5344CB8AC3E}">
-        <p14:creationId xmlns:p14="http://schemas.microsoft.com/office/powerpoint/2010/main" val="525634258"/>
-      </p:ext>
-    </p:extLst>
-  </p:cSld>
-  <p:clrMapOvr>
-    <a:masterClrMapping/>
-  </p:clrMapOvr>
-</p:notes>
-</file>
-
-<file path=ppt/notesSlides/notesSlide9.xml><?xml version="1.0" encoding="utf-8"?>
-<p:notes xmlns:a="http://schemas.openxmlformats.org/drawingml/2006/main" xmlns:r="http://schemas.openxmlformats.org/officeDocument/2006/relationships" xmlns:p="http://schemas.openxmlformats.org/presentationml/2006/main" showMasterSp="0" showMasterPhAnim="0">
-  <p:cSld>
-    <p:spTree>
-      <p:nvGrpSpPr>
-        <p:cNvPr id="1" name="Shape 92"/>
-        <p:cNvGrpSpPr/>
-        <p:nvPr/>
-      </p:nvGrpSpPr>
-      <p:grpSpPr>
-        <a:xfrm>
-          <a:off x="0" y="0"/>
-          <a:ext cx="0" cy="0"/>
-          <a:chOff x="0" y="0"/>
-          <a:chExt cx="0" cy="0"/>
-        </a:xfrm>
-      </p:grpSpPr>
-      <p:sp>
-        <p:nvSpPr>
-          <p:cNvPr id="93" name="Google Shape;93;p2:notes"/>
-          <p:cNvSpPr txBox="1">
-            <a:spLocks noGrp="1"/>
-          </p:cNvSpPr>
-          <p:nvPr>
-            <p:ph type="body" idx="1"/>
-          </p:nvPr>
-        </p:nvSpPr>
-        <p:spPr>
-          <a:xfrm>
-            <a:off x="685800" y="4343400"/>
-            <a:ext cx="5486400" cy="4114800"/>
-          </a:xfrm>
-          <a:prstGeom prst="rect">
-            <a:avLst/>
-          </a:prstGeom>
-        </p:spPr>
-        <p:txBody>
-          <a:bodyPr spcFirstLastPara="1" wrap="square" lIns="91425" tIns="91425" rIns="91425" bIns="91425" anchor="t" anchorCtr="0">
-            <a:noAutofit/>
-          </a:bodyPr>
-          <a:lstStyle/>
-          <a:p>
-            <a:pPr marL="0" lvl="0" indent="0" algn="l" rtl="0">
-              <a:spcBef>
-                <a:spcPts val="0"/>
-              </a:spcBef>
-              <a:spcAft>
-                <a:spcPts val="0"/>
-              </a:spcAft>
-              <a:buNone/>
-            </a:pPr>
-            <a:endParaRPr/>
-          </a:p>
-        </p:txBody>
-      </p:sp>
-      <p:sp>
-        <p:nvSpPr>
-          <p:cNvPr id="94" name="Google Shape;94;p2:notes"/>
-          <p:cNvSpPr>
-            <a:spLocks noGrp="1" noRot="1" noChangeAspect="1"/>
-          </p:cNvSpPr>
-          <p:nvPr>
-            <p:ph type="sldImg" idx="2"/>
-          </p:nvPr>
-        </p:nvSpPr>
-        <p:spPr>
-          <a:xfrm>
-            <a:off x="381000" y="685800"/>
-            <a:ext cx="6096000" cy="3429000"/>
-          </a:xfrm>
-          <a:custGeom>
-            <a:avLst/>
-            <a:gdLst/>
-            <a:ahLst/>
-            <a:cxnLst/>
-            <a:rect l="l" t="t" r="r" b="b"/>
-            <a:pathLst>
-              <a:path w="120000" h="120000" extrusionOk="0">
-                <a:moveTo>
-                  <a:pt x="0" y="0"/>
-                </a:moveTo>
-                <a:lnTo>
-                  <a:pt x="120000" y="0"/>
-                </a:lnTo>
-                <a:lnTo>
-                  <a:pt x="120000" y="120000"/>
-                </a:lnTo>
-                <a:lnTo>
-                  <a:pt x="0" y="120000"/>
-                </a:lnTo>
-                <a:close/>
-              </a:path>
-            </a:pathLst>
-          </a:custGeom>
-        </p:spPr>
-      </p:sp>
-    </p:spTree>
-    <p:extLst>
-      <p:ext uri="{BB962C8B-B14F-4D97-AF65-F5344CB8AC3E}">
-        <p14:creationId xmlns:p14="http://schemas.microsoft.com/office/powerpoint/2010/main" val="2155065763"/>
+        <p14:creationId xmlns:p14="http://schemas.microsoft.com/office/powerpoint/2010/main" val="1667367495"/>
       </p:ext>
     </p:extLst>
   </p:cSld>
@@ -16204,3732 +15740,6 @@
   <p:cSld>
     <p:spTree>
       <p:nvGrpSpPr>
-        <p:cNvPr id="1" name="Shape 95"/>
-        <p:cNvGrpSpPr/>
-        <p:nvPr/>
-      </p:nvGrpSpPr>
-      <p:grpSpPr>
-        <a:xfrm>
-          <a:off x="0" y="0"/>
-          <a:ext cx="0" cy="0"/>
-          <a:chOff x="0" y="0"/>
-          <a:chExt cx="0" cy="0"/>
-        </a:xfrm>
-      </p:grpSpPr>
-      <p:sp>
-        <p:nvSpPr>
-          <p:cNvPr id="96" name="Google Shape;96;p2"/>
-          <p:cNvSpPr txBox="1">
-            <a:spLocks noGrp="1"/>
-          </p:cNvSpPr>
-          <p:nvPr>
-            <p:ph type="title"/>
-          </p:nvPr>
-        </p:nvSpPr>
-        <p:spPr>
-          <a:prstGeom prst="rect">
-            <a:avLst/>
-          </a:prstGeom>
-          <a:noFill/>
-          <a:ln>
-            <a:noFill/>
-          </a:ln>
-        </p:spPr>
-        <p:txBody>
-          <a:bodyPr spcFirstLastPara="1" wrap="square" lIns="91425" tIns="45700" rIns="91425" bIns="45700" anchor="ctr" anchorCtr="0">
-            <a:normAutofit/>
-          </a:bodyPr>
-          <a:lstStyle/>
-          <a:p>
-            <a:pPr marL="0" lvl="0" indent="0" algn="l" rtl="0">
-              <a:lnSpc>
-                <a:spcPct val="90000"/>
-              </a:lnSpc>
-              <a:spcBef>
-                <a:spcPts val="0"/>
-              </a:spcBef>
-              <a:spcAft>
-                <a:spcPts val="0"/>
-              </a:spcAft>
-              <a:buClr>
-                <a:schemeClr val="dk1"/>
-              </a:buClr>
-              <a:buSzPts val="4400"/>
-              <a:buFont typeface="Calibri"/>
-              <a:buNone/>
-            </a:pPr>
-            <a:r>
-              <a:rPr lang="en-US" dirty="0"/>
-              <a:t>Lean Business Case (3/5)</a:t>
-            </a:r>
-            <a:endParaRPr dirty="0"/>
-          </a:p>
-        </p:txBody>
-      </p:sp>
-      <p:graphicFrame>
-        <p:nvGraphicFramePr>
-          <p:cNvPr id="3" name="Table 2">
-            <a:extLst>
-              <a:ext uri="{FF2B5EF4-FFF2-40B4-BE49-F238E27FC236}">
-                <a16:creationId xmlns:a16="http://schemas.microsoft.com/office/drawing/2014/main" id="{14B79CD4-17D9-A460-45EE-070B6CD3DAFF}"/>
-              </a:ext>
-            </a:extLst>
-          </p:cNvPr>
-          <p:cNvGraphicFramePr>
-            <a:graphicFrameLocks noGrp="1"/>
-          </p:cNvGraphicFramePr>
-          <p:nvPr>
-            <p:extLst>
-              <p:ext uri="{D42A27DB-BD31-4B8C-83A1-F6EECF244321}">
-                <p14:modId xmlns:p14="http://schemas.microsoft.com/office/powerpoint/2010/main" val="470827735"/>
-              </p:ext>
-            </p:extLst>
-          </p:nvPr>
-        </p:nvGraphicFramePr>
-        <p:xfrm>
-          <a:off x="939452" y="1383519"/>
-          <a:ext cx="10396603" cy="5043512"/>
-        </p:xfrm>
-        <a:graphic>
-          <a:graphicData uri="http://schemas.openxmlformats.org/drawingml/2006/table">
-            <a:tbl>
-              <a:tblPr firstRow="1" firstCol="1" bandRow="1" bandCol="1">
-                <a:tableStyleId>{5940675A-B579-460E-94D1-54222C63F5DA}</a:tableStyleId>
-              </a:tblPr>
-              <a:tblGrid>
-                <a:gridCol w="5019664">
-                  <a:extLst>
-                    <a:ext uri="{9D8B030D-6E8A-4147-A177-3AD203B41FA5}">
-                      <a16:colId xmlns:a16="http://schemas.microsoft.com/office/drawing/2014/main" val="2059904068"/>
-                    </a:ext>
-                  </a:extLst>
-                </a:gridCol>
-                <a:gridCol w="5376939">
-                  <a:extLst>
-                    <a:ext uri="{9D8B030D-6E8A-4147-A177-3AD203B41FA5}">
-                      <a16:colId xmlns:a16="http://schemas.microsoft.com/office/drawing/2014/main" val="2673396883"/>
-                    </a:ext>
-                  </a:extLst>
-                </a:gridCol>
-              </a:tblGrid>
-              <a:tr h="157843">
-                <a:tc gridSpan="2">
-                  <a:txBody>
-                    <a:bodyPr/>
-                    <a:lstStyle/>
-                    <a:p>
-                      <a:pPr marL="0" marR="0" algn="ctr">
-                        <a:lnSpc>
-                          <a:spcPct val="115000"/>
-                        </a:lnSpc>
-                        <a:spcBef>
-                          <a:spcPts val="0"/>
-                        </a:spcBef>
-                        <a:spcAft>
-                          <a:spcPts val="0"/>
-                        </a:spcAft>
-                      </a:pPr>
-                      <a:r>
-                        <a:rPr lang="en-US" sz="1100" b="1" dirty="0">
-                          <a:solidFill>
-                            <a:schemeClr val="tx1"/>
-                          </a:solidFill>
-                          <a:effectLst/>
-                        </a:rPr>
-                        <a:t>Solution Analysis</a:t>
-                      </a:r>
-                      <a:endParaRPr lang="en-US" sz="1100" b="1" dirty="0">
-                        <a:solidFill>
-                          <a:schemeClr val="tx1"/>
-                        </a:solidFill>
-                        <a:effectLst/>
-                        <a:latin typeface="Calibri" panose="020F0502020204030204" pitchFamily="34" charset="0"/>
-                        <a:ea typeface="MS Mincho" panose="02020609040205080304" pitchFamily="49" charset="-128"/>
-                        <a:cs typeface="Times New Roman" panose="02020603050405020304" pitchFamily="18" charset="0"/>
-                      </a:endParaRPr>
-                    </a:p>
-                  </a:txBody>
-                  <a:tcPr marL="51885" marR="51885" marT="0" marB="0"/>
-                </a:tc>
-                <a:tc hMerge="1">
-                  <a:txBody>
-                    <a:bodyPr/>
-                    <a:lstStyle/>
-                    <a:p>
-                      <a:endParaRPr lang="en-US"/>
-                    </a:p>
-                  </a:txBody>
-                  <a:tcPr/>
-                </a:tc>
-                <a:extLst>
-                  <a:ext uri="{0D108BD9-81ED-4DB2-BD59-A6C34878D82A}">
-                    <a16:rowId xmlns:a16="http://schemas.microsoft.com/office/drawing/2014/main" val="2168575272"/>
-                  </a:ext>
-                </a:extLst>
-              </a:tr>
-              <a:tr h="997432">
-                <a:tc gridSpan="2">
-                  <a:txBody>
-                    <a:bodyPr/>
-                    <a:lstStyle/>
-                    <a:p>
-                      <a:pPr marL="0" marR="0">
-                        <a:lnSpc>
-                          <a:spcPct val="115000"/>
-                        </a:lnSpc>
-                        <a:spcBef>
-                          <a:spcPts val="0"/>
-                        </a:spcBef>
-                        <a:spcAft>
-                          <a:spcPts val="1000"/>
-                        </a:spcAft>
-                      </a:pPr>
-                      <a:r>
-                        <a:rPr lang="en-US" sz="1100" b="1" dirty="0">
-                          <a:solidFill>
-                            <a:schemeClr val="tx1"/>
-                          </a:solidFill>
-                          <a:effectLst/>
-                        </a:rPr>
-                        <a:t>Which Internal and/or external customers are affected, and how?</a:t>
-                      </a:r>
-                    </a:p>
-                    <a:p>
-                      <a:pPr marL="0" marR="0">
-                        <a:lnSpc>
-                          <a:spcPct val="115000"/>
-                        </a:lnSpc>
-                        <a:spcBef>
-                          <a:spcPts val="0"/>
-                        </a:spcBef>
-                        <a:spcAft>
-                          <a:spcPts val="1000"/>
-                        </a:spcAft>
-                      </a:pPr>
-                      <a:r>
-                        <a:rPr lang="en-US" sz="1100" dirty="0">
-                          <a:solidFill>
-                            <a:schemeClr val="tx1"/>
-                          </a:solidFill>
-                          <a:effectLst/>
-                        </a:rPr>
-                        <a:t>Our MVP is focused on proving our core premise to establish credibility with our addressable market, which includes leaders and organizations across the Tech Services industry.  We will do this by implementing proven accelerators to create </a:t>
-                      </a:r>
-                      <a:r>
-                        <a:rPr lang="en-US" sz="1100" b="1" dirty="0">
-                          <a:solidFill>
-                            <a:srgbClr val="00B050"/>
-                          </a:solidFill>
-                          <a:effectLst/>
-                        </a:rPr>
-                        <a:t>Compounding Innovation</a:t>
-                      </a:r>
-                      <a:r>
-                        <a:rPr lang="en-US" sz="1100" dirty="0">
-                          <a:solidFill>
-                            <a:schemeClr val="tx1"/>
-                          </a:solidFill>
-                          <a:effectLst/>
-                        </a:rPr>
-                        <a:t> among patron-supported Innovation Teams while harnessing </a:t>
-                      </a:r>
-                      <a:r>
-                        <a:rPr lang="en-US" sz="1100" b="1" dirty="0">
-                          <a:solidFill>
-                            <a:srgbClr val="00B050"/>
-                          </a:solidFill>
-                          <a:effectLst/>
-                        </a:rPr>
-                        <a:t>Generative Learning</a:t>
-                      </a:r>
-                      <a:r>
-                        <a:rPr lang="en-US" sz="1100" dirty="0">
-                          <a:solidFill>
-                            <a:schemeClr val="tx1"/>
-                          </a:solidFill>
-                          <a:effectLst/>
-                        </a:rPr>
-                        <a:t> and </a:t>
-                      </a:r>
-                      <a:r>
-                        <a:rPr lang="en-US" sz="1100" b="1" dirty="0">
-                          <a:solidFill>
-                            <a:schemeClr val="accent2"/>
-                          </a:solidFill>
-                          <a:effectLst/>
-                        </a:rPr>
-                        <a:t>Artificial Intelligence</a:t>
-                      </a:r>
-                      <a:r>
-                        <a:rPr lang="en-US" sz="1100" dirty="0">
-                          <a:solidFill>
-                            <a:schemeClr val="tx1"/>
-                          </a:solidFill>
-                          <a:effectLst/>
-                        </a:rPr>
-                        <a:t>.</a:t>
-                      </a:r>
-                    </a:p>
-                  </a:txBody>
-                  <a:tcPr marL="51885" marR="51885" marT="0" marB="0"/>
-                </a:tc>
-                <a:tc hMerge="1">
-                  <a:txBody>
-                    <a:bodyPr/>
-                    <a:lstStyle/>
-                    <a:p>
-                      <a:endParaRPr lang="en-US"/>
-                    </a:p>
-                  </a:txBody>
-                  <a:tcPr/>
-                </a:tc>
-                <a:extLst>
-                  <a:ext uri="{0D108BD9-81ED-4DB2-BD59-A6C34878D82A}">
-                    <a16:rowId xmlns:a16="http://schemas.microsoft.com/office/drawing/2014/main" val="1776855705"/>
-                  </a:ext>
-                </a:extLst>
-              </a:tr>
-              <a:tr h="854198">
-                <a:tc gridSpan="2">
-                  <a:txBody>
-                    <a:bodyPr/>
-                    <a:lstStyle/>
-                    <a:p>
-                      <a:pPr marL="0" marR="0">
-                        <a:lnSpc>
-                          <a:spcPct val="115000"/>
-                        </a:lnSpc>
-                        <a:spcBef>
-                          <a:spcPts val="0"/>
-                        </a:spcBef>
-                        <a:spcAft>
-                          <a:spcPts val="1000"/>
-                        </a:spcAft>
-                      </a:pPr>
-                      <a:r>
-                        <a:rPr lang="en-US" sz="1100" b="1" dirty="0">
-                          <a:solidFill>
-                            <a:schemeClr val="tx1"/>
-                          </a:solidFill>
-                          <a:effectLst/>
-                        </a:rPr>
-                        <a:t>What is the potential impact on solutions, programs and services?</a:t>
-                      </a:r>
-                    </a:p>
-                    <a:p>
-                      <a:pPr marL="0" marR="0">
-                        <a:lnSpc>
-                          <a:spcPct val="115000"/>
-                        </a:lnSpc>
-                        <a:spcBef>
-                          <a:spcPts val="0"/>
-                        </a:spcBef>
-                        <a:spcAft>
-                          <a:spcPts val="1000"/>
-                        </a:spcAft>
-                      </a:pPr>
-                      <a:r>
-                        <a:rPr lang="en-US" sz="1100" dirty="0">
-                          <a:solidFill>
-                            <a:schemeClr val="tx1"/>
-                          </a:solidFill>
-                          <a:effectLst/>
-                        </a:rPr>
-                        <a:t>As we gain credibility, we will create a virtuous cycle of exponential growth and impact, crossing the chasm from Early Adopters into Mainstream Adoption by leaders and organizations across the Tech Services industry, materially improving the Tech Services industry and helping humanity.</a:t>
-                      </a:r>
-                    </a:p>
-                  </a:txBody>
-                  <a:tcPr marL="51885" marR="51885" marT="0" marB="0"/>
-                </a:tc>
-                <a:tc hMerge="1">
-                  <a:txBody>
-                    <a:bodyPr/>
-                    <a:lstStyle/>
-                    <a:p>
-                      <a:endParaRPr lang="en-US"/>
-                    </a:p>
-                  </a:txBody>
-                  <a:tcPr/>
-                </a:tc>
-                <a:extLst>
-                  <a:ext uri="{0D108BD9-81ED-4DB2-BD59-A6C34878D82A}">
-                    <a16:rowId xmlns:a16="http://schemas.microsoft.com/office/drawing/2014/main" val="3118231079"/>
-                  </a:ext>
-                </a:extLst>
-              </a:tr>
-              <a:tr h="1028660">
-                <a:tc gridSpan="2">
-                  <a:txBody>
-                    <a:bodyPr/>
-                    <a:lstStyle/>
-                    <a:p>
-                      <a:pPr marL="0" marR="0">
-                        <a:lnSpc>
-                          <a:spcPct val="115000"/>
-                        </a:lnSpc>
-                        <a:spcBef>
-                          <a:spcPts val="0"/>
-                        </a:spcBef>
-                        <a:spcAft>
-                          <a:spcPts val="1000"/>
-                        </a:spcAft>
-                      </a:pPr>
-                      <a:r>
-                        <a:rPr lang="en-US" sz="1100" b="1" dirty="0">
-                          <a:solidFill>
-                            <a:schemeClr val="tx1"/>
-                          </a:solidFill>
-                          <a:effectLst/>
-                        </a:rPr>
-                        <a:t>What is the potential impact on sales, distribution, deployment and support? </a:t>
-                      </a:r>
-                    </a:p>
-                    <a:p>
-                      <a:pPr marL="0" marR="0">
-                        <a:lnSpc>
-                          <a:spcPct val="115000"/>
-                        </a:lnSpc>
-                        <a:spcBef>
-                          <a:spcPts val="0"/>
-                        </a:spcBef>
-                        <a:spcAft>
-                          <a:spcPts val="1000"/>
-                        </a:spcAft>
-                      </a:pPr>
-                      <a:r>
-                        <a:rPr lang="en-US" sz="1100" dirty="0">
-                          <a:solidFill>
-                            <a:schemeClr val="tx1"/>
-                          </a:solidFill>
-                          <a:effectLst/>
-                        </a:rPr>
-                        <a:t>Demand Generation, Beneficiaries Engagement, and Delivery of Service for our MVP should be focused on getting leaders in recognizable organizations to become patrons and support industry innovation teams.  As our Service mature beyond MVP, and we find new revenue sources, we will be able to invest in more sophisticated Demand Generation, Beneficiary Engagement, and Delivery of Service activities to further accelerate growth and impact.</a:t>
-                      </a:r>
-                    </a:p>
-                  </a:txBody>
-                  <a:tcPr marL="51885" marR="51885" marT="0" marB="0"/>
-                </a:tc>
-                <a:tc hMerge="1">
-                  <a:txBody>
-                    <a:bodyPr/>
-                    <a:lstStyle/>
-                    <a:p>
-                      <a:endParaRPr lang="en-US"/>
-                    </a:p>
-                  </a:txBody>
-                  <a:tcPr/>
-                </a:tc>
-                <a:extLst>
-                  <a:ext uri="{0D108BD9-81ED-4DB2-BD59-A6C34878D82A}">
-                    <a16:rowId xmlns:a16="http://schemas.microsoft.com/office/drawing/2014/main" val="2482228238"/>
-                  </a:ext>
-                </a:extLst>
-              </a:tr>
-              <a:tr h="157843">
-                <a:tc gridSpan="2">
-                  <a:txBody>
-                    <a:bodyPr/>
-                    <a:lstStyle/>
-                    <a:p>
-                      <a:pPr marL="0" marR="0" algn="ctr">
-                        <a:lnSpc>
-                          <a:spcPct val="115000"/>
-                        </a:lnSpc>
-                        <a:spcBef>
-                          <a:spcPts val="0"/>
-                        </a:spcBef>
-                        <a:spcAft>
-                          <a:spcPts val="0"/>
-                        </a:spcAft>
-                      </a:pPr>
-                      <a:r>
-                        <a:rPr lang="en-US" sz="1100" b="1" dirty="0">
-                          <a:solidFill>
-                            <a:schemeClr val="tx1"/>
-                          </a:solidFill>
-                          <a:effectLst/>
-                        </a:rPr>
-                        <a:t>Forecasted Costs</a:t>
-                      </a:r>
-                      <a:endParaRPr lang="en-US" sz="1100" b="1" dirty="0">
-                        <a:solidFill>
-                          <a:schemeClr val="tx1"/>
-                        </a:solidFill>
-                        <a:effectLst/>
-                        <a:latin typeface="Calibri" panose="020F0502020204030204" pitchFamily="34" charset="0"/>
-                        <a:ea typeface="MS Mincho" panose="02020609040205080304" pitchFamily="49" charset="-128"/>
-                        <a:cs typeface="Times New Roman" panose="02020603050405020304" pitchFamily="18" charset="0"/>
-                      </a:endParaRPr>
-                    </a:p>
-                  </a:txBody>
-                  <a:tcPr marL="51885" marR="51885" marT="0" marB="0"/>
-                </a:tc>
-                <a:tc hMerge="1">
-                  <a:txBody>
-                    <a:bodyPr/>
-                    <a:lstStyle/>
-                    <a:p>
-                      <a:endParaRPr lang="en-US"/>
-                    </a:p>
-                  </a:txBody>
-                  <a:tcPr/>
-                </a:tc>
-                <a:extLst>
-                  <a:ext uri="{0D108BD9-81ED-4DB2-BD59-A6C34878D82A}">
-                    <a16:rowId xmlns:a16="http://schemas.microsoft.com/office/drawing/2014/main" val="3811219619"/>
-                  </a:ext>
-                </a:extLst>
-              </a:tr>
-              <a:tr h="933035">
-                <a:tc>
-                  <a:txBody>
-                    <a:bodyPr/>
-                    <a:lstStyle/>
-                    <a:p>
-                      <a:pPr marL="0" marR="0">
-                        <a:lnSpc>
-                          <a:spcPct val="115000"/>
-                        </a:lnSpc>
-                        <a:spcBef>
-                          <a:spcPts val="0"/>
-                        </a:spcBef>
-                        <a:spcAft>
-                          <a:spcPts val="1000"/>
-                        </a:spcAft>
-                      </a:pPr>
-                      <a:r>
-                        <a:rPr lang="en-US" sz="1100" b="1" dirty="0">
-                          <a:solidFill>
-                            <a:schemeClr val="tx1"/>
-                          </a:solidFill>
-                          <a:effectLst/>
-                        </a:rPr>
-                        <a:t>MVP Cost:</a:t>
-                      </a:r>
-                    </a:p>
-                    <a:p>
-                      <a:pPr marL="0" marR="0">
-                        <a:lnSpc>
-                          <a:spcPct val="115000"/>
-                        </a:lnSpc>
-                        <a:spcBef>
-                          <a:spcPts val="0"/>
-                        </a:spcBef>
-                        <a:spcAft>
-                          <a:spcPts val="1000"/>
-                        </a:spcAft>
-                      </a:pPr>
-                      <a:r>
-                        <a:rPr lang="en-US" sz="1100" dirty="0">
-                          <a:solidFill>
-                            <a:schemeClr val="tx1"/>
-                          </a:solidFill>
-                          <a:effectLst/>
-                        </a:rPr>
-                        <a:t>Estimate: $10K.</a:t>
-                      </a:r>
-                      <a:endParaRPr lang="en-US" sz="1100" dirty="0">
-                        <a:solidFill>
-                          <a:schemeClr val="tx1"/>
-                        </a:solidFill>
-                        <a:effectLst/>
-                        <a:latin typeface="Calibri" panose="020F0502020204030204" pitchFamily="34" charset="0"/>
-                        <a:ea typeface="MS Mincho" panose="02020609040205080304" pitchFamily="49" charset="-128"/>
-                        <a:cs typeface="Times New Roman" panose="02020603050405020304" pitchFamily="18" charset="0"/>
-                      </a:endParaRPr>
-                    </a:p>
-                  </a:txBody>
-                  <a:tcPr marL="51885" marR="51885" marT="0" marB="0"/>
-                </a:tc>
-                <a:tc>
-                  <a:txBody>
-                    <a:bodyPr/>
-                    <a:lstStyle/>
-                    <a:p>
-                      <a:pPr marL="0" marR="0">
-                        <a:lnSpc>
-                          <a:spcPct val="115000"/>
-                        </a:lnSpc>
-                        <a:spcBef>
-                          <a:spcPts val="0"/>
-                        </a:spcBef>
-                        <a:spcAft>
-                          <a:spcPts val="1000"/>
-                        </a:spcAft>
-                      </a:pPr>
-                      <a:r>
-                        <a:rPr lang="en-US" sz="1100" b="1" dirty="0">
-                          <a:solidFill>
-                            <a:schemeClr val="tx1"/>
-                          </a:solidFill>
-                          <a:effectLst/>
-                        </a:rPr>
-                        <a:t>Estimated Implementation Cost:</a:t>
-                      </a:r>
-                    </a:p>
-                    <a:p>
-                      <a:pPr marL="0" marR="0">
-                        <a:lnSpc>
-                          <a:spcPct val="115000"/>
-                        </a:lnSpc>
-                        <a:spcBef>
-                          <a:spcPts val="0"/>
-                        </a:spcBef>
-                        <a:spcAft>
-                          <a:spcPts val="1000"/>
-                        </a:spcAft>
-                      </a:pPr>
-                      <a:r>
-                        <a:rPr lang="en-US" sz="1100" dirty="0">
-                          <a:solidFill>
-                            <a:schemeClr val="tx1"/>
-                          </a:solidFill>
-                          <a:effectLst/>
-                        </a:rPr>
-                        <a:t>Initial estimate: $125K</a:t>
-                      </a:r>
-                    </a:p>
-                  </a:txBody>
-                  <a:tcPr marL="51885" marR="51885" marT="0" marB="0"/>
-                </a:tc>
-                <a:extLst>
-                  <a:ext uri="{0D108BD9-81ED-4DB2-BD59-A6C34878D82A}">
-                    <a16:rowId xmlns:a16="http://schemas.microsoft.com/office/drawing/2014/main" val="442753502"/>
-                  </a:ext>
-                </a:extLst>
-              </a:tr>
-              <a:tr h="157843">
-                <a:tc gridSpan="2">
-                  <a:txBody>
-                    <a:bodyPr/>
-                    <a:lstStyle/>
-                    <a:p>
-                      <a:pPr marL="0" marR="0" algn="ctr">
-                        <a:lnSpc>
-                          <a:spcPct val="115000"/>
-                        </a:lnSpc>
-                        <a:spcBef>
-                          <a:spcPts val="0"/>
-                        </a:spcBef>
-                        <a:spcAft>
-                          <a:spcPts val="0"/>
-                        </a:spcAft>
-                      </a:pPr>
-                      <a:r>
-                        <a:rPr lang="en-US" sz="1100" b="1" dirty="0">
-                          <a:solidFill>
-                            <a:schemeClr val="tx1"/>
-                          </a:solidFill>
-                          <a:effectLst/>
-                        </a:rPr>
-                        <a:t>Forecasted Returns </a:t>
-                      </a:r>
-                      <a:endParaRPr lang="en-US" sz="1100" b="1" dirty="0">
-                        <a:solidFill>
-                          <a:schemeClr val="tx1"/>
-                        </a:solidFill>
-                        <a:effectLst/>
-                        <a:latin typeface="Calibri" panose="020F0502020204030204" pitchFamily="34" charset="0"/>
-                        <a:ea typeface="MS Mincho" panose="02020609040205080304" pitchFamily="49" charset="-128"/>
-                        <a:cs typeface="Times New Roman" panose="02020603050405020304" pitchFamily="18" charset="0"/>
-                      </a:endParaRPr>
-                    </a:p>
-                  </a:txBody>
-                  <a:tcPr marL="51885" marR="51885" marT="0" marB="0"/>
-                </a:tc>
-                <a:tc hMerge="1">
-                  <a:txBody>
-                    <a:bodyPr/>
-                    <a:lstStyle/>
-                    <a:p>
-                      <a:endParaRPr lang="en-US"/>
-                    </a:p>
-                  </a:txBody>
-                  <a:tcPr/>
-                </a:tc>
-                <a:extLst>
-                  <a:ext uri="{0D108BD9-81ED-4DB2-BD59-A6C34878D82A}">
-                    <a16:rowId xmlns:a16="http://schemas.microsoft.com/office/drawing/2014/main" val="2665873674"/>
-                  </a:ext>
-                </a:extLst>
-              </a:tr>
-              <a:tr h="620770">
-                <a:tc gridSpan="2">
-                  <a:txBody>
-                    <a:bodyPr/>
-                    <a:lstStyle/>
-                    <a:p>
-                      <a:pPr marL="0" marR="0">
-                        <a:lnSpc>
-                          <a:spcPct val="115000"/>
-                        </a:lnSpc>
-                        <a:spcBef>
-                          <a:spcPts val="0"/>
-                        </a:spcBef>
-                        <a:spcAft>
-                          <a:spcPts val="1000"/>
-                        </a:spcAft>
-                      </a:pPr>
-                      <a:r>
-                        <a:rPr lang="en-US" sz="1100" b="1" dirty="0">
-                          <a:solidFill>
-                            <a:schemeClr val="tx1"/>
-                          </a:solidFill>
-                          <a:effectLst/>
-                        </a:rPr>
-                        <a:t>Type of Return:</a:t>
-                      </a:r>
-                    </a:p>
-                    <a:p>
-                      <a:pPr marL="0" marR="0">
-                        <a:lnSpc>
-                          <a:spcPct val="115000"/>
-                        </a:lnSpc>
-                        <a:spcBef>
-                          <a:spcPts val="0"/>
-                        </a:spcBef>
-                        <a:spcAft>
-                          <a:spcPts val="1000"/>
-                        </a:spcAft>
-                      </a:pPr>
-                      <a:r>
-                        <a:rPr lang="en-US" sz="1100" dirty="0">
-                          <a:solidFill>
-                            <a:schemeClr val="tx1"/>
-                          </a:solidFill>
-                          <a:effectLst/>
-                        </a:rPr>
-                        <a:t>Leading Indicators:  Increasing numbers of industry solutions adopted by and materially benefiting Tech Services industry enterprises, tripling every 2-3 years</a:t>
-                      </a:r>
-                      <a:br>
-                        <a:rPr lang="en-US" sz="1100" dirty="0">
-                          <a:solidFill>
-                            <a:schemeClr val="tx1"/>
-                          </a:solidFill>
-                          <a:effectLst/>
-                          <a:latin typeface="Arial" panose="020B0604020202020204" pitchFamily="34" charset="0"/>
-                          <a:ea typeface="MS Mincho" panose="02020609040205080304" pitchFamily="49" charset="-128"/>
-                          <a:cs typeface="Arial" panose="020B0604020202020204" pitchFamily="34" charset="0"/>
-                        </a:rPr>
-                      </a:br>
-                      <a:r>
-                        <a:rPr lang="en-US" sz="1100" dirty="0">
-                          <a:solidFill>
-                            <a:schemeClr val="tx1"/>
-                          </a:solidFill>
-                          <a:effectLst/>
-                          <a:latin typeface="Arial" panose="020B0604020202020204" pitchFamily="34" charset="0"/>
-                          <a:ea typeface="MS Mincho" panose="02020609040205080304" pitchFamily="49" charset="-128"/>
-                          <a:cs typeface="Arial" panose="020B0604020202020204" pitchFamily="34" charset="0"/>
-                        </a:rPr>
-                        <a:t>Lagging indicators:  Increasing benefit to subscribers, patrons, the Tech Services industry, and humanity, as measured by subscriber and patron surveys</a:t>
-                      </a:r>
-                      <a:endParaRPr lang="en-US" sz="1100" dirty="0">
-                        <a:solidFill>
-                          <a:schemeClr val="tx1"/>
-                        </a:solidFill>
-                        <a:effectLst/>
-                        <a:latin typeface="Arial" panose="020B0604020202020204" pitchFamily="34" charset="0"/>
-                        <a:cs typeface="Arial" panose="020B0604020202020204" pitchFamily="34" charset="0"/>
-                      </a:endParaRPr>
-                    </a:p>
-                  </a:txBody>
-                  <a:tcPr marL="51885" marR="51885" marT="0" marB="0"/>
-                </a:tc>
-                <a:tc hMerge="1">
-                  <a:txBody>
-                    <a:bodyPr/>
-                    <a:lstStyle/>
-                    <a:p>
-                      <a:endParaRPr lang="en-US"/>
-                    </a:p>
-                  </a:txBody>
-                  <a:tcPr/>
-                </a:tc>
-                <a:extLst>
-                  <a:ext uri="{0D108BD9-81ED-4DB2-BD59-A6C34878D82A}">
-                    <a16:rowId xmlns:a16="http://schemas.microsoft.com/office/drawing/2014/main" val="617274721"/>
-                  </a:ext>
-                </a:extLst>
-              </a:tr>
-            </a:tbl>
-          </a:graphicData>
-        </a:graphic>
-      </p:graphicFrame>
-      <p:sp>
-        <p:nvSpPr>
-          <p:cNvPr id="2" name="Rectangle 1">
-            <a:extLst>
-              <a:ext uri="{FF2B5EF4-FFF2-40B4-BE49-F238E27FC236}">
-                <a16:creationId xmlns:a16="http://schemas.microsoft.com/office/drawing/2014/main" id="{0AFA4691-0634-7178-C749-C47ECD95F252}"/>
-              </a:ext>
-            </a:extLst>
-          </p:cNvPr>
-          <p:cNvSpPr/>
-          <p:nvPr/>
-        </p:nvSpPr>
-        <p:spPr>
-          <a:xfrm>
-            <a:off x="969319" y="-1"/>
-            <a:ext cx="2743200" cy="263047"/>
-          </a:xfrm>
-          <a:prstGeom prst="rect">
-            <a:avLst/>
-          </a:prstGeom>
-          <a:solidFill>
-            <a:schemeClr val="bg1"/>
-          </a:solidFill>
-        </p:spPr>
-        <p:style>
-          <a:lnRef idx="2">
-            <a:schemeClr val="accent1">
-              <a:shade val="15000"/>
-            </a:schemeClr>
-          </a:lnRef>
-          <a:fillRef idx="1">
-            <a:schemeClr val="accent1"/>
-          </a:fillRef>
-          <a:effectRef idx="0">
-            <a:schemeClr val="accent1"/>
-          </a:effectRef>
-          <a:fontRef idx="minor">
-            <a:schemeClr val="lt1"/>
-          </a:fontRef>
-        </p:style>
-        <p:txBody>
-          <a:bodyPr rtlCol="0" anchor="ctr"/>
-          <a:lstStyle/>
-          <a:p>
-            <a:pPr marL="0" marR="0" lvl="0" indent="0" algn="ctr" defTabSz="914400" rtl="0" eaLnBrk="1" fontAlgn="auto" latinLnBrk="0" hangingPunct="1">
-              <a:lnSpc>
-                <a:spcPct val="100000"/>
-              </a:lnSpc>
-              <a:spcBef>
-                <a:spcPts val="0"/>
-              </a:spcBef>
-              <a:spcAft>
-                <a:spcPts val="0"/>
-              </a:spcAft>
-              <a:buClr>
-                <a:srgbClr val="000000"/>
-              </a:buClr>
-              <a:buSzTx/>
-              <a:buFont typeface="Arial"/>
-              <a:buNone/>
-              <a:tabLst/>
-              <a:defRPr/>
-            </a:pPr>
-            <a:r>
-              <a:rPr kumimoji="0" lang="en-US" sz="1400" b="0" i="0" u="none" strike="noStrike" kern="0" cap="none" spc="0" normalizeH="0" baseline="0" noProof="0" dirty="0">
-                <a:ln>
-                  <a:noFill/>
-                </a:ln>
-                <a:solidFill>
-                  <a:srgbClr val="000000"/>
-                </a:solidFill>
-                <a:effectLst/>
-                <a:uLnTx/>
-                <a:uFillTx/>
-                <a:latin typeface="Arial"/>
-                <a:ea typeface="+mn-ea"/>
-                <a:cs typeface="+mn-cs"/>
-                <a:sym typeface="Arial"/>
-              </a:rPr>
-              <a:t>Reviewing Stage</a:t>
-            </a:r>
-          </a:p>
-        </p:txBody>
-      </p:sp>
-      <p:sp>
-        <p:nvSpPr>
-          <p:cNvPr id="4" name="Rectangle 3">
-            <a:extLst>
-              <a:ext uri="{FF2B5EF4-FFF2-40B4-BE49-F238E27FC236}">
-                <a16:creationId xmlns:a16="http://schemas.microsoft.com/office/drawing/2014/main" id="{9982B7C1-7287-28F1-91AA-FCCF5AECD714}"/>
-              </a:ext>
-            </a:extLst>
-          </p:cNvPr>
-          <p:cNvSpPr/>
-          <p:nvPr/>
-        </p:nvSpPr>
-        <p:spPr>
-          <a:xfrm>
-            <a:off x="3733400" y="-1"/>
-            <a:ext cx="2743200" cy="263047"/>
-          </a:xfrm>
-          <a:prstGeom prst="rect">
-            <a:avLst/>
-          </a:prstGeom>
-          <a:solidFill>
-            <a:schemeClr val="tx1"/>
-          </a:solidFill>
-        </p:spPr>
-        <p:style>
-          <a:lnRef idx="2">
-            <a:schemeClr val="accent1">
-              <a:shade val="15000"/>
-            </a:schemeClr>
-          </a:lnRef>
-          <a:fillRef idx="1">
-            <a:schemeClr val="accent1"/>
-          </a:fillRef>
-          <a:effectRef idx="0">
-            <a:schemeClr val="accent1"/>
-          </a:effectRef>
-          <a:fontRef idx="minor">
-            <a:schemeClr val="lt1"/>
-          </a:fontRef>
-        </p:style>
-        <p:txBody>
-          <a:bodyPr rtlCol="0" anchor="ctr"/>
-          <a:lstStyle/>
-          <a:p>
-            <a:pPr marL="0" marR="0" lvl="0" indent="0" algn="ctr" defTabSz="914400" rtl="0" eaLnBrk="1" fontAlgn="auto" latinLnBrk="0" hangingPunct="1">
-              <a:lnSpc>
-                <a:spcPct val="100000"/>
-              </a:lnSpc>
-              <a:spcBef>
-                <a:spcPts val="0"/>
-              </a:spcBef>
-              <a:spcAft>
-                <a:spcPts val="0"/>
-              </a:spcAft>
-              <a:buClr>
-                <a:srgbClr val="000000"/>
-              </a:buClr>
-              <a:buSzTx/>
-              <a:buFont typeface="Arial"/>
-              <a:buNone/>
-              <a:tabLst/>
-              <a:defRPr/>
-            </a:pPr>
-            <a:r>
-              <a:rPr kumimoji="0" lang="en-US" sz="1400" b="0" i="0" u="none" strike="noStrike" kern="0" cap="none" spc="0" normalizeH="0" baseline="0" noProof="0" dirty="0">
-                <a:ln>
-                  <a:noFill/>
-                </a:ln>
-                <a:solidFill>
-                  <a:srgbClr val="FFFFFF"/>
-                </a:solidFill>
-                <a:effectLst/>
-                <a:uLnTx/>
-                <a:uFillTx/>
-                <a:latin typeface="Arial"/>
-                <a:ea typeface="+mn-ea"/>
-                <a:cs typeface="+mn-cs"/>
-                <a:sym typeface="Arial"/>
-              </a:rPr>
-              <a:t>Analysis Stage</a:t>
-            </a:r>
-          </a:p>
-        </p:txBody>
-      </p:sp>
-      <p:sp>
-        <p:nvSpPr>
-          <p:cNvPr id="5" name="Rectangle 4">
-            <a:extLst>
-              <a:ext uri="{FF2B5EF4-FFF2-40B4-BE49-F238E27FC236}">
-                <a16:creationId xmlns:a16="http://schemas.microsoft.com/office/drawing/2014/main" id="{AC5D8176-2D3A-BE52-A73C-694BE157E290}"/>
-              </a:ext>
-            </a:extLst>
-          </p:cNvPr>
-          <p:cNvSpPr/>
-          <p:nvPr/>
-        </p:nvSpPr>
-        <p:spPr>
-          <a:xfrm>
-            <a:off x="6484954" y="-1"/>
-            <a:ext cx="2743200" cy="263047"/>
-          </a:xfrm>
-          <a:prstGeom prst="rect">
-            <a:avLst/>
-          </a:prstGeom>
-          <a:solidFill>
-            <a:schemeClr val="bg1"/>
-          </a:solidFill>
-        </p:spPr>
-        <p:style>
-          <a:lnRef idx="2">
-            <a:schemeClr val="accent1">
-              <a:shade val="15000"/>
-            </a:schemeClr>
-          </a:lnRef>
-          <a:fillRef idx="1">
-            <a:schemeClr val="accent1"/>
-          </a:fillRef>
-          <a:effectRef idx="0">
-            <a:schemeClr val="accent1"/>
-          </a:effectRef>
-          <a:fontRef idx="minor">
-            <a:schemeClr val="lt1"/>
-          </a:fontRef>
-        </p:style>
-        <p:txBody>
-          <a:bodyPr rtlCol="0" anchor="ctr"/>
-          <a:lstStyle/>
-          <a:p>
-            <a:pPr marL="0" marR="0" lvl="0" indent="0" algn="ctr" defTabSz="914400" rtl="0" eaLnBrk="1" fontAlgn="auto" latinLnBrk="0" hangingPunct="1">
-              <a:lnSpc>
-                <a:spcPct val="100000"/>
-              </a:lnSpc>
-              <a:spcBef>
-                <a:spcPts val="0"/>
-              </a:spcBef>
-              <a:spcAft>
-                <a:spcPts val="0"/>
-              </a:spcAft>
-              <a:buClr>
-                <a:srgbClr val="000000"/>
-              </a:buClr>
-              <a:buSzTx/>
-              <a:buFont typeface="Arial"/>
-              <a:buNone/>
-              <a:tabLst/>
-              <a:defRPr/>
-            </a:pPr>
-            <a:r>
-              <a:rPr kumimoji="0" lang="en-US" sz="1400" b="0" i="0" u="none" strike="noStrike" kern="0" cap="none" spc="0" normalizeH="0" baseline="0" noProof="0" dirty="0">
-                <a:ln>
-                  <a:noFill/>
-                </a:ln>
-                <a:solidFill>
-                  <a:srgbClr val="000000"/>
-                </a:solidFill>
-                <a:effectLst/>
-                <a:uLnTx/>
-                <a:uFillTx/>
-                <a:latin typeface="Arial"/>
-                <a:ea typeface="+mn-ea"/>
-                <a:cs typeface="+mn-cs"/>
-                <a:sym typeface="Arial"/>
-              </a:rPr>
-              <a:t>Implementing - MVP Stage</a:t>
-            </a:r>
-          </a:p>
-        </p:txBody>
-      </p:sp>
-      <p:sp>
-        <p:nvSpPr>
-          <p:cNvPr id="7" name="Google Shape;18;p9">
-            <a:extLst>
-              <a:ext uri="{FF2B5EF4-FFF2-40B4-BE49-F238E27FC236}">
-                <a16:creationId xmlns:a16="http://schemas.microsoft.com/office/drawing/2014/main" id="{7FE450E7-5500-1557-7587-B39724023C17}"/>
-              </a:ext>
-            </a:extLst>
-          </p:cNvPr>
-          <p:cNvSpPr txBox="1">
-            <a:spLocks noGrp="1"/>
-          </p:cNvSpPr>
-          <p:nvPr>
-            <p:ph type="ftr" idx="11"/>
-          </p:nvPr>
-        </p:nvSpPr>
-        <p:spPr>
-          <a:xfrm>
-            <a:off x="4038600" y="6540418"/>
-            <a:ext cx="4114800" cy="365125"/>
-          </a:xfrm>
-          <a:prstGeom prst="rect">
-            <a:avLst/>
-          </a:prstGeom>
-          <a:noFill/>
-          <a:ln>
-            <a:noFill/>
-          </a:ln>
-        </p:spPr>
-        <p:txBody>
-          <a:bodyPr spcFirstLastPara="1" wrap="square" lIns="91425" tIns="45700" rIns="91425" bIns="45700" anchor="ctr" anchorCtr="0">
-            <a:noAutofit/>
-          </a:bodyPr>
-          <a:lstStyle>
-            <a:lvl1pPr lvl="0" algn="ctr">
-              <a:spcBef>
-                <a:spcPts val="0"/>
-              </a:spcBef>
-              <a:spcAft>
-                <a:spcPts val="0"/>
-              </a:spcAft>
-              <a:buSzPts val="1400"/>
-              <a:buNone/>
-              <a:defRPr/>
-            </a:lvl1pPr>
-            <a:lvl2pPr lvl="1" algn="l">
-              <a:spcBef>
-                <a:spcPts val="0"/>
-              </a:spcBef>
-              <a:spcAft>
-                <a:spcPts val="0"/>
-              </a:spcAft>
-              <a:buSzPts val="1400"/>
-              <a:buNone/>
-              <a:defRPr/>
-            </a:lvl2pPr>
-            <a:lvl3pPr lvl="2" algn="l">
-              <a:spcBef>
-                <a:spcPts val="0"/>
-              </a:spcBef>
-              <a:spcAft>
-                <a:spcPts val="0"/>
-              </a:spcAft>
-              <a:buSzPts val="1400"/>
-              <a:buNone/>
-              <a:defRPr/>
-            </a:lvl3pPr>
-            <a:lvl4pPr lvl="3" algn="l">
-              <a:spcBef>
-                <a:spcPts val="0"/>
-              </a:spcBef>
-              <a:spcAft>
-                <a:spcPts val="0"/>
-              </a:spcAft>
-              <a:buSzPts val="1400"/>
-              <a:buNone/>
-              <a:defRPr/>
-            </a:lvl4pPr>
-            <a:lvl5pPr lvl="4" algn="l">
-              <a:spcBef>
-                <a:spcPts val="0"/>
-              </a:spcBef>
-              <a:spcAft>
-                <a:spcPts val="0"/>
-              </a:spcAft>
-              <a:buSzPts val="1400"/>
-              <a:buNone/>
-              <a:defRPr/>
-            </a:lvl5pPr>
-            <a:lvl6pPr lvl="5" algn="l">
-              <a:spcBef>
-                <a:spcPts val="0"/>
-              </a:spcBef>
-              <a:spcAft>
-                <a:spcPts val="0"/>
-              </a:spcAft>
-              <a:buSzPts val="1400"/>
-              <a:buNone/>
-              <a:defRPr/>
-            </a:lvl6pPr>
-            <a:lvl7pPr lvl="6" algn="l">
-              <a:spcBef>
-                <a:spcPts val="0"/>
-              </a:spcBef>
-              <a:spcAft>
-                <a:spcPts val="0"/>
-              </a:spcAft>
-              <a:buSzPts val="1400"/>
-              <a:buNone/>
-              <a:defRPr/>
-            </a:lvl7pPr>
-            <a:lvl8pPr lvl="7" algn="l">
-              <a:spcBef>
-                <a:spcPts val="0"/>
-              </a:spcBef>
-              <a:spcAft>
-                <a:spcPts val="0"/>
-              </a:spcAft>
-              <a:buSzPts val="1400"/>
-              <a:buNone/>
-              <a:defRPr/>
-            </a:lvl8pPr>
-            <a:lvl9pPr lvl="8" algn="l">
-              <a:spcBef>
-                <a:spcPts val="0"/>
-              </a:spcBef>
-              <a:spcAft>
-                <a:spcPts val="0"/>
-              </a:spcAft>
-              <a:buSzPts val="1400"/>
-              <a:buNone/>
-              <a:defRPr/>
-            </a:lvl9pPr>
-          </a:lstStyle>
-          <a:p>
-            <a:r>
-              <a:rPr lang="en-US" dirty="0"/>
-              <a:t>Proprietary and Confidential Information</a:t>
-            </a:r>
-            <a:endParaRPr dirty="0"/>
-          </a:p>
-        </p:txBody>
-      </p:sp>
-    </p:spTree>
-    <p:extLst>
-      <p:ext uri="{BB962C8B-B14F-4D97-AF65-F5344CB8AC3E}">
-        <p14:creationId xmlns:p14="http://schemas.microsoft.com/office/powerpoint/2010/main" val="4255637138"/>
-      </p:ext>
-    </p:extLst>
-  </p:cSld>
-  <p:clrMapOvr>
-    <a:masterClrMapping/>
-  </p:clrMapOvr>
-</p:sld>
-</file>
-
-<file path=ppt/slides/slide11.xml><?xml version="1.0" encoding="utf-8"?>
-<p:sld xmlns:a="http://schemas.openxmlformats.org/drawingml/2006/main" xmlns:r="http://schemas.openxmlformats.org/officeDocument/2006/relationships" xmlns:p="http://schemas.openxmlformats.org/presentationml/2006/main">
-  <p:cSld>
-    <p:spTree>
-      <p:nvGrpSpPr>
-        <p:cNvPr id="1" name="Shape 95"/>
-        <p:cNvGrpSpPr/>
-        <p:nvPr/>
-      </p:nvGrpSpPr>
-      <p:grpSpPr>
-        <a:xfrm>
-          <a:off x="0" y="0"/>
-          <a:ext cx="0" cy="0"/>
-          <a:chOff x="0" y="0"/>
-          <a:chExt cx="0" cy="0"/>
-        </a:xfrm>
-      </p:grpSpPr>
-      <p:sp>
-        <p:nvSpPr>
-          <p:cNvPr id="96" name="Google Shape;96;p2"/>
-          <p:cNvSpPr txBox="1">
-            <a:spLocks noGrp="1"/>
-          </p:cNvSpPr>
-          <p:nvPr>
-            <p:ph type="title"/>
-          </p:nvPr>
-        </p:nvSpPr>
-        <p:spPr>
-          <a:prstGeom prst="rect">
-            <a:avLst/>
-          </a:prstGeom>
-          <a:noFill/>
-          <a:ln>
-            <a:noFill/>
-          </a:ln>
-        </p:spPr>
-        <p:txBody>
-          <a:bodyPr spcFirstLastPara="1" wrap="square" lIns="91425" tIns="45700" rIns="91425" bIns="45700" anchor="ctr" anchorCtr="0">
-            <a:normAutofit/>
-          </a:bodyPr>
-          <a:lstStyle/>
-          <a:p>
-            <a:pPr marL="0" lvl="0" indent="0" algn="l" rtl="0">
-              <a:lnSpc>
-                <a:spcPct val="90000"/>
-              </a:lnSpc>
-              <a:spcBef>
-                <a:spcPts val="0"/>
-              </a:spcBef>
-              <a:spcAft>
-                <a:spcPts val="0"/>
-              </a:spcAft>
-              <a:buClr>
-                <a:schemeClr val="dk1"/>
-              </a:buClr>
-              <a:buSzPts val="4400"/>
-              <a:buFont typeface="Calibri"/>
-              <a:buNone/>
-            </a:pPr>
-            <a:r>
-              <a:rPr lang="en-US" dirty="0"/>
-              <a:t>Lean Business Case (4/5)</a:t>
-            </a:r>
-            <a:endParaRPr dirty="0"/>
-          </a:p>
-        </p:txBody>
-      </p:sp>
-      <p:graphicFrame>
-        <p:nvGraphicFramePr>
-          <p:cNvPr id="2" name="Table 1">
-            <a:extLst>
-              <a:ext uri="{FF2B5EF4-FFF2-40B4-BE49-F238E27FC236}">
-                <a16:creationId xmlns:a16="http://schemas.microsoft.com/office/drawing/2014/main" id="{59DCEAC8-DB72-C8D9-0DB4-F8D83D801ADB}"/>
-              </a:ext>
-            </a:extLst>
-          </p:cNvPr>
-          <p:cNvGraphicFramePr>
-            <a:graphicFrameLocks noGrp="1"/>
-          </p:cNvGraphicFramePr>
-          <p:nvPr>
-            <p:extLst>
-              <p:ext uri="{D42A27DB-BD31-4B8C-83A1-F6EECF244321}">
-                <p14:modId xmlns:p14="http://schemas.microsoft.com/office/powerpoint/2010/main" val="1723319543"/>
-              </p:ext>
-            </p:extLst>
-          </p:nvPr>
-        </p:nvGraphicFramePr>
-        <p:xfrm>
-          <a:off x="838199" y="1690688"/>
-          <a:ext cx="10610590" cy="4527117"/>
-        </p:xfrm>
-        <a:graphic>
-          <a:graphicData uri="http://schemas.openxmlformats.org/drawingml/2006/table">
-            <a:tbl>
-              <a:tblPr firstRow="1" firstCol="1" bandRow="1" bandCol="1">
-                <a:tableStyleId>{5940675A-B579-460E-94D1-54222C63F5DA}</a:tableStyleId>
-              </a:tblPr>
-              <a:tblGrid>
-                <a:gridCol w="10610590">
-                  <a:extLst>
-                    <a:ext uri="{9D8B030D-6E8A-4147-A177-3AD203B41FA5}">
-                      <a16:colId xmlns:a16="http://schemas.microsoft.com/office/drawing/2014/main" val="3385405187"/>
-                    </a:ext>
-                  </a:extLst>
-                </a:gridCol>
-              </a:tblGrid>
-              <a:tr h="400405">
-                <a:tc>
-                  <a:txBody>
-                    <a:bodyPr/>
-                    <a:lstStyle/>
-                    <a:p>
-                      <a:pPr marL="0" marR="0" algn="ctr">
-                        <a:lnSpc>
-                          <a:spcPct val="115000"/>
-                        </a:lnSpc>
-                        <a:spcBef>
-                          <a:spcPts val="0"/>
-                        </a:spcBef>
-                        <a:spcAft>
-                          <a:spcPts val="0"/>
-                        </a:spcAft>
-                      </a:pPr>
-                      <a:r>
-                        <a:rPr lang="en-US" sz="1100" b="1" dirty="0">
-                          <a:solidFill>
-                            <a:schemeClr val="tx1"/>
-                          </a:solidFill>
-                          <a:effectLst/>
-                        </a:rPr>
-                        <a:t>Development Strategy </a:t>
-                      </a:r>
-                      <a:endParaRPr lang="en-US" sz="1100" b="1" dirty="0">
-                        <a:solidFill>
-                          <a:schemeClr val="tx1"/>
-                        </a:solidFill>
-                        <a:effectLst/>
-                        <a:latin typeface="Calibri" panose="020F0502020204030204" pitchFamily="34" charset="0"/>
-                        <a:ea typeface="MS Mincho" panose="02020609040205080304" pitchFamily="49" charset="-128"/>
-                        <a:cs typeface="Times New Roman" panose="02020603050405020304" pitchFamily="18" charset="0"/>
-                      </a:endParaRPr>
-                    </a:p>
-                  </a:txBody>
-                  <a:tcPr marL="68580" marR="68580" marT="0" marB="0"/>
-                </a:tc>
-                <a:extLst>
-                  <a:ext uri="{0D108BD9-81ED-4DB2-BD59-A6C34878D82A}">
-                    <a16:rowId xmlns:a16="http://schemas.microsoft.com/office/drawing/2014/main" val="1269012631"/>
-                  </a:ext>
-                </a:extLst>
-              </a:tr>
-              <a:tr h="1110418">
-                <a:tc>
-                  <a:txBody>
-                    <a:bodyPr/>
-                    <a:lstStyle/>
-                    <a:p>
-                      <a:pPr marL="0" marR="0">
-                        <a:lnSpc>
-                          <a:spcPct val="115000"/>
-                        </a:lnSpc>
-                        <a:spcBef>
-                          <a:spcPts val="0"/>
-                        </a:spcBef>
-                        <a:spcAft>
-                          <a:spcPts val="1000"/>
-                        </a:spcAft>
-                      </a:pPr>
-                      <a:r>
-                        <a:rPr lang="en-US" sz="1100" b="1" dirty="0">
-                          <a:solidFill>
-                            <a:schemeClr val="tx1"/>
-                          </a:solidFill>
-                          <a:effectLst/>
-                        </a:rPr>
-                        <a:t>In-house or Outsourced Development:</a:t>
-                      </a:r>
-                    </a:p>
-                    <a:p>
-                      <a:pPr marL="0" marR="0">
-                        <a:lnSpc>
-                          <a:spcPct val="115000"/>
-                        </a:lnSpc>
-                        <a:spcBef>
-                          <a:spcPts val="0"/>
-                        </a:spcBef>
-                        <a:spcAft>
-                          <a:spcPts val="0"/>
-                        </a:spcAft>
-                      </a:pPr>
-                      <a:r>
-                        <a:rPr lang="en-US" sz="1100" dirty="0">
-                          <a:solidFill>
-                            <a:schemeClr val="tx1"/>
-                          </a:solidFill>
-                          <a:effectLst/>
-                        </a:rPr>
-                        <a:t>In-house development:  </a:t>
-                      </a:r>
-                    </a:p>
-                    <a:p>
-                      <a:pPr marL="61913" marR="0" indent="-61913">
-                        <a:lnSpc>
-                          <a:spcPct val="115000"/>
-                        </a:lnSpc>
-                        <a:spcBef>
-                          <a:spcPts val="0"/>
-                        </a:spcBef>
-                        <a:spcAft>
-                          <a:spcPts val="0"/>
-                        </a:spcAft>
-                        <a:buFont typeface="Arial" panose="020B0604020202020204" pitchFamily="34" charset="0"/>
-                        <a:buChar char="•"/>
-                        <a:tabLst/>
-                      </a:pPr>
-                      <a:r>
-                        <a:rPr lang="en-US" sz="1100" dirty="0">
-                          <a:solidFill>
-                            <a:schemeClr val="tx1"/>
-                          </a:solidFill>
-                          <a:effectLst/>
-                        </a:rPr>
-                        <a:t> Service Strategy, Context, Intent, Development Kit, Demand Generation Kit, Beneficiaries Engagement Kit, and Delivery of Service Kit</a:t>
-                      </a:r>
-                      <a:br>
-                        <a:rPr lang="en-US" sz="1100" dirty="0">
-                          <a:solidFill>
-                            <a:schemeClr val="tx1"/>
-                          </a:solidFill>
-                          <a:effectLst/>
-                          <a:latin typeface="Arial" panose="020B0604020202020204" pitchFamily="34" charset="0"/>
-                          <a:ea typeface="MS Mincho" panose="02020609040205080304" pitchFamily="49" charset="-128"/>
-                          <a:cs typeface="Arial" panose="020B0604020202020204" pitchFamily="34" charset="0"/>
-                        </a:rPr>
-                      </a:br>
-                      <a:endParaRPr lang="en-US" sz="1100" dirty="0">
-                        <a:solidFill>
-                          <a:schemeClr val="tx1"/>
-                        </a:solidFill>
-                        <a:effectLst/>
-                        <a:latin typeface="Arial" panose="020B0604020202020204" pitchFamily="34" charset="0"/>
-                        <a:ea typeface="MS Mincho" panose="02020609040205080304" pitchFamily="49" charset="-128"/>
-                        <a:cs typeface="Arial" panose="020B0604020202020204" pitchFamily="34" charset="0"/>
-                      </a:endParaRPr>
-                    </a:p>
-                    <a:p>
-                      <a:pPr marL="0" marR="0" indent="0" algn="l" rtl="0">
-                        <a:lnSpc>
-                          <a:spcPct val="115000"/>
-                        </a:lnSpc>
-                        <a:spcBef>
-                          <a:spcPts val="0"/>
-                        </a:spcBef>
-                        <a:spcAft>
-                          <a:spcPts val="0"/>
-                        </a:spcAft>
-                        <a:buClr>
-                          <a:srgbClr val="000000"/>
-                        </a:buClr>
-                        <a:buFont typeface="Arial" panose="020B0604020202020204" pitchFamily="34" charset="0"/>
-                        <a:buNone/>
-                        <a:tabLst/>
-                      </a:pPr>
-                      <a:r>
-                        <a:rPr lang="en-US" sz="1100" dirty="0">
-                          <a:solidFill>
-                            <a:schemeClr val="tx1"/>
-                          </a:solidFill>
-                          <a:effectLst/>
-                          <a:latin typeface="Arial" panose="020B0604020202020204" pitchFamily="34" charset="0"/>
-                          <a:ea typeface="MS Mincho" panose="02020609040205080304" pitchFamily="49" charset="-128"/>
-                          <a:cs typeface="Arial" panose="020B0604020202020204" pitchFamily="34" charset="0"/>
-                        </a:rPr>
-                        <a:t>Outsourced development:  None</a:t>
-                      </a:r>
-                      <a:endParaRPr lang="en-US" sz="1100" b="0" i="0" u="none" strike="noStrike" cap="none" dirty="0">
-                        <a:solidFill>
-                          <a:schemeClr val="tx1"/>
-                        </a:solidFill>
-                        <a:effectLst/>
-                        <a:latin typeface="+mn-lt"/>
-                        <a:ea typeface="+mn-ea"/>
-                        <a:cs typeface="+mn-cs"/>
-                        <a:sym typeface="Arial"/>
-                      </a:endParaRPr>
-                    </a:p>
-                    <a:p>
-                      <a:pPr marL="0" marR="0">
-                        <a:lnSpc>
-                          <a:spcPct val="115000"/>
-                        </a:lnSpc>
-                        <a:spcBef>
-                          <a:spcPts val="0"/>
-                        </a:spcBef>
-                        <a:spcAft>
-                          <a:spcPts val="1000"/>
-                        </a:spcAft>
-                      </a:pPr>
-                      <a:br>
-                        <a:rPr lang="en-US" sz="1100" dirty="0">
-                          <a:solidFill>
-                            <a:schemeClr val="tx1"/>
-                          </a:solidFill>
-                          <a:effectLst/>
-                          <a:latin typeface="Arial" panose="020B0604020202020204" pitchFamily="34" charset="0"/>
-                          <a:ea typeface="MS Mincho" panose="02020609040205080304" pitchFamily="49" charset="-128"/>
-                          <a:cs typeface="Arial" panose="020B0604020202020204" pitchFamily="34" charset="0"/>
-                        </a:rPr>
-                      </a:br>
-                      <a:endParaRPr lang="en-US" sz="1100" dirty="0">
-                        <a:solidFill>
-                          <a:schemeClr val="tx1"/>
-                        </a:solidFill>
-                        <a:effectLst/>
-                        <a:latin typeface="Calibri" panose="020F0502020204030204" pitchFamily="34" charset="0"/>
-                        <a:ea typeface="MS Mincho" panose="02020609040205080304" pitchFamily="49" charset="-128"/>
-                        <a:cs typeface="Times New Roman" panose="02020603050405020304" pitchFamily="18" charset="0"/>
-                      </a:endParaRPr>
-                    </a:p>
-                  </a:txBody>
-                  <a:tcPr marL="68580" marR="68580" marT="0" marB="0"/>
-                </a:tc>
-                <a:extLst>
-                  <a:ext uri="{0D108BD9-81ED-4DB2-BD59-A6C34878D82A}">
-                    <a16:rowId xmlns:a16="http://schemas.microsoft.com/office/drawing/2014/main" val="3849551468"/>
-                  </a:ext>
-                </a:extLst>
-              </a:tr>
-              <a:tr h="1660833">
-                <a:tc>
-                  <a:txBody>
-                    <a:bodyPr/>
-                    <a:lstStyle/>
-                    <a:p>
-                      <a:pPr marL="0" marR="0">
-                        <a:lnSpc>
-                          <a:spcPct val="115000"/>
-                        </a:lnSpc>
-                        <a:spcBef>
-                          <a:spcPts val="0"/>
-                        </a:spcBef>
-                        <a:spcAft>
-                          <a:spcPts val="1000"/>
-                        </a:spcAft>
-                      </a:pPr>
-                      <a:r>
-                        <a:rPr lang="en-US" sz="1100" b="1" dirty="0">
-                          <a:solidFill>
-                            <a:schemeClr val="tx1"/>
-                          </a:solidFill>
-                          <a:effectLst/>
-                        </a:rPr>
-                        <a:t>Incremental Implementation Strategy:</a:t>
-                      </a:r>
-                    </a:p>
-                    <a:p>
-                      <a:pPr marL="0" marR="0">
-                        <a:lnSpc>
-                          <a:spcPct val="115000"/>
-                        </a:lnSpc>
-                        <a:spcBef>
-                          <a:spcPts val="0"/>
-                        </a:spcBef>
-                        <a:spcAft>
-                          <a:spcPts val="1000"/>
-                        </a:spcAft>
-                      </a:pPr>
-                      <a:r>
-                        <a:rPr lang="en-US" sz="1100" dirty="0">
-                          <a:solidFill>
-                            <a:schemeClr val="tx1"/>
-                          </a:solidFill>
-                          <a:effectLst/>
-                          <a:latin typeface="Arial" panose="020B0604020202020204" pitchFamily="34" charset="0"/>
-                          <a:ea typeface="MS Mincho" panose="02020609040205080304" pitchFamily="49" charset="-128"/>
-                          <a:cs typeface="Arial" panose="020B0604020202020204" pitchFamily="34" charset="0"/>
-                        </a:rPr>
-                        <a:t>The Product team will take the “Architectural effort precedes business functionality by one or a few iterations” strategy.  The Industry Innovation Service MVP (v1) is a Portfolio-Level Business Epic being developed concurrently with the AccelRR8 Framework open methodology and the AccelRR8 Body of Knowledge Overview MVPs (v1), which in this context are Architectural Epics that support the Business Epic.</a:t>
-                      </a:r>
-                    </a:p>
-                    <a:p>
-                      <a:pPr marL="0" marR="0">
-                        <a:lnSpc>
-                          <a:spcPct val="115000"/>
-                        </a:lnSpc>
-                        <a:spcBef>
-                          <a:spcPts val="0"/>
-                        </a:spcBef>
-                        <a:spcAft>
-                          <a:spcPts val="1000"/>
-                        </a:spcAft>
-                      </a:pPr>
-                      <a:r>
-                        <a:rPr lang="en-US" sz="1100" dirty="0">
-                          <a:solidFill>
-                            <a:schemeClr val="tx1"/>
-                          </a:solidFill>
-                          <a:effectLst/>
-                          <a:latin typeface="Arial" panose="020B0604020202020204" pitchFamily="34" charset="0"/>
-                          <a:cs typeface="Arial" panose="020B0604020202020204" pitchFamily="34" charset="0"/>
-                        </a:rPr>
-                        <a:t>Click </a:t>
-                      </a:r>
-                      <a:r>
-                        <a:rPr lang="en-US" sz="1100" u="sng" dirty="0">
-                          <a:solidFill>
-                            <a:schemeClr val="tx1"/>
-                          </a:solidFill>
-                          <a:effectLst/>
-                          <a:latin typeface="Arial" panose="020B0604020202020204" pitchFamily="34" charset="0"/>
-                          <a:cs typeface="Arial" panose="020B0604020202020204" pitchFamily="34" charset="0"/>
-                          <a:hlinkClick r:id="rId3">
-                            <a:extLst>
-                              <a:ext uri="{A12FA001-AC4F-418D-AE19-62706E023703}">
-                                <ahyp:hlinkClr xmlns:ahyp="http://schemas.microsoft.com/office/drawing/2018/hyperlinkcolor" val="tx"/>
-                              </a:ext>
-                            </a:extLst>
-                          </a:hlinkClick>
-                        </a:rPr>
-                        <a:t>here</a:t>
-                      </a:r>
-                      <a:r>
-                        <a:rPr lang="en-US" sz="1100" dirty="0">
-                          <a:solidFill>
-                            <a:schemeClr val="tx1"/>
-                          </a:solidFill>
-                          <a:effectLst/>
-                          <a:latin typeface="Arial" panose="020B0604020202020204" pitchFamily="34" charset="0"/>
-                          <a:cs typeface="Arial" panose="020B0604020202020204" pitchFamily="34" charset="0"/>
-                        </a:rPr>
-                        <a:t> for details on the “Architectural effort precedes business functionality by one or a few iterations” strategy.</a:t>
-                      </a:r>
-                      <a:br>
-                        <a:rPr lang="en-US" sz="1100" dirty="0">
-                          <a:latin typeface="Arial" panose="020B0604020202020204" pitchFamily="34" charset="0"/>
-                          <a:cs typeface="Arial" panose="020B0604020202020204" pitchFamily="34" charset="0"/>
-                        </a:rPr>
-                      </a:br>
-                      <a:r>
-                        <a:rPr lang="en-US" sz="1100" b="0" i="0" u="none" strike="noStrike" cap="none" dirty="0">
-                          <a:solidFill>
-                            <a:schemeClr val="tx1"/>
-                          </a:solidFill>
-                          <a:effectLst/>
-                          <a:latin typeface="Arial" panose="020B0604020202020204" pitchFamily="34" charset="0"/>
-                          <a:ea typeface="+mn-ea"/>
-                          <a:cs typeface="Arial" panose="020B0604020202020204" pitchFamily="34" charset="0"/>
-                          <a:sym typeface="Arial"/>
-                        </a:rPr>
-                        <a:t>© Scaled Agile, Inc.</a:t>
-                      </a:r>
-                      <a:endParaRPr lang="en-US" sz="1100" dirty="0">
-                        <a:solidFill>
-                          <a:schemeClr val="tx1"/>
-                        </a:solidFill>
-                        <a:effectLst/>
-                        <a:latin typeface="Arial" panose="020B0604020202020204" pitchFamily="34" charset="0"/>
-                        <a:ea typeface="MS Mincho" panose="02020609040205080304" pitchFamily="49" charset="-128"/>
-                        <a:cs typeface="Arial" panose="020B0604020202020204" pitchFamily="34" charset="0"/>
-                      </a:endParaRPr>
-                    </a:p>
-                  </a:txBody>
-                  <a:tcPr marL="68580" marR="68580" marT="0" marB="0"/>
-                </a:tc>
-                <a:extLst>
-                  <a:ext uri="{0D108BD9-81ED-4DB2-BD59-A6C34878D82A}">
-                    <a16:rowId xmlns:a16="http://schemas.microsoft.com/office/drawing/2014/main" val="2329702929"/>
-                  </a:ext>
-                </a:extLst>
-              </a:tr>
-              <a:tr h="1000743">
-                <a:tc>
-                  <a:txBody>
-                    <a:bodyPr/>
-                    <a:lstStyle/>
-                    <a:p>
-                      <a:pPr marL="0" marR="0">
-                        <a:lnSpc>
-                          <a:spcPct val="115000"/>
-                        </a:lnSpc>
-                        <a:spcBef>
-                          <a:spcPts val="0"/>
-                        </a:spcBef>
-                        <a:spcAft>
-                          <a:spcPts val="1000"/>
-                        </a:spcAft>
-                      </a:pPr>
-                      <a:r>
-                        <a:rPr lang="en-US" sz="1100" b="1" dirty="0">
-                          <a:solidFill>
-                            <a:schemeClr val="tx1"/>
-                          </a:solidFill>
-                          <a:effectLst/>
-                        </a:rPr>
-                        <a:t>Sequencing and Dependencies:</a:t>
-                      </a:r>
-                    </a:p>
-                    <a:p>
-                      <a:pPr marL="0" marR="0">
-                        <a:lnSpc>
-                          <a:spcPct val="115000"/>
-                        </a:lnSpc>
-                        <a:spcBef>
-                          <a:spcPts val="0"/>
-                        </a:spcBef>
-                        <a:spcAft>
-                          <a:spcPts val="1000"/>
-                        </a:spcAft>
-                      </a:pPr>
-                      <a:r>
-                        <a:rPr lang="en-US" sz="1100" dirty="0">
-                          <a:solidFill>
-                            <a:schemeClr val="tx1"/>
-                          </a:solidFill>
-                          <a:effectLst/>
-                          <a:latin typeface="Arial" panose="020B0604020202020204" pitchFamily="34" charset="0"/>
-                          <a:ea typeface="MS Mincho" panose="02020609040205080304" pitchFamily="49" charset="-128"/>
-                          <a:cs typeface="Arial" panose="020B0604020202020204" pitchFamily="34" charset="0"/>
-                        </a:rPr>
-                        <a:t>Features of the AccelRR8 Framework open methodology and the AccelRR8 Body of Knowledge Overview MVPs (v1) will be developed before they are needed by the Consortium’s Industry Innovation Service v1.</a:t>
-                      </a:r>
-                    </a:p>
-                  </a:txBody>
-                  <a:tcPr marL="68580" marR="68580" marT="0" marB="0"/>
-                </a:tc>
-                <a:extLst>
-                  <a:ext uri="{0D108BD9-81ED-4DB2-BD59-A6C34878D82A}">
-                    <a16:rowId xmlns:a16="http://schemas.microsoft.com/office/drawing/2014/main" val="2759219611"/>
-                  </a:ext>
-                </a:extLst>
-              </a:tr>
-            </a:tbl>
-          </a:graphicData>
-        </a:graphic>
-      </p:graphicFrame>
-      <p:sp>
-        <p:nvSpPr>
-          <p:cNvPr id="3" name="Rectangle 2">
-            <a:extLst>
-              <a:ext uri="{FF2B5EF4-FFF2-40B4-BE49-F238E27FC236}">
-                <a16:creationId xmlns:a16="http://schemas.microsoft.com/office/drawing/2014/main" id="{46B78F2F-49FE-E010-BE57-5B187F60A2F1}"/>
-              </a:ext>
-            </a:extLst>
-          </p:cNvPr>
-          <p:cNvSpPr/>
-          <p:nvPr/>
-        </p:nvSpPr>
-        <p:spPr>
-          <a:xfrm>
-            <a:off x="969319" y="-1"/>
-            <a:ext cx="2743200" cy="263047"/>
-          </a:xfrm>
-          <a:prstGeom prst="rect">
-            <a:avLst/>
-          </a:prstGeom>
-          <a:solidFill>
-            <a:schemeClr val="bg1"/>
-          </a:solidFill>
-        </p:spPr>
-        <p:style>
-          <a:lnRef idx="2">
-            <a:schemeClr val="accent1">
-              <a:shade val="15000"/>
-            </a:schemeClr>
-          </a:lnRef>
-          <a:fillRef idx="1">
-            <a:schemeClr val="accent1"/>
-          </a:fillRef>
-          <a:effectRef idx="0">
-            <a:schemeClr val="accent1"/>
-          </a:effectRef>
-          <a:fontRef idx="minor">
-            <a:schemeClr val="lt1"/>
-          </a:fontRef>
-        </p:style>
-        <p:txBody>
-          <a:bodyPr rtlCol="0" anchor="ctr"/>
-          <a:lstStyle/>
-          <a:p>
-            <a:pPr marL="0" marR="0" lvl="0" indent="0" algn="ctr" defTabSz="914400" rtl="0" eaLnBrk="1" fontAlgn="auto" latinLnBrk="0" hangingPunct="1">
-              <a:lnSpc>
-                <a:spcPct val="100000"/>
-              </a:lnSpc>
-              <a:spcBef>
-                <a:spcPts val="0"/>
-              </a:spcBef>
-              <a:spcAft>
-                <a:spcPts val="0"/>
-              </a:spcAft>
-              <a:buClr>
-                <a:srgbClr val="000000"/>
-              </a:buClr>
-              <a:buSzTx/>
-              <a:buFont typeface="Arial"/>
-              <a:buNone/>
-              <a:tabLst/>
-              <a:defRPr/>
-            </a:pPr>
-            <a:r>
-              <a:rPr kumimoji="0" lang="en-US" sz="1400" b="0" i="0" u="none" strike="noStrike" kern="0" cap="none" spc="0" normalizeH="0" baseline="0" noProof="0" dirty="0">
-                <a:ln>
-                  <a:noFill/>
-                </a:ln>
-                <a:solidFill>
-                  <a:srgbClr val="000000"/>
-                </a:solidFill>
-                <a:effectLst/>
-                <a:uLnTx/>
-                <a:uFillTx/>
-                <a:latin typeface="Arial"/>
-                <a:ea typeface="+mn-ea"/>
-                <a:cs typeface="+mn-cs"/>
-                <a:sym typeface="Arial"/>
-              </a:rPr>
-              <a:t>Reviewing Stage</a:t>
-            </a:r>
-          </a:p>
-        </p:txBody>
-      </p:sp>
-      <p:sp>
-        <p:nvSpPr>
-          <p:cNvPr id="4" name="Rectangle 3">
-            <a:extLst>
-              <a:ext uri="{FF2B5EF4-FFF2-40B4-BE49-F238E27FC236}">
-                <a16:creationId xmlns:a16="http://schemas.microsoft.com/office/drawing/2014/main" id="{0EDF6E39-C3EC-1F82-A0BD-BD7DAAC9A077}"/>
-              </a:ext>
-            </a:extLst>
-          </p:cNvPr>
-          <p:cNvSpPr/>
-          <p:nvPr/>
-        </p:nvSpPr>
-        <p:spPr>
-          <a:xfrm>
-            <a:off x="3733400" y="-1"/>
-            <a:ext cx="2743200" cy="263047"/>
-          </a:xfrm>
-          <a:prstGeom prst="rect">
-            <a:avLst/>
-          </a:prstGeom>
-          <a:solidFill>
-            <a:schemeClr val="tx1"/>
-          </a:solidFill>
-        </p:spPr>
-        <p:style>
-          <a:lnRef idx="2">
-            <a:schemeClr val="accent1">
-              <a:shade val="15000"/>
-            </a:schemeClr>
-          </a:lnRef>
-          <a:fillRef idx="1">
-            <a:schemeClr val="accent1"/>
-          </a:fillRef>
-          <a:effectRef idx="0">
-            <a:schemeClr val="accent1"/>
-          </a:effectRef>
-          <a:fontRef idx="minor">
-            <a:schemeClr val="lt1"/>
-          </a:fontRef>
-        </p:style>
-        <p:txBody>
-          <a:bodyPr rtlCol="0" anchor="ctr"/>
-          <a:lstStyle/>
-          <a:p>
-            <a:pPr marL="0" marR="0" lvl="0" indent="0" algn="ctr" defTabSz="914400" rtl="0" eaLnBrk="1" fontAlgn="auto" latinLnBrk="0" hangingPunct="1">
-              <a:lnSpc>
-                <a:spcPct val="100000"/>
-              </a:lnSpc>
-              <a:spcBef>
-                <a:spcPts val="0"/>
-              </a:spcBef>
-              <a:spcAft>
-                <a:spcPts val="0"/>
-              </a:spcAft>
-              <a:buClr>
-                <a:srgbClr val="000000"/>
-              </a:buClr>
-              <a:buSzTx/>
-              <a:buFont typeface="Arial"/>
-              <a:buNone/>
-              <a:tabLst/>
-              <a:defRPr/>
-            </a:pPr>
-            <a:r>
-              <a:rPr kumimoji="0" lang="en-US" sz="1400" b="0" i="0" u="none" strike="noStrike" kern="0" cap="none" spc="0" normalizeH="0" baseline="0" noProof="0" dirty="0">
-                <a:ln>
-                  <a:noFill/>
-                </a:ln>
-                <a:solidFill>
-                  <a:srgbClr val="FFFFFF"/>
-                </a:solidFill>
-                <a:effectLst/>
-                <a:uLnTx/>
-                <a:uFillTx/>
-                <a:latin typeface="Arial"/>
-                <a:ea typeface="+mn-ea"/>
-                <a:cs typeface="+mn-cs"/>
-                <a:sym typeface="Arial"/>
-              </a:rPr>
-              <a:t>Analysis Stage</a:t>
-            </a:r>
-          </a:p>
-        </p:txBody>
-      </p:sp>
-      <p:sp>
-        <p:nvSpPr>
-          <p:cNvPr id="5" name="Rectangle 4">
-            <a:extLst>
-              <a:ext uri="{FF2B5EF4-FFF2-40B4-BE49-F238E27FC236}">
-                <a16:creationId xmlns:a16="http://schemas.microsoft.com/office/drawing/2014/main" id="{E646AA49-8E0E-B8DA-876A-BEF6D4BB5EE0}"/>
-              </a:ext>
-            </a:extLst>
-          </p:cNvPr>
-          <p:cNvSpPr/>
-          <p:nvPr/>
-        </p:nvSpPr>
-        <p:spPr>
-          <a:xfrm>
-            <a:off x="6484954" y="-1"/>
-            <a:ext cx="2743200" cy="263047"/>
-          </a:xfrm>
-          <a:prstGeom prst="rect">
-            <a:avLst/>
-          </a:prstGeom>
-          <a:solidFill>
-            <a:schemeClr val="bg1"/>
-          </a:solidFill>
-        </p:spPr>
-        <p:style>
-          <a:lnRef idx="2">
-            <a:schemeClr val="accent1">
-              <a:shade val="15000"/>
-            </a:schemeClr>
-          </a:lnRef>
-          <a:fillRef idx="1">
-            <a:schemeClr val="accent1"/>
-          </a:fillRef>
-          <a:effectRef idx="0">
-            <a:schemeClr val="accent1"/>
-          </a:effectRef>
-          <a:fontRef idx="minor">
-            <a:schemeClr val="lt1"/>
-          </a:fontRef>
-        </p:style>
-        <p:txBody>
-          <a:bodyPr rtlCol="0" anchor="ctr"/>
-          <a:lstStyle/>
-          <a:p>
-            <a:pPr marL="0" marR="0" lvl="0" indent="0" algn="ctr" defTabSz="914400" rtl="0" eaLnBrk="1" fontAlgn="auto" latinLnBrk="0" hangingPunct="1">
-              <a:lnSpc>
-                <a:spcPct val="100000"/>
-              </a:lnSpc>
-              <a:spcBef>
-                <a:spcPts val="0"/>
-              </a:spcBef>
-              <a:spcAft>
-                <a:spcPts val="0"/>
-              </a:spcAft>
-              <a:buClr>
-                <a:srgbClr val="000000"/>
-              </a:buClr>
-              <a:buSzTx/>
-              <a:buFont typeface="Arial"/>
-              <a:buNone/>
-              <a:tabLst/>
-              <a:defRPr/>
-            </a:pPr>
-            <a:r>
-              <a:rPr kumimoji="0" lang="en-US" sz="1400" b="0" i="0" u="none" strike="noStrike" kern="0" cap="none" spc="0" normalizeH="0" baseline="0" noProof="0" dirty="0">
-                <a:ln>
-                  <a:noFill/>
-                </a:ln>
-                <a:solidFill>
-                  <a:srgbClr val="000000"/>
-                </a:solidFill>
-                <a:effectLst/>
-                <a:uLnTx/>
-                <a:uFillTx/>
-                <a:latin typeface="Arial"/>
-                <a:ea typeface="+mn-ea"/>
-                <a:cs typeface="+mn-cs"/>
-                <a:sym typeface="Arial"/>
-              </a:rPr>
-              <a:t>Implementing - MVP Stage</a:t>
-            </a:r>
-          </a:p>
-        </p:txBody>
-      </p:sp>
-      <p:sp>
-        <p:nvSpPr>
-          <p:cNvPr id="6" name="TextBox 5">
-            <a:extLst>
-              <a:ext uri="{FF2B5EF4-FFF2-40B4-BE49-F238E27FC236}">
-                <a16:creationId xmlns:a16="http://schemas.microsoft.com/office/drawing/2014/main" id="{9F8D68DC-C5C8-1881-D83B-793CEBFE2E6F}"/>
-              </a:ext>
-            </a:extLst>
-          </p:cNvPr>
-          <p:cNvSpPr txBox="1"/>
-          <p:nvPr/>
-        </p:nvSpPr>
-        <p:spPr>
-          <a:xfrm>
-            <a:off x="875777" y="6300592"/>
-            <a:ext cx="6100174" cy="307777"/>
-          </a:xfrm>
-          <a:prstGeom prst="rect">
-            <a:avLst/>
-          </a:prstGeom>
-          <a:noFill/>
-        </p:spPr>
-        <p:txBody>
-          <a:bodyPr wrap="square">
-            <a:spAutoFit/>
-          </a:bodyPr>
-          <a:lstStyle/>
-          <a:p>
-            <a:pPr marL="0" marR="0" lvl="0" indent="0" algn="l" defTabSz="914400" rtl="0" eaLnBrk="1" fontAlgn="auto" latinLnBrk="0" hangingPunct="1">
-              <a:lnSpc>
-                <a:spcPct val="100000"/>
-              </a:lnSpc>
-              <a:spcBef>
-                <a:spcPts val="0"/>
-              </a:spcBef>
-              <a:spcAft>
-                <a:spcPts val="0"/>
-              </a:spcAft>
-              <a:buClr>
-                <a:srgbClr val="000000"/>
-              </a:buClr>
-              <a:buSzTx/>
-              <a:buFont typeface="Arial"/>
-              <a:buNone/>
-              <a:tabLst/>
-              <a:defRPr/>
-            </a:pPr>
-            <a:r>
-              <a:rPr kumimoji="0" lang="en-US" sz="1400" b="0" i="0" u="none" strike="noStrike" kern="0" cap="none" spc="0" normalizeH="0" baseline="0" noProof="0" dirty="0">
-                <a:ln>
-                  <a:noFill/>
-                </a:ln>
-                <a:solidFill>
-                  <a:srgbClr val="000000"/>
-                </a:solidFill>
-                <a:effectLst/>
-                <a:uLnTx/>
-                <a:uFillTx/>
-                <a:latin typeface="Arial"/>
-                <a:cs typeface="Arial"/>
-                <a:sym typeface="Arial"/>
-              </a:rPr>
-              <a:t>&lt;See SAFe Epics at </a:t>
-            </a:r>
-            <a:r>
-              <a:rPr kumimoji="0" lang="en-US" sz="1400" b="0" i="0" u="none" strike="noStrike" kern="0" cap="none" spc="0" normalizeH="0" baseline="0" noProof="0" dirty="0">
-                <a:ln>
-                  <a:noFill/>
-                </a:ln>
-                <a:solidFill>
-                  <a:srgbClr val="000000"/>
-                </a:solidFill>
-                <a:effectLst/>
-                <a:uLnTx/>
-                <a:uFillTx/>
-                <a:latin typeface="Arial"/>
-                <a:cs typeface="Arial"/>
-                <a:sym typeface="Arial"/>
-                <a:hlinkClick r:id="rId4"/>
-              </a:rPr>
-              <a:t>this link</a:t>
-            </a:r>
-            <a:r>
-              <a:rPr kumimoji="0" lang="en-US" sz="1400" b="0" i="0" u="none" strike="noStrike" kern="0" cap="none" spc="0" normalizeH="0" baseline="0" noProof="0" dirty="0">
-                <a:ln>
-                  <a:noFill/>
-                </a:ln>
-                <a:solidFill>
-                  <a:srgbClr val="000000"/>
-                </a:solidFill>
-                <a:effectLst/>
-                <a:uLnTx/>
-                <a:uFillTx/>
-                <a:latin typeface="Arial"/>
-                <a:cs typeface="Arial"/>
-                <a:sym typeface="Arial"/>
-              </a:rPr>
-              <a:t>&gt;</a:t>
-            </a:r>
-          </a:p>
-        </p:txBody>
-      </p:sp>
-      <p:sp>
-        <p:nvSpPr>
-          <p:cNvPr id="7" name="Google Shape;18;p9">
-            <a:extLst>
-              <a:ext uri="{FF2B5EF4-FFF2-40B4-BE49-F238E27FC236}">
-                <a16:creationId xmlns:a16="http://schemas.microsoft.com/office/drawing/2014/main" id="{E84B6E51-E573-5BC3-2F49-2CB36E1EC08D}"/>
-              </a:ext>
-            </a:extLst>
-          </p:cNvPr>
-          <p:cNvSpPr txBox="1">
-            <a:spLocks noGrp="1"/>
-          </p:cNvSpPr>
-          <p:nvPr>
-            <p:ph type="ftr" idx="11"/>
-          </p:nvPr>
-        </p:nvSpPr>
-        <p:spPr>
-          <a:xfrm>
-            <a:off x="4038600" y="6356350"/>
-            <a:ext cx="4114800" cy="365125"/>
-          </a:xfrm>
-          <a:prstGeom prst="rect">
-            <a:avLst/>
-          </a:prstGeom>
-          <a:noFill/>
-          <a:ln>
-            <a:noFill/>
-          </a:ln>
-        </p:spPr>
-        <p:txBody>
-          <a:bodyPr spcFirstLastPara="1" wrap="square" lIns="91425" tIns="45700" rIns="91425" bIns="45700" anchor="ctr" anchorCtr="0">
-            <a:noAutofit/>
-          </a:bodyPr>
-          <a:lstStyle>
-            <a:lvl1pPr lvl="0" algn="ctr">
-              <a:spcBef>
-                <a:spcPts val="0"/>
-              </a:spcBef>
-              <a:spcAft>
-                <a:spcPts val="0"/>
-              </a:spcAft>
-              <a:buSzPts val="1400"/>
-              <a:buNone/>
-              <a:defRPr/>
-            </a:lvl1pPr>
-            <a:lvl2pPr lvl="1" algn="l">
-              <a:spcBef>
-                <a:spcPts val="0"/>
-              </a:spcBef>
-              <a:spcAft>
-                <a:spcPts val="0"/>
-              </a:spcAft>
-              <a:buSzPts val="1400"/>
-              <a:buNone/>
-              <a:defRPr/>
-            </a:lvl2pPr>
-            <a:lvl3pPr lvl="2" algn="l">
-              <a:spcBef>
-                <a:spcPts val="0"/>
-              </a:spcBef>
-              <a:spcAft>
-                <a:spcPts val="0"/>
-              </a:spcAft>
-              <a:buSzPts val="1400"/>
-              <a:buNone/>
-              <a:defRPr/>
-            </a:lvl3pPr>
-            <a:lvl4pPr lvl="3" algn="l">
-              <a:spcBef>
-                <a:spcPts val="0"/>
-              </a:spcBef>
-              <a:spcAft>
-                <a:spcPts val="0"/>
-              </a:spcAft>
-              <a:buSzPts val="1400"/>
-              <a:buNone/>
-              <a:defRPr/>
-            </a:lvl4pPr>
-            <a:lvl5pPr lvl="4" algn="l">
-              <a:spcBef>
-                <a:spcPts val="0"/>
-              </a:spcBef>
-              <a:spcAft>
-                <a:spcPts val="0"/>
-              </a:spcAft>
-              <a:buSzPts val="1400"/>
-              <a:buNone/>
-              <a:defRPr/>
-            </a:lvl5pPr>
-            <a:lvl6pPr lvl="5" algn="l">
-              <a:spcBef>
-                <a:spcPts val="0"/>
-              </a:spcBef>
-              <a:spcAft>
-                <a:spcPts val="0"/>
-              </a:spcAft>
-              <a:buSzPts val="1400"/>
-              <a:buNone/>
-              <a:defRPr/>
-            </a:lvl6pPr>
-            <a:lvl7pPr lvl="6" algn="l">
-              <a:spcBef>
-                <a:spcPts val="0"/>
-              </a:spcBef>
-              <a:spcAft>
-                <a:spcPts val="0"/>
-              </a:spcAft>
-              <a:buSzPts val="1400"/>
-              <a:buNone/>
-              <a:defRPr/>
-            </a:lvl7pPr>
-            <a:lvl8pPr lvl="7" algn="l">
-              <a:spcBef>
-                <a:spcPts val="0"/>
-              </a:spcBef>
-              <a:spcAft>
-                <a:spcPts val="0"/>
-              </a:spcAft>
-              <a:buSzPts val="1400"/>
-              <a:buNone/>
-              <a:defRPr/>
-            </a:lvl8pPr>
-            <a:lvl9pPr lvl="8" algn="l">
-              <a:spcBef>
-                <a:spcPts val="0"/>
-              </a:spcBef>
-              <a:spcAft>
-                <a:spcPts val="0"/>
-              </a:spcAft>
-              <a:buSzPts val="1400"/>
-              <a:buNone/>
-              <a:defRPr/>
-            </a:lvl9pPr>
-          </a:lstStyle>
-          <a:p>
-            <a:r>
-              <a:rPr lang="en-US" dirty="0"/>
-              <a:t>Proprietary and Confidential Information</a:t>
-            </a:r>
-            <a:endParaRPr dirty="0"/>
-          </a:p>
-        </p:txBody>
-      </p:sp>
-    </p:spTree>
-    <p:extLst>
-      <p:ext uri="{BB962C8B-B14F-4D97-AF65-F5344CB8AC3E}">
-        <p14:creationId xmlns:p14="http://schemas.microsoft.com/office/powerpoint/2010/main" val="67448461"/>
-      </p:ext>
-    </p:extLst>
-  </p:cSld>
-  <p:clrMapOvr>
-    <a:masterClrMapping/>
-  </p:clrMapOvr>
-</p:sld>
-</file>
-
-<file path=ppt/slides/slide12.xml><?xml version="1.0" encoding="utf-8"?>
-<p:sld xmlns:a="http://schemas.openxmlformats.org/drawingml/2006/main" xmlns:r="http://schemas.openxmlformats.org/officeDocument/2006/relationships" xmlns:p="http://schemas.openxmlformats.org/presentationml/2006/main">
-  <p:cSld>
-    <p:spTree>
-      <p:nvGrpSpPr>
-        <p:cNvPr id="1" name="Shape 95"/>
-        <p:cNvGrpSpPr/>
-        <p:nvPr/>
-      </p:nvGrpSpPr>
-      <p:grpSpPr>
-        <a:xfrm>
-          <a:off x="0" y="0"/>
-          <a:ext cx="0" cy="0"/>
-          <a:chOff x="0" y="0"/>
-          <a:chExt cx="0" cy="0"/>
-        </a:xfrm>
-      </p:grpSpPr>
-      <p:sp>
-        <p:nvSpPr>
-          <p:cNvPr id="96" name="Google Shape;96;p2"/>
-          <p:cNvSpPr txBox="1">
-            <a:spLocks noGrp="1"/>
-          </p:cNvSpPr>
-          <p:nvPr>
-            <p:ph type="title"/>
-          </p:nvPr>
-        </p:nvSpPr>
-        <p:spPr>
-          <a:prstGeom prst="rect">
-            <a:avLst/>
-          </a:prstGeom>
-          <a:noFill/>
-          <a:ln>
-            <a:noFill/>
-          </a:ln>
-        </p:spPr>
-        <p:txBody>
-          <a:bodyPr spcFirstLastPara="1" wrap="square" lIns="91425" tIns="45700" rIns="91425" bIns="45700" anchor="ctr" anchorCtr="0">
-            <a:normAutofit/>
-          </a:bodyPr>
-          <a:lstStyle/>
-          <a:p>
-            <a:pPr marL="0" lvl="0" indent="0" algn="l" rtl="0">
-              <a:lnSpc>
-                <a:spcPct val="90000"/>
-              </a:lnSpc>
-              <a:spcBef>
-                <a:spcPts val="0"/>
-              </a:spcBef>
-              <a:spcAft>
-                <a:spcPts val="0"/>
-              </a:spcAft>
-              <a:buClr>
-                <a:schemeClr val="dk1"/>
-              </a:buClr>
-              <a:buSzPts val="4400"/>
-              <a:buFont typeface="Calibri"/>
-              <a:buNone/>
-            </a:pPr>
-            <a:r>
-              <a:rPr lang="en-US" dirty="0"/>
-              <a:t>Lean Business Case (5/5)</a:t>
-            </a:r>
-            <a:endParaRPr dirty="0"/>
-          </a:p>
-        </p:txBody>
-      </p:sp>
-      <p:graphicFrame>
-        <p:nvGraphicFramePr>
-          <p:cNvPr id="3" name="Table 2">
-            <a:extLst>
-              <a:ext uri="{FF2B5EF4-FFF2-40B4-BE49-F238E27FC236}">
-                <a16:creationId xmlns:a16="http://schemas.microsoft.com/office/drawing/2014/main" id="{F1699409-9005-50C8-4771-BC86CF9F9048}"/>
-              </a:ext>
-            </a:extLst>
-          </p:cNvPr>
-          <p:cNvGraphicFramePr>
-            <a:graphicFrameLocks noGrp="1"/>
-          </p:cNvGraphicFramePr>
-          <p:nvPr>
-            <p:extLst>
-              <p:ext uri="{D42A27DB-BD31-4B8C-83A1-F6EECF244321}">
-                <p14:modId xmlns:p14="http://schemas.microsoft.com/office/powerpoint/2010/main" val="4047730444"/>
-              </p:ext>
-            </p:extLst>
-          </p:nvPr>
-        </p:nvGraphicFramePr>
-        <p:xfrm>
-          <a:off x="838199" y="1859153"/>
-          <a:ext cx="10522908" cy="3589669"/>
-        </p:xfrm>
-        <a:graphic>
-          <a:graphicData uri="http://schemas.openxmlformats.org/drawingml/2006/table">
-            <a:tbl>
-              <a:tblPr firstRow="1" firstCol="1" bandRow="1" bandCol="1">
-                <a:tableStyleId>{5940675A-B579-460E-94D1-54222C63F5DA}</a:tableStyleId>
-              </a:tblPr>
-              <a:tblGrid>
-                <a:gridCol w="10522908">
-                  <a:extLst>
-                    <a:ext uri="{9D8B030D-6E8A-4147-A177-3AD203B41FA5}">
-                      <a16:colId xmlns:a16="http://schemas.microsoft.com/office/drawing/2014/main" val="2176383689"/>
-                    </a:ext>
-                  </a:extLst>
-                </a:gridCol>
-              </a:tblGrid>
-              <a:tr h="412372">
-                <a:tc>
-                  <a:txBody>
-                    <a:bodyPr/>
-                    <a:lstStyle/>
-                    <a:p>
-                      <a:pPr marL="0" marR="0" algn="ctr">
-                        <a:lnSpc>
-                          <a:spcPct val="115000"/>
-                        </a:lnSpc>
-                        <a:spcBef>
-                          <a:spcPts val="0"/>
-                        </a:spcBef>
-                        <a:spcAft>
-                          <a:spcPts val="0"/>
-                        </a:spcAft>
-                      </a:pPr>
-                      <a:r>
-                        <a:rPr lang="en-US" sz="1100" b="1" dirty="0">
-                          <a:solidFill>
-                            <a:schemeClr val="tx1"/>
-                          </a:solidFill>
-                          <a:effectLst/>
-                        </a:rPr>
-                        <a:t>Additional Supporting Data </a:t>
-                      </a:r>
-                      <a:endParaRPr lang="en-US" sz="1100" b="1" dirty="0">
-                        <a:solidFill>
-                          <a:schemeClr val="tx1"/>
-                        </a:solidFill>
-                        <a:effectLst/>
-                        <a:latin typeface="Calibri" panose="020F0502020204030204" pitchFamily="34" charset="0"/>
-                        <a:ea typeface="MS Mincho" panose="02020609040205080304" pitchFamily="49" charset="-128"/>
-                        <a:cs typeface="Times New Roman" panose="02020603050405020304" pitchFamily="18" charset="0"/>
-                      </a:endParaRPr>
-                    </a:p>
-                  </a:txBody>
-                  <a:tcPr marL="68580" marR="68580" marT="0" marB="0"/>
-                </a:tc>
-                <a:extLst>
-                  <a:ext uri="{0D108BD9-81ED-4DB2-BD59-A6C34878D82A}">
-                    <a16:rowId xmlns:a16="http://schemas.microsoft.com/office/drawing/2014/main" val="983676439"/>
-                  </a:ext>
-                </a:extLst>
-              </a:tr>
-              <a:tr h="1584438">
-                <a:tc>
-                  <a:txBody>
-                    <a:bodyPr/>
-                    <a:lstStyle/>
-                    <a:p>
-                      <a:pPr marL="0" marR="0">
-                        <a:lnSpc>
-                          <a:spcPct val="115000"/>
-                        </a:lnSpc>
-                        <a:spcBef>
-                          <a:spcPts val="0"/>
-                        </a:spcBef>
-                        <a:spcAft>
-                          <a:spcPts val="1000"/>
-                        </a:spcAft>
-                      </a:pPr>
-                      <a:r>
-                        <a:rPr lang="en-US" sz="1100" b="1" dirty="0">
-                          <a:solidFill>
-                            <a:schemeClr val="tx1"/>
-                          </a:solidFill>
-                          <a:effectLst/>
-                        </a:rPr>
-                        <a:t>Attachments:</a:t>
-                      </a:r>
-                    </a:p>
-                    <a:p>
-                      <a:pPr marL="0" marR="0">
-                        <a:lnSpc>
-                          <a:spcPct val="115000"/>
-                        </a:lnSpc>
-                        <a:spcBef>
-                          <a:spcPts val="0"/>
-                        </a:spcBef>
-                        <a:spcAft>
-                          <a:spcPts val="1000"/>
-                        </a:spcAft>
-                      </a:pPr>
-                      <a:r>
-                        <a:rPr lang="en-US" sz="1100" dirty="0">
-                          <a:solidFill>
-                            <a:schemeClr val="tx1"/>
-                          </a:solidFill>
-                          <a:effectLst/>
-                        </a:rPr>
-                        <a:t>See Industry Innovation Service Components on Next Slide.</a:t>
-                      </a:r>
-                    </a:p>
-                    <a:p>
-                      <a:pPr marL="0" marR="0">
-                        <a:lnSpc>
-                          <a:spcPct val="115000"/>
-                        </a:lnSpc>
-                        <a:spcBef>
-                          <a:spcPts val="0"/>
-                        </a:spcBef>
-                        <a:spcAft>
-                          <a:spcPts val="1000"/>
-                        </a:spcAft>
-                      </a:pPr>
-                      <a:r>
-                        <a:rPr lang="en-US" sz="1100" dirty="0">
-                          <a:solidFill>
-                            <a:schemeClr val="tx1"/>
-                          </a:solidFill>
-                          <a:effectLst/>
-                        </a:rPr>
-                        <a:t>These include Service Strategy, Context, Intent, Development Kit, Demand Generation Kit, Beneficiaries Engagement Kit, and Delivery of Service Kit components.</a:t>
-                      </a:r>
-                    </a:p>
-                  </a:txBody>
-                  <a:tcPr marL="68580" marR="68580" marT="0" marB="0"/>
-                </a:tc>
-                <a:extLst>
-                  <a:ext uri="{0D108BD9-81ED-4DB2-BD59-A6C34878D82A}">
-                    <a16:rowId xmlns:a16="http://schemas.microsoft.com/office/drawing/2014/main" val="1559136522"/>
-                  </a:ext>
-                </a:extLst>
-              </a:tr>
-              <a:tr h="1592859">
-                <a:tc>
-                  <a:txBody>
-                    <a:bodyPr/>
-                    <a:lstStyle/>
-                    <a:p>
-                      <a:pPr marL="0" marR="0">
-                        <a:lnSpc>
-                          <a:spcPct val="115000"/>
-                        </a:lnSpc>
-                        <a:spcBef>
-                          <a:spcPts val="0"/>
-                        </a:spcBef>
-                        <a:spcAft>
-                          <a:spcPts val="1000"/>
-                        </a:spcAft>
-                      </a:pPr>
-                      <a:r>
-                        <a:rPr lang="en-US" sz="1100" b="1" dirty="0">
-                          <a:solidFill>
-                            <a:schemeClr val="tx1"/>
-                          </a:solidFill>
-                          <a:effectLst/>
-                        </a:rPr>
-                        <a:t>Other Notes and Comments:</a:t>
-                      </a:r>
-                    </a:p>
-                    <a:p>
-                      <a:pPr marL="0" marR="0">
-                        <a:lnSpc>
-                          <a:spcPct val="115000"/>
-                        </a:lnSpc>
-                        <a:spcBef>
-                          <a:spcPts val="0"/>
-                        </a:spcBef>
-                        <a:spcAft>
-                          <a:spcPts val="1000"/>
-                        </a:spcAft>
-                      </a:pPr>
-                      <a:r>
-                        <a:rPr lang="en-US" sz="1100" dirty="0">
-                          <a:solidFill>
-                            <a:schemeClr val="tx1"/>
-                          </a:solidFill>
-                          <a:effectLst/>
-                        </a:rPr>
-                        <a:t>Methodologies used to develop the Open Knowledge Sharing Service MVP include:</a:t>
-                      </a:r>
-                    </a:p>
-                    <a:p>
-                      <a:pPr marL="0" marR="0">
-                        <a:lnSpc>
-                          <a:spcPct val="115000"/>
-                        </a:lnSpc>
-                        <a:spcBef>
-                          <a:spcPts val="0"/>
-                        </a:spcBef>
-                        <a:spcAft>
-                          <a:spcPts val="1000"/>
-                        </a:spcAft>
-                      </a:pPr>
-                      <a:r>
-                        <a:rPr lang="en-US" sz="1100" dirty="0">
-                          <a:solidFill>
-                            <a:schemeClr val="tx1"/>
-                          </a:solidFill>
-                          <a:effectLst/>
-                        </a:rPr>
-                        <a:t>- The </a:t>
-                      </a:r>
-                      <a:r>
-                        <a:rPr lang="en-US" sz="1100" dirty="0">
-                          <a:solidFill>
-                            <a:schemeClr val="tx1"/>
-                          </a:solidFill>
-                          <a:effectLst/>
-                          <a:hlinkClick r:id="rId3"/>
-                        </a:rPr>
-                        <a:t>AccelRR8 Framework</a:t>
-                      </a:r>
-                      <a:r>
-                        <a:rPr lang="en-US" sz="1100" dirty="0">
-                          <a:solidFill>
-                            <a:schemeClr val="tx1"/>
-                          </a:solidFill>
-                          <a:effectLst/>
-                        </a:rPr>
-                        <a:t> produced by AccelRR8 LLC</a:t>
-                      </a:r>
-                    </a:p>
-                    <a:p>
-                      <a:pPr marL="0" marR="0">
-                        <a:lnSpc>
-                          <a:spcPct val="115000"/>
-                        </a:lnSpc>
-                        <a:spcBef>
-                          <a:spcPts val="0"/>
-                        </a:spcBef>
-                        <a:spcAft>
-                          <a:spcPts val="1000"/>
-                        </a:spcAft>
-                      </a:pPr>
-                      <a:r>
-                        <a:rPr lang="en-US" sz="1100" dirty="0">
-                          <a:solidFill>
-                            <a:schemeClr val="tx1"/>
-                          </a:solidFill>
-                          <a:effectLst/>
-                        </a:rPr>
-                        <a:t>- The </a:t>
-                      </a:r>
-                      <a:r>
-                        <a:rPr lang="en-US" sz="1100" dirty="0">
-                          <a:solidFill>
-                            <a:schemeClr val="tx1"/>
-                          </a:solidFill>
-                          <a:effectLst/>
-                          <a:hlinkClick r:id="rId4"/>
-                        </a:rPr>
-                        <a:t>Scaled Agile Framework</a:t>
-                      </a:r>
-                      <a:r>
-                        <a:rPr lang="en-US" sz="1100" dirty="0">
-                          <a:solidFill>
-                            <a:schemeClr val="tx1"/>
-                          </a:solidFill>
-                          <a:effectLst/>
-                        </a:rPr>
-                        <a:t> produced by Scaled Agile, Inc.</a:t>
-                      </a:r>
-                      <a:endParaRPr lang="en-US" sz="1100" dirty="0">
-                        <a:solidFill>
-                          <a:schemeClr val="tx1"/>
-                        </a:solidFill>
-                        <a:effectLst/>
-                        <a:latin typeface="Calibri" panose="020F0502020204030204" pitchFamily="34" charset="0"/>
-                        <a:ea typeface="MS Mincho" panose="02020609040205080304" pitchFamily="49" charset="-128"/>
-                        <a:cs typeface="Times New Roman" panose="02020603050405020304" pitchFamily="18" charset="0"/>
-                      </a:endParaRPr>
-                    </a:p>
-                  </a:txBody>
-                  <a:tcPr marL="68580" marR="68580" marT="0" marB="0"/>
-                </a:tc>
-                <a:extLst>
-                  <a:ext uri="{0D108BD9-81ED-4DB2-BD59-A6C34878D82A}">
-                    <a16:rowId xmlns:a16="http://schemas.microsoft.com/office/drawing/2014/main" val="3889054867"/>
-                  </a:ext>
-                </a:extLst>
-              </a:tr>
-            </a:tbl>
-          </a:graphicData>
-        </a:graphic>
-      </p:graphicFrame>
-      <p:sp>
-        <p:nvSpPr>
-          <p:cNvPr id="2" name="Rectangle 1">
-            <a:extLst>
-              <a:ext uri="{FF2B5EF4-FFF2-40B4-BE49-F238E27FC236}">
-                <a16:creationId xmlns:a16="http://schemas.microsoft.com/office/drawing/2014/main" id="{402CEF7E-7FA3-2DA3-9852-7A50C2CE2E0E}"/>
-              </a:ext>
-            </a:extLst>
-          </p:cNvPr>
-          <p:cNvSpPr/>
-          <p:nvPr/>
-        </p:nvSpPr>
-        <p:spPr>
-          <a:xfrm>
-            <a:off x="969319" y="-1"/>
-            <a:ext cx="2743200" cy="263047"/>
-          </a:xfrm>
-          <a:prstGeom prst="rect">
-            <a:avLst/>
-          </a:prstGeom>
-          <a:solidFill>
-            <a:schemeClr val="bg1"/>
-          </a:solidFill>
-        </p:spPr>
-        <p:style>
-          <a:lnRef idx="2">
-            <a:schemeClr val="accent1">
-              <a:shade val="15000"/>
-            </a:schemeClr>
-          </a:lnRef>
-          <a:fillRef idx="1">
-            <a:schemeClr val="accent1"/>
-          </a:fillRef>
-          <a:effectRef idx="0">
-            <a:schemeClr val="accent1"/>
-          </a:effectRef>
-          <a:fontRef idx="minor">
-            <a:schemeClr val="lt1"/>
-          </a:fontRef>
-        </p:style>
-        <p:txBody>
-          <a:bodyPr rtlCol="0" anchor="ctr"/>
-          <a:lstStyle/>
-          <a:p>
-            <a:pPr marL="0" marR="0" lvl="0" indent="0" algn="ctr" defTabSz="914400" rtl="0" eaLnBrk="1" fontAlgn="auto" latinLnBrk="0" hangingPunct="1">
-              <a:lnSpc>
-                <a:spcPct val="100000"/>
-              </a:lnSpc>
-              <a:spcBef>
-                <a:spcPts val="0"/>
-              </a:spcBef>
-              <a:spcAft>
-                <a:spcPts val="0"/>
-              </a:spcAft>
-              <a:buClr>
-                <a:srgbClr val="000000"/>
-              </a:buClr>
-              <a:buSzTx/>
-              <a:buFont typeface="Arial"/>
-              <a:buNone/>
-              <a:tabLst/>
-              <a:defRPr/>
-            </a:pPr>
-            <a:r>
-              <a:rPr kumimoji="0" lang="en-US" sz="1400" b="0" i="0" u="none" strike="noStrike" kern="0" cap="none" spc="0" normalizeH="0" baseline="0" noProof="0" dirty="0">
-                <a:ln>
-                  <a:noFill/>
-                </a:ln>
-                <a:solidFill>
-                  <a:srgbClr val="000000"/>
-                </a:solidFill>
-                <a:effectLst/>
-                <a:uLnTx/>
-                <a:uFillTx/>
-                <a:latin typeface="Arial"/>
-                <a:ea typeface="+mn-ea"/>
-                <a:cs typeface="+mn-cs"/>
-                <a:sym typeface="Arial"/>
-              </a:rPr>
-              <a:t>Reviewing Stage</a:t>
-            </a:r>
-          </a:p>
-        </p:txBody>
-      </p:sp>
-      <p:sp>
-        <p:nvSpPr>
-          <p:cNvPr id="4" name="Rectangle 3">
-            <a:extLst>
-              <a:ext uri="{FF2B5EF4-FFF2-40B4-BE49-F238E27FC236}">
-                <a16:creationId xmlns:a16="http://schemas.microsoft.com/office/drawing/2014/main" id="{98FB1201-7179-C239-7E9F-258DB1E5E2E6}"/>
-              </a:ext>
-            </a:extLst>
-          </p:cNvPr>
-          <p:cNvSpPr/>
-          <p:nvPr/>
-        </p:nvSpPr>
-        <p:spPr>
-          <a:xfrm>
-            <a:off x="3733400" y="-1"/>
-            <a:ext cx="2743200" cy="263047"/>
-          </a:xfrm>
-          <a:prstGeom prst="rect">
-            <a:avLst/>
-          </a:prstGeom>
-          <a:solidFill>
-            <a:schemeClr val="tx1"/>
-          </a:solidFill>
-        </p:spPr>
-        <p:style>
-          <a:lnRef idx="2">
-            <a:schemeClr val="accent1">
-              <a:shade val="15000"/>
-            </a:schemeClr>
-          </a:lnRef>
-          <a:fillRef idx="1">
-            <a:schemeClr val="accent1"/>
-          </a:fillRef>
-          <a:effectRef idx="0">
-            <a:schemeClr val="accent1"/>
-          </a:effectRef>
-          <a:fontRef idx="minor">
-            <a:schemeClr val="lt1"/>
-          </a:fontRef>
-        </p:style>
-        <p:txBody>
-          <a:bodyPr rtlCol="0" anchor="ctr"/>
-          <a:lstStyle/>
-          <a:p>
-            <a:pPr marL="0" marR="0" lvl="0" indent="0" algn="ctr" defTabSz="914400" rtl="0" eaLnBrk="1" fontAlgn="auto" latinLnBrk="0" hangingPunct="1">
-              <a:lnSpc>
-                <a:spcPct val="100000"/>
-              </a:lnSpc>
-              <a:spcBef>
-                <a:spcPts val="0"/>
-              </a:spcBef>
-              <a:spcAft>
-                <a:spcPts val="0"/>
-              </a:spcAft>
-              <a:buClr>
-                <a:srgbClr val="000000"/>
-              </a:buClr>
-              <a:buSzTx/>
-              <a:buFont typeface="Arial"/>
-              <a:buNone/>
-              <a:tabLst/>
-              <a:defRPr/>
-            </a:pPr>
-            <a:r>
-              <a:rPr kumimoji="0" lang="en-US" sz="1400" b="0" i="0" u="none" strike="noStrike" kern="0" cap="none" spc="0" normalizeH="0" baseline="0" noProof="0" dirty="0">
-                <a:ln>
-                  <a:noFill/>
-                </a:ln>
-                <a:solidFill>
-                  <a:srgbClr val="FFFFFF"/>
-                </a:solidFill>
-                <a:effectLst/>
-                <a:uLnTx/>
-                <a:uFillTx/>
-                <a:latin typeface="Arial"/>
-                <a:ea typeface="+mn-ea"/>
-                <a:cs typeface="+mn-cs"/>
-                <a:sym typeface="Arial"/>
-              </a:rPr>
-              <a:t>Analysis Stage</a:t>
-            </a:r>
-          </a:p>
-        </p:txBody>
-      </p:sp>
-      <p:sp>
-        <p:nvSpPr>
-          <p:cNvPr id="5" name="Rectangle 4">
-            <a:extLst>
-              <a:ext uri="{FF2B5EF4-FFF2-40B4-BE49-F238E27FC236}">
-                <a16:creationId xmlns:a16="http://schemas.microsoft.com/office/drawing/2014/main" id="{77206C13-F7F8-689F-704C-B5EA77615E13}"/>
-              </a:ext>
-            </a:extLst>
-          </p:cNvPr>
-          <p:cNvSpPr/>
-          <p:nvPr/>
-        </p:nvSpPr>
-        <p:spPr>
-          <a:xfrm>
-            <a:off x="6484954" y="-1"/>
-            <a:ext cx="2743200" cy="263047"/>
-          </a:xfrm>
-          <a:prstGeom prst="rect">
-            <a:avLst/>
-          </a:prstGeom>
-          <a:solidFill>
-            <a:schemeClr val="bg1"/>
-          </a:solidFill>
-        </p:spPr>
-        <p:style>
-          <a:lnRef idx="2">
-            <a:schemeClr val="accent1">
-              <a:shade val="15000"/>
-            </a:schemeClr>
-          </a:lnRef>
-          <a:fillRef idx="1">
-            <a:schemeClr val="accent1"/>
-          </a:fillRef>
-          <a:effectRef idx="0">
-            <a:schemeClr val="accent1"/>
-          </a:effectRef>
-          <a:fontRef idx="minor">
-            <a:schemeClr val="lt1"/>
-          </a:fontRef>
-        </p:style>
-        <p:txBody>
-          <a:bodyPr rtlCol="0" anchor="ctr"/>
-          <a:lstStyle/>
-          <a:p>
-            <a:pPr marL="0" marR="0" lvl="0" indent="0" algn="ctr" defTabSz="914400" rtl="0" eaLnBrk="1" fontAlgn="auto" latinLnBrk="0" hangingPunct="1">
-              <a:lnSpc>
-                <a:spcPct val="100000"/>
-              </a:lnSpc>
-              <a:spcBef>
-                <a:spcPts val="0"/>
-              </a:spcBef>
-              <a:spcAft>
-                <a:spcPts val="0"/>
-              </a:spcAft>
-              <a:buClr>
-                <a:srgbClr val="000000"/>
-              </a:buClr>
-              <a:buSzTx/>
-              <a:buFont typeface="Arial"/>
-              <a:buNone/>
-              <a:tabLst/>
-              <a:defRPr/>
-            </a:pPr>
-            <a:r>
-              <a:rPr kumimoji="0" lang="en-US" sz="1400" b="0" i="0" u="none" strike="noStrike" kern="0" cap="none" spc="0" normalizeH="0" baseline="0" noProof="0" dirty="0">
-                <a:ln>
-                  <a:noFill/>
-                </a:ln>
-                <a:solidFill>
-                  <a:srgbClr val="000000"/>
-                </a:solidFill>
-                <a:effectLst/>
-                <a:uLnTx/>
-                <a:uFillTx/>
-                <a:latin typeface="Arial"/>
-                <a:ea typeface="+mn-ea"/>
-                <a:cs typeface="+mn-cs"/>
-                <a:sym typeface="Arial"/>
-              </a:rPr>
-              <a:t>Implementing - MVP Stage</a:t>
-            </a:r>
-          </a:p>
-        </p:txBody>
-      </p:sp>
-      <p:sp>
-        <p:nvSpPr>
-          <p:cNvPr id="6" name="TextBox 5">
-            <a:extLst>
-              <a:ext uri="{FF2B5EF4-FFF2-40B4-BE49-F238E27FC236}">
-                <a16:creationId xmlns:a16="http://schemas.microsoft.com/office/drawing/2014/main" id="{547832F2-FAD4-C5E7-657F-527F59EE2B1C}"/>
-              </a:ext>
-            </a:extLst>
-          </p:cNvPr>
-          <p:cNvSpPr txBox="1"/>
-          <p:nvPr/>
-        </p:nvSpPr>
-        <p:spPr>
-          <a:xfrm>
-            <a:off x="875777" y="6300592"/>
-            <a:ext cx="6100174" cy="307777"/>
-          </a:xfrm>
-          <a:prstGeom prst="rect">
-            <a:avLst/>
-          </a:prstGeom>
-          <a:noFill/>
-        </p:spPr>
-        <p:txBody>
-          <a:bodyPr wrap="square">
-            <a:spAutoFit/>
-          </a:bodyPr>
-          <a:lstStyle/>
-          <a:p>
-            <a:pPr marL="0" marR="0" lvl="0" indent="0" algn="l" defTabSz="914400" rtl="0" eaLnBrk="1" fontAlgn="auto" latinLnBrk="0" hangingPunct="1">
-              <a:lnSpc>
-                <a:spcPct val="100000"/>
-              </a:lnSpc>
-              <a:spcBef>
-                <a:spcPts val="0"/>
-              </a:spcBef>
-              <a:spcAft>
-                <a:spcPts val="0"/>
-              </a:spcAft>
-              <a:buClr>
-                <a:srgbClr val="000000"/>
-              </a:buClr>
-              <a:buSzTx/>
-              <a:buFont typeface="Arial"/>
-              <a:buNone/>
-              <a:tabLst/>
-              <a:defRPr/>
-            </a:pPr>
-            <a:r>
-              <a:rPr kumimoji="0" lang="en-US" sz="1400" b="0" i="0" u="none" strike="noStrike" kern="0" cap="none" spc="0" normalizeH="0" baseline="0" noProof="0" dirty="0">
-                <a:ln>
-                  <a:noFill/>
-                </a:ln>
-                <a:solidFill>
-                  <a:srgbClr val="000000"/>
-                </a:solidFill>
-                <a:effectLst/>
-                <a:uLnTx/>
-                <a:uFillTx/>
-                <a:latin typeface="Arial"/>
-                <a:cs typeface="Arial"/>
-                <a:sym typeface="Arial"/>
-              </a:rPr>
-              <a:t>&lt;See SAFe Epics at </a:t>
-            </a:r>
-            <a:r>
-              <a:rPr kumimoji="0" lang="en-US" sz="1400" b="0" i="0" u="none" strike="noStrike" kern="0" cap="none" spc="0" normalizeH="0" baseline="0" noProof="0" dirty="0">
-                <a:ln>
-                  <a:noFill/>
-                </a:ln>
-                <a:solidFill>
-                  <a:srgbClr val="000000"/>
-                </a:solidFill>
-                <a:effectLst/>
-                <a:uLnTx/>
-                <a:uFillTx/>
-                <a:latin typeface="Arial"/>
-                <a:cs typeface="Arial"/>
-                <a:sym typeface="Arial"/>
-                <a:hlinkClick r:id="rId5"/>
-              </a:rPr>
-              <a:t>this link</a:t>
-            </a:r>
-            <a:r>
-              <a:rPr kumimoji="0" lang="en-US" sz="1400" b="0" i="0" u="none" strike="noStrike" kern="0" cap="none" spc="0" normalizeH="0" baseline="0" noProof="0" dirty="0">
-                <a:ln>
-                  <a:noFill/>
-                </a:ln>
-                <a:solidFill>
-                  <a:srgbClr val="000000"/>
-                </a:solidFill>
-                <a:effectLst/>
-                <a:uLnTx/>
-                <a:uFillTx/>
-                <a:latin typeface="Arial"/>
-                <a:cs typeface="Arial"/>
-                <a:sym typeface="Arial"/>
-              </a:rPr>
-              <a:t>&gt;</a:t>
-            </a:r>
-          </a:p>
-        </p:txBody>
-      </p:sp>
-      <p:sp>
-        <p:nvSpPr>
-          <p:cNvPr id="7" name="Google Shape;18;p9">
-            <a:extLst>
-              <a:ext uri="{FF2B5EF4-FFF2-40B4-BE49-F238E27FC236}">
-                <a16:creationId xmlns:a16="http://schemas.microsoft.com/office/drawing/2014/main" id="{8FA3F51F-BAA5-391C-B500-D450E50CA7E6}"/>
-              </a:ext>
-            </a:extLst>
-          </p:cNvPr>
-          <p:cNvSpPr txBox="1">
-            <a:spLocks noGrp="1"/>
-          </p:cNvSpPr>
-          <p:nvPr>
-            <p:ph type="ftr" idx="11"/>
-          </p:nvPr>
-        </p:nvSpPr>
-        <p:spPr>
-          <a:xfrm>
-            <a:off x="4038600" y="6356350"/>
-            <a:ext cx="4114800" cy="365125"/>
-          </a:xfrm>
-          <a:prstGeom prst="rect">
-            <a:avLst/>
-          </a:prstGeom>
-          <a:noFill/>
-          <a:ln>
-            <a:noFill/>
-          </a:ln>
-        </p:spPr>
-        <p:txBody>
-          <a:bodyPr spcFirstLastPara="1" wrap="square" lIns="91425" tIns="45700" rIns="91425" bIns="45700" anchor="ctr" anchorCtr="0">
-            <a:noAutofit/>
-          </a:bodyPr>
-          <a:lstStyle>
-            <a:lvl1pPr lvl="0" algn="ctr">
-              <a:spcBef>
-                <a:spcPts val="0"/>
-              </a:spcBef>
-              <a:spcAft>
-                <a:spcPts val="0"/>
-              </a:spcAft>
-              <a:buSzPts val="1400"/>
-              <a:buNone/>
-              <a:defRPr/>
-            </a:lvl1pPr>
-            <a:lvl2pPr lvl="1" algn="l">
-              <a:spcBef>
-                <a:spcPts val="0"/>
-              </a:spcBef>
-              <a:spcAft>
-                <a:spcPts val="0"/>
-              </a:spcAft>
-              <a:buSzPts val="1400"/>
-              <a:buNone/>
-              <a:defRPr/>
-            </a:lvl2pPr>
-            <a:lvl3pPr lvl="2" algn="l">
-              <a:spcBef>
-                <a:spcPts val="0"/>
-              </a:spcBef>
-              <a:spcAft>
-                <a:spcPts val="0"/>
-              </a:spcAft>
-              <a:buSzPts val="1400"/>
-              <a:buNone/>
-              <a:defRPr/>
-            </a:lvl3pPr>
-            <a:lvl4pPr lvl="3" algn="l">
-              <a:spcBef>
-                <a:spcPts val="0"/>
-              </a:spcBef>
-              <a:spcAft>
-                <a:spcPts val="0"/>
-              </a:spcAft>
-              <a:buSzPts val="1400"/>
-              <a:buNone/>
-              <a:defRPr/>
-            </a:lvl4pPr>
-            <a:lvl5pPr lvl="4" algn="l">
-              <a:spcBef>
-                <a:spcPts val="0"/>
-              </a:spcBef>
-              <a:spcAft>
-                <a:spcPts val="0"/>
-              </a:spcAft>
-              <a:buSzPts val="1400"/>
-              <a:buNone/>
-              <a:defRPr/>
-            </a:lvl5pPr>
-            <a:lvl6pPr lvl="5" algn="l">
-              <a:spcBef>
-                <a:spcPts val="0"/>
-              </a:spcBef>
-              <a:spcAft>
-                <a:spcPts val="0"/>
-              </a:spcAft>
-              <a:buSzPts val="1400"/>
-              <a:buNone/>
-              <a:defRPr/>
-            </a:lvl6pPr>
-            <a:lvl7pPr lvl="6" algn="l">
-              <a:spcBef>
-                <a:spcPts val="0"/>
-              </a:spcBef>
-              <a:spcAft>
-                <a:spcPts val="0"/>
-              </a:spcAft>
-              <a:buSzPts val="1400"/>
-              <a:buNone/>
-              <a:defRPr/>
-            </a:lvl7pPr>
-            <a:lvl8pPr lvl="7" algn="l">
-              <a:spcBef>
-                <a:spcPts val="0"/>
-              </a:spcBef>
-              <a:spcAft>
-                <a:spcPts val="0"/>
-              </a:spcAft>
-              <a:buSzPts val="1400"/>
-              <a:buNone/>
-              <a:defRPr/>
-            </a:lvl8pPr>
-            <a:lvl9pPr lvl="8" algn="l">
-              <a:spcBef>
-                <a:spcPts val="0"/>
-              </a:spcBef>
-              <a:spcAft>
-                <a:spcPts val="0"/>
-              </a:spcAft>
-              <a:buSzPts val="1400"/>
-              <a:buNone/>
-              <a:defRPr/>
-            </a:lvl9pPr>
-          </a:lstStyle>
-          <a:p>
-            <a:r>
-              <a:rPr lang="en-US" dirty="0"/>
-              <a:t>Proprietary and Confidential Information</a:t>
-            </a:r>
-            <a:endParaRPr dirty="0"/>
-          </a:p>
-        </p:txBody>
-      </p:sp>
-    </p:spTree>
-    <p:extLst>
-      <p:ext uri="{BB962C8B-B14F-4D97-AF65-F5344CB8AC3E}">
-        <p14:creationId xmlns:p14="http://schemas.microsoft.com/office/powerpoint/2010/main" val="3088802820"/>
-      </p:ext>
-    </p:extLst>
-  </p:cSld>
-  <p:clrMapOvr>
-    <a:masterClrMapping/>
-  </p:clrMapOvr>
-</p:sld>
-</file>
-
-<file path=ppt/slides/slide13.xml><?xml version="1.0" encoding="utf-8"?>
-<p:sld xmlns:a="http://schemas.openxmlformats.org/drawingml/2006/main" xmlns:r="http://schemas.openxmlformats.org/officeDocument/2006/relationships" xmlns:p="http://schemas.openxmlformats.org/presentationml/2006/main">
-  <p:cSld>
-    <p:spTree>
-      <p:nvGrpSpPr>
-        <p:cNvPr id="1" name="Shape 95"/>
-        <p:cNvGrpSpPr/>
-        <p:nvPr/>
-      </p:nvGrpSpPr>
-      <p:grpSpPr>
-        <a:xfrm>
-          <a:off x="0" y="0"/>
-          <a:ext cx="0" cy="0"/>
-          <a:chOff x="0" y="0"/>
-          <a:chExt cx="0" cy="0"/>
-        </a:xfrm>
-      </p:grpSpPr>
-      <p:sp>
-        <p:nvSpPr>
-          <p:cNvPr id="96" name="Google Shape;96;p2"/>
-          <p:cNvSpPr txBox="1">
-            <a:spLocks noGrp="1"/>
-          </p:cNvSpPr>
-          <p:nvPr>
-            <p:ph type="title"/>
-          </p:nvPr>
-        </p:nvSpPr>
-        <p:spPr>
-          <a:prstGeom prst="rect">
-            <a:avLst/>
-          </a:prstGeom>
-          <a:noFill/>
-          <a:ln>
-            <a:noFill/>
-          </a:ln>
-        </p:spPr>
-        <p:txBody>
-          <a:bodyPr spcFirstLastPara="1" wrap="square" lIns="91425" tIns="45700" rIns="91425" bIns="45700" anchor="ctr" anchorCtr="0">
-            <a:normAutofit/>
-          </a:bodyPr>
-          <a:lstStyle/>
-          <a:p>
-            <a:pPr marL="0" lvl="0" indent="0" algn="l" rtl="0">
-              <a:lnSpc>
-                <a:spcPct val="90000"/>
-              </a:lnSpc>
-              <a:spcBef>
-                <a:spcPts val="0"/>
-              </a:spcBef>
-              <a:spcAft>
-                <a:spcPts val="0"/>
-              </a:spcAft>
-              <a:buClr>
-                <a:schemeClr val="dk1"/>
-              </a:buClr>
-              <a:buSzPts val="4400"/>
-              <a:buFont typeface="Calibri"/>
-              <a:buNone/>
-            </a:pPr>
-            <a:r>
-              <a:rPr lang="en-US" dirty="0"/>
-              <a:t>Service MVP </a:t>
-            </a:r>
-            <a:br>
-              <a:rPr lang="en-US" dirty="0"/>
-            </a:br>
-            <a:r>
-              <a:rPr lang="en-US" dirty="0"/>
-              <a:t>Component Descriptions</a:t>
-            </a:r>
-            <a:endParaRPr dirty="0"/>
-          </a:p>
-        </p:txBody>
-      </p:sp>
-      <p:graphicFrame>
-        <p:nvGraphicFramePr>
-          <p:cNvPr id="5" name="Table 4">
-            <a:extLst>
-              <a:ext uri="{FF2B5EF4-FFF2-40B4-BE49-F238E27FC236}">
-                <a16:creationId xmlns:a16="http://schemas.microsoft.com/office/drawing/2014/main" id="{4B70F3A5-8062-29A2-30D0-2783CB3DFCCA}"/>
-              </a:ext>
-            </a:extLst>
-          </p:cNvPr>
-          <p:cNvGraphicFramePr>
-            <a:graphicFrameLocks noGrp="1"/>
-          </p:cNvGraphicFramePr>
-          <p:nvPr>
-            <p:extLst>
-              <p:ext uri="{D42A27DB-BD31-4B8C-83A1-F6EECF244321}">
-                <p14:modId xmlns:p14="http://schemas.microsoft.com/office/powerpoint/2010/main" val="2424982169"/>
-              </p:ext>
-            </p:extLst>
-          </p:nvPr>
-        </p:nvGraphicFramePr>
-        <p:xfrm>
-          <a:off x="969319" y="1690687"/>
-          <a:ext cx="10806369" cy="4609754"/>
-        </p:xfrm>
-        <a:graphic>
-          <a:graphicData uri="http://schemas.openxmlformats.org/drawingml/2006/table">
-            <a:tbl>
-              <a:tblPr firstRow="1" bandRow="1">
-                <a:tableStyleId>{5940675A-B579-460E-94D1-54222C63F5DA}</a:tableStyleId>
-              </a:tblPr>
-              <a:tblGrid>
-                <a:gridCol w="1929998">
-                  <a:extLst>
-                    <a:ext uri="{9D8B030D-6E8A-4147-A177-3AD203B41FA5}">
-                      <a16:colId xmlns:a16="http://schemas.microsoft.com/office/drawing/2014/main" val="533583650"/>
-                    </a:ext>
-                  </a:extLst>
-                </a:gridCol>
-                <a:gridCol w="8876371">
-                  <a:extLst>
-                    <a:ext uri="{9D8B030D-6E8A-4147-A177-3AD203B41FA5}">
-                      <a16:colId xmlns:a16="http://schemas.microsoft.com/office/drawing/2014/main" val="20127695"/>
-                    </a:ext>
-                  </a:extLst>
-                </a:gridCol>
-              </a:tblGrid>
-              <a:tr h="393080">
-                <a:tc>
-                  <a:txBody>
-                    <a:bodyPr/>
-                    <a:lstStyle/>
-                    <a:p>
-                      <a:r>
-                        <a:rPr lang="en-US" sz="1600" b="0" dirty="0"/>
-                        <a:t>Service Name</a:t>
-                      </a:r>
-                    </a:p>
-                  </a:txBody>
-                  <a:tcPr/>
-                </a:tc>
-                <a:tc>
-                  <a:txBody>
-                    <a:bodyPr/>
-                    <a:lstStyle/>
-                    <a:p>
-                      <a:r>
-                        <a:rPr lang="en-US" dirty="0"/>
-                        <a:t>Industry Innovation</a:t>
-                      </a:r>
-                    </a:p>
-                  </a:txBody>
-                  <a:tcPr/>
-                </a:tc>
-                <a:extLst>
-                  <a:ext uri="{0D108BD9-81ED-4DB2-BD59-A6C34878D82A}">
-                    <a16:rowId xmlns:a16="http://schemas.microsoft.com/office/drawing/2014/main" val="2683780345"/>
-                  </a:ext>
-                </a:extLst>
-              </a:tr>
-              <a:tr h="393080">
-                <a:tc>
-                  <a:txBody>
-                    <a:bodyPr/>
-                    <a:lstStyle/>
-                    <a:p>
-                      <a:r>
-                        <a:rPr lang="en-US" sz="1600" b="0" dirty="0"/>
-                        <a:t>Service Strategy</a:t>
-                      </a:r>
-                    </a:p>
-                  </a:txBody>
-                  <a:tcPr/>
-                </a:tc>
-                <a:tc>
-                  <a:txBody>
-                    <a:bodyPr/>
-                    <a:lstStyle/>
-                    <a:p>
-                      <a:r>
-                        <a:rPr lang="en-US" dirty="0"/>
-                        <a:t>&lt;3-Horizon Strategy for the Service&gt;</a:t>
-                      </a:r>
-                    </a:p>
-                  </a:txBody>
-                  <a:tcPr/>
-                </a:tc>
-                <a:extLst>
-                  <a:ext uri="{0D108BD9-81ED-4DB2-BD59-A6C34878D82A}">
-                    <a16:rowId xmlns:a16="http://schemas.microsoft.com/office/drawing/2014/main" val="2707085893"/>
-                  </a:ext>
-                </a:extLst>
-              </a:tr>
-              <a:tr h="607487">
-                <a:tc>
-                  <a:txBody>
-                    <a:bodyPr/>
-                    <a:lstStyle/>
-                    <a:p>
-                      <a:r>
-                        <a:rPr lang="en-US" sz="1600" b="0" dirty="0"/>
-                        <a:t>Service Context</a:t>
-                      </a:r>
-                    </a:p>
-                  </a:txBody>
-                  <a:tcPr/>
-                </a:tc>
-                <a:tc>
-                  <a:txBody>
-                    <a:bodyPr/>
-                    <a:lstStyle/>
-                    <a:p>
-                      <a:r>
-                        <a:rPr lang="en-US" dirty="0"/>
-                        <a:t>&lt;See SAFe Solution Context at </a:t>
-                      </a:r>
-                      <a:r>
-                        <a:rPr lang="en-US" dirty="0">
-                          <a:hlinkClick r:id="rId3"/>
-                        </a:rPr>
-                        <a:t>this link</a:t>
-                      </a:r>
-                      <a:r>
-                        <a:rPr lang="en-US" dirty="0"/>
-                        <a:t>&gt;</a:t>
-                      </a:r>
-                    </a:p>
-                  </a:txBody>
-                  <a:tcPr/>
-                </a:tc>
-                <a:extLst>
-                  <a:ext uri="{0D108BD9-81ED-4DB2-BD59-A6C34878D82A}">
-                    <a16:rowId xmlns:a16="http://schemas.microsoft.com/office/drawing/2014/main" val="1092281396"/>
-                  </a:ext>
-                </a:extLst>
-              </a:tr>
-              <a:tr h="607487">
-                <a:tc>
-                  <a:txBody>
-                    <a:bodyPr/>
-                    <a:lstStyle/>
-                    <a:p>
-                      <a:r>
-                        <a:rPr lang="en-US" sz="1600" b="0" dirty="0"/>
-                        <a:t>Service Intent</a:t>
-                      </a:r>
-                    </a:p>
-                  </a:txBody>
-                  <a:tcPr/>
-                </a:tc>
-                <a:tc>
-                  <a:txBody>
-                    <a:bodyPr/>
-                    <a:lstStyle/>
-                    <a:p>
-                      <a:r>
-                        <a:rPr lang="en-US" dirty="0"/>
-                        <a:t>&lt;See SAFe Solution Intent at </a:t>
-                      </a:r>
-                      <a:r>
-                        <a:rPr lang="en-US" dirty="0">
-                          <a:hlinkClick r:id="rId4"/>
-                        </a:rPr>
-                        <a:t>this link</a:t>
-                      </a:r>
-                      <a:r>
-                        <a:rPr lang="en-US" dirty="0"/>
-                        <a:t>&gt;</a:t>
-                      </a:r>
-                    </a:p>
-                  </a:txBody>
-                  <a:tcPr/>
-                </a:tc>
-                <a:extLst>
-                  <a:ext uri="{0D108BD9-81ED-4DB2-BD59-A6C34878D82A}">
-                    <a16:rowId xmlns:a16="http://schemas.microsoft.com/office/drawing/2014/main" val="2029769333"/>
-                  </a:ext>
-                </a:extLst>
-              </a:tr>
-              <a:tr h="393080">
-                <a:tc>
-                  <a:txBody>
-                    <a:bodyPr/>
-                    <a:lstStyle/>
-                    <a:p>
-                      <a:r>
-                        <a:rPr lang="en-US" sz="1600" b="0" dirty="0"/>
-                        <a:t>Development Kit</a:t>
-                      </a:r>
-                    </a:p>
-                  </a:txBody>
-                  <a:tcPr/>
-                </a:tc>
-                <a:tc>
-                  <a:txBody>
-                    <a:bodyPr/>
-                    <a:lstStyle/>
-                    <a:p>
-                      <a:r>
-                        <a:rPr lang="en-US" dirty="0"/>
-                        <a:t>&lt;Descriptions of Collateral and Tools used by the Products team to develop the service&gt;</a:t>
-                      </a:r>
-                    </a:p>
-                  </a:txBody>
-                  <a:tcPr/>
-                </a:tc>
-                <a:extLst>
-                  <a:ext uri="{0D108BD9-81ED-4DB2-BD59-A6C34878D82A}">
-                    <a16:rowId xmlns:a16="http://schemas.microsoft.com/office/drawing/2014/main" val="52804956"/>
-                  </a:ext>
-                </a:extLst>
-              </a:tr>
-              <a:tr h="857628">
-                <a:tc>
-                  <a:txBody>
-                    <a:bodyPr/>
-                    <a:lstStyle/>
-                    <a:p>
-                      <a:r>
-                        <a:rPr lang="en-US" sz="1600" b="0" dirty="0"/>
-                        <a:t>Demand </a:t>
-                      </a:r>
-                      <a:br>
-                        <a:rPr lang="en-US" sz="1600" b="0" dirty="0"/>
-                      </a:br>
-                      <a:r>
-                        <a:rPr lang="en-US" sz="1600" b="0" dirty="0"/>
-                        <a:t>Generation Kit</a:t>
-                      </a:r>
-                    </a:p>
-                  </a:txBody>
-                  <a:tcPr/>
-                </a:tc>
-                <a:tc>
-                  <a:txBody>
-                    <a:bodyPr/>
-                    <a:lstStyle/>
-                    <a:p>
-                      <a:r>
-                        <a:rPr lang="en-US" dirty="0"/>
-                        <a:t>&lt;Descriptions of Collateral and Tools used by Demand Generation to engage with potential beneficiaries in market segments about the service&gt;</a:t>
-                      </a:r>
-                    </a:p>
-                  </a:txBody>
-                  <a:tcPr/>
-                </a:tc>
-                <a:extLst>
-                  <a:ext uri="{0D108BD9-81ED-4DB2-BD59-A6C34878D82A}">
-                    <a16:rowId xmlns:a16="http://schemas.microsoft.com/office/drawing/2014/main" val="872717509"/>
-                  </a:ext>
-                </a:extLst>
-              </a:tr>
-              <a:tr h="678956">
-                <a:tc>
-                  <a:txBody>
-                    <a:bodyPr/>
-                    <a:lstStyle/>
-                    <a:p>
-                      <a:r>
-                        <a:rPr lang="en-US" sz="1600" b="0" dirty="0"/>
-                        <a:t>Beneficiaries Engagement Kit</a:t>
-                      </a:r>
-                    </a:p>
-                  </a:txBody>
-                  <a:tcPr/>
-                </a:tc>
-                <a:tc>
-                  <a:txBody>
-                    <a:bodyPr/>
-                    <a:lstStyle/>
-                    <a:p>
-                      <a:pPr lvl="2"/>
-                      <a:r>
-                        <a:rPr lang="en-US" dirty="0"/>
-                        <a:t>&lt;Descriptions of Collateral and Tools used by </a:t>
-                      </a:r>
-                      <a:r>
-                        <a:rPr lang="en-US" dirty="0" err="1"/>
-                        <a:t>Benficiaries</a:t>
-                      </a:r>
-                      <a:r>
-                        <a:rPr lang="en-US" dirty="0"/>
-                        <a:t> Engagement to engage with specific potential beneficiaries about the service&gt;</a:t>
-                      </a:r>
-                      <a:endParaRPr lang="en-US" sz="1400" b="0" i="0" u="none" strike="noStrike" cap="none" dirty="0">
-                        <a:solidFill>
-                          <a:schemeClr val="tx1"/>
-                        </a:solidFill>
-                        <a:effectLst/>
-                        <a:latin typeface="+mn-lt"/>
-                        <a:ea typeface="+mn-ea"/>
-                        <a:cs typeface="+mn-cs"/>
-                        <a:sym typeface="Arial"/>
-                      </a:endParaRPr>
-                    </a:p>
-                  </a:txBody>
-                  <a:tcPr/>
-                </a:tc>
-                <a:extLst>
-                  <a:ext uri="{0D108BD9-81ED-4DB2-BD59-A6C34878D82A}">
-                    <a16:rowId xmlns:a16="http://schemas.microsoft.com/office/drawing/2014/main" val="2047728929"/>
-                  </a:ext>
-                </a:extLst>
-              </a:tr>
-              <a:tr h="678956">
-                <a:tc>
-                  <a:txBody>
-                    <a:bodyPr/>
-                    <a:lstStyle/>
-                    <a:p>
-                      <a:r>
-                        <a:rPr lang="en-US" sz="1600" b="0" dirty="0"/>
-                        <a:t>Delivery of</a:t>
-                      </a:r>
-                      <a:br>
-                        <a:rPr lang="en-US" sz="1600" b="0" dirty="0"/>
-                      </a:br>
-                      <a:r>
-                        <a:rPr lang="en-US" sz="1600" b="0" dirty="0"/>
-                        <a:t>Service Kit</a:t>
-                      </a:r>
-                    </a:p>
-                  </a:txBody>
-                  <a:tcPr/>
-                </a:tc>
-                <a:tc>
-                  <a:txBody>
-                    <a:bodyPr/>
-                    <a:lstStyle/>
-                    <a:p>
-                      <a:r>
-                        <a:rPr lang="en-US" dirty="0"/>
-                        <a:t>&lt;Descriptions of Collateral and Tools used by Delivery of Service to engage with beneficiaries about the service&gt;</a:t>
-                      </a:r>
-                    </a:p>
-                  </a:txBody>
-                  <a:tcPr/>
-                </a:tc>
-                <a:extLst>
-                  <a:ext uri="{0D108BD9-81ED-4DB2-BD59-A6C34878D82A}">
-                    <a16:rowId xmlns:a16="http://schemas.microsoft.com/office/drawing/2014/main" val="2321847728"/>
-                  </a:ext>
-                </a:extLst>
-              </a:tr>
-            </a:tbl>
-          </a:graphicData>
-        </a:graphic>
-      </p:graphicFrame>
-      <p:sp>
-        <p:nvSpPr>
-          <p:cNvPr id="6" name="Rectangle 5">
-            <a:extLst>
-              <a:ext uri="{FF2B5EF4-FFF2-40B4-BE49-F238E27FC236}">
-                <a16:creationId xmlns:a16="http://schemas.microsoft.com/office/drawing/2014/main" id="{A7372D81-FEF0-F693-D686-F9DF46C1643F}"/>
-              </a:ext>
-            </a:extLst>
-          </p:cNvPr>
-          <p:cNvSpPr/>
-          <p:nvPr/>
-        </p:nvSpPr>
-        <p:spPr>
-          <a:xfrm>
-            <a:off x="969319" y="-1"/>
-            <a:ext cx="2743200" cy="263047"/>
-          </a:xfrm>
-          <a:prstGeom prst="rect">
-            <a:avLst/>
-          </a:prstGeom>
-          <a:solidFill>
-            <a:schemeClr val="bg1"/>
-          </a:solidFill>
-        </p:spPr>
-        <p:style>
-          <a:lnRef idx="2">
-            <a:schemeClr val="accent1">
-              <a:shade val="15000"/>
-            </a:schemeClr>
-          </a:lnRef>
-          <a:fillRef idx="1">
-            <a:schemeClr val="accent1"/>
-          </a:fillRef>
-          <a:effectRef idx="0">
-            <a:schemeClr val="accent1"/>
-          </a:effectRef>
-          <a:fontRef idx="minor">
-            <a:schemeClr val="lt1"/>
-          </a:fontRef>
-        </p:style>
-        <p:txBody>
-          <a:bodyPr rtlCol="0" anchor="ctr"/>
-          <a:lstStyle/>
-          <a:p>
-            <a:pPr algn="ctr"/>
-            <a:r>
-              <a:rPr lang="en-US" dirty="0">
-                <a:solidFill>
-                  <a:schemeClr val="tx1"/>
-                </a:solidFill>
-              </a:rPr>
-              <a:t>Reviewing Stage</a:t>
-            </a:r>
-          </a:p>
-        </p:txBody>
-      </p:sp>
-      <p:sp>
-        <p:nvSpPr>
-          <p:cNvPr id="7" name="Rectangle 6">
-            <a:extLst>
-              <a:ext uri="{FF2B5EF4-FFF2-40B4-BE49-F238E27FC236}">
-                <a16:creationId xmlns:a16="http://schemas.microsoft.com/office/drawing/2014/main" id="{CF9C5A52-20CA-F258-B608-01820FE0C522}"/>
-              </a:ext>
-            </a:extLst>
-          </p:cNvPr>
-          <p:cNvSpPr/>
-          <p:nvPr/>
-        </p:nvSpPr>
-        <p:spPr>
-          <a:xfrm>
-            <a:off x="3733400" y="-1"/>
-            <a:ext cx="2743200" cy="263047"/>
-          </a:xfrm>
-          <a:prstGeom prst="rect">
-            <a:avLst/>
-          </a:prstGeom>
-          <a:solidFill>
-            <a:schemeClr val="tx1"/>
-          </a:solidFill>
-        </p:spPr>
-        <p:style>
-          <a:lnRef idx="2">
-            <a:schemeClr val="accent1">
-              <a:shade val="15000"/>
-            </a:schemeClr>
-          </a:lnRef>
-          <a:fillRef idx="1">
-            <a:schemeClr val="accent1"/>
-          </a:fillRef>
-          <a:effectRef idx="0">
-            <a:schemeClr val="accent1"/>
-          </a:effectRef>
-          <a:fontRef idx="minor">
-            <a:schemeClr val="lt1"/>
-          </a:fontRef>
-        </p:style>
-        <p:txBody>
-          <a:bodyPr rtlCol="0" anchor="ctr"/>
-          <a:lstStyle/>
-          <a:p>
-            <a:pPr algn="ctr"/>
-            <a:r>
-              <a:rPr lang="en-US" dirty="0">
-                <a:solidFill>
-                  <a:schemeClr val="bg1"/>
-                </a:solidFill>
-              </a:rPr>
-              <a:t>Analysis Stage</a:t>
-            </a:r>
-          </a:p>
-        </p:txBody>
-      </p:sp>
-      <p:sp>
-        <p:nvSpPr>
-          <p:cNvPr id="8" name="Rectangle 7">
-            <a:extLst>
-              <a:ext uri="{FF2B5EF4-FFF2-40B4-BE49-F238E27FC236}">
-                <a16:creationId xmlns:a16="http://schemas.microsoft.com/office/drawing/2014/main" id="{5A08F55C-5399-5D3A-6145-A00CC01B7E5F}"/>
-              </a:ext>
-            </a:extLst>
-          </p:cNvPr>
-          <p:cNvSpPr/>
-          <p:nvPr/>
-        </p:nvSpPr>
-        <p:spPr>
-          <a:xfrm>
-            <a:off x="6484954" y="-1"/>
-            <a:ext cx="2743200" cy="263047"/>
-          </a:xfrm>
-          <a:prstGeom prst="rect">
-            <a:avLst/>
-          </a:prstGeom>
-          <a:solidFill>
-            <a:schemeClr val="bg1"/>
-          </a:solidFill>
-        </p:spPr>
-        <p:style>
-          <a:lnRef idx="2">
-            <a:schemeClr val="accent1">
-              <a:shade val="15000"/>
-            </a:schemeClr>
-          </a:lnRef>
-          <a:fillRef idx="1">
-            <a:schemeClr val="accent1"/>
-          </a:fillRef>
-          <a:effectRef idx="0">
-            <a:schemeClr val="accent1"/>
-          </a:effectRef>
-          <a:fontRef idx="minor">
-            <a:schemeClr val="lt1"/>
-          </a:fontRef>
-        </p:style>
-        <p:txBody>
-          <a:bodyPr rtlCol="0" anchor="ctr"/>
-          <a:lstStyle/>
-          <a:p>
-            <a:pPr algn="ctr"/>
-            <a:r>
-              <a:rPr lang="en-US" dirty="0">
-                <a:solidFill>
-                  <a:schemeClr val="tx1"/>
-                </a:solidFill>
-              </a:rPr>
-              <a:t>Implementing - MVP Stage</a:t>
-            </a:r>
-          </a:p>
-        </p:txBody>
-      </p:sp>
-    </p:spTree>
-    <p:extLst>
-      <p:ext uri="{BB962C8B-B14F-4D97-AF65-F5344CB8AC3E}">
-        <p14:creationId xmlns:p14="http://schemas.microsoft.com/office/powerpoint/2010/main" val="3960435043"/>
-      </p:ext>
-    </p:extLst>
-  </p:cSld>
-  <p:clrMapOvr>
-    <a:masterClrMapping/>
-  </p:clrMapOvr>
-</p:sld>
-</file>
-
-<file path=ppt/slides/slide14.xml><?xml version="1.0" encoding="utf-8"?>
-<p:sld xmlns:a="http://schemas.openxmlformats.org/drawingml/2006/main" xmlns:r="http://schemas.openxmlformats.org/officeDocument/2006/relationships" xmlns:p="http://schemas.openxmlformats.org/presentationml/2006/main">
-  <p:cSld>
-    <p:spTree>
-      <p:nvGrpSpPr>
         <p:cNvPr id="1" name=""/>
         <p:cNvGrpSpPr/>
         <p:nvPr/>
@@ -20385,7 +16195,7 @@
 </p:sld>
 </file>
 
-<file path=ppt/slides/slide15.xml><?xml version="1.0" encoding="utf-8"?>
+<file path=ppt/slides/slide11.xml><?xml version="1.0" encoding="utf-8"?>
 <p:sld xmlns:a="http://schemas.openxmlformats.org/drawingml/2006/main" xmlns:r="http://schemas.openxmlformats.org/officeDocument/2006/relationships" xmlns:p="http://schemas.openxmlformats.org/presentationml/2006/main">
   <p:cSld>
     <p:spTree>
@@ -21754,750 +17564,6 @@
           </a:p>
         </p:txBody>
       </p:sp>
-      <p:graphicFrame>
-        <p:nvGraphicFramePr>
-          <p:cNvPr id="5" name="Table 4">
-            <a:extLst>
-              <a:ext uri="{FF2B5EF4-FFF2-40B4-BE49-F238E27FC236}">
-                <a16:creationId xmlns:a16="http://schemas.microsoft.com/office/drawing/2014/main" id="{4B70F3A5-8062-29A2-30D0-2783CB3DFCCA}"/>
-              </a:ext>
-            </a:extLst>
-          </p:cNvPr>
-          <p:cNvGraphicFramePr>
-            <a:graphicFrameLocks noGrp="1"/>
-          </p:cNvGraphicFramePr>
-          <p:nvPr>
-            <p:extLst>
-              <p:ext uri="{D42A27DB-BD31-4B8C-83A1-F6EECF244321}">
-                <p14:modId xmlns:p14="http://schemas.microsoft.com/office/powerpoint/2010/main" val="808228977"/>
-              </p:ext>
-            </p:extLst>
-          </p:nvPr>
-        </p:nvGraphicFramePr>
-        <p:xfrm>
-          <a:off x="268942" y="1398868"/>
-          <a:ext cx="11766176" cy="5242560"/>
-        </p:xfrm>
-        <a:graphic>
-          <a:graphicData uri="http://schemas.openxmlformats.org/drawingml/2006/table">
-            <a:tbl>
-              <a:tblPr firstRow="1" bandRow="1">
-                <a:tableStyleId>{5940675A-B579-460E-94D1-54222C63F5DA}</a:tableStyleId>
-              </a:tblPr>
-              <a:tblGrid>
-                <a:gridCol w="1882110">
-                  <a:extLst>
-                    <a:ext uri="{9D8B030D-6E8A-4147-A177-3AD203B41FA5}">
-                      <a16:colId xmlns:a16="http://schemas.microsoft.com/office/drawing/2014/main" val="533583650"/>
-                    </a:ext>
-                  </a:extLst>
-                </a:gridCol>
-                <a:gridCol w="9884066">
-                  <a:extLst>
-                    <a:ext uri="{9D8B030D-6E8A-4147-A177-3AD203B41FA5}">
-                      <a16:colId xmlns:a16="http://schemas.microsoft.com/office/drawing/2014/main" val="20127695"/>
-                    </a:ext>
-                  </a:extLst>
-                </a:gridCol>
-              </a:tblGrid>
-              <a:tr h="220586">
-                <a:tc>
-                  <a:txBody>
-                    <a:bodyPr/>
-                    <a:lstStyle/>
-                    <a:p>
-                      <a:r>
-                        <a:rPr lang="en-US" sz="1600" b="0" dirty="0"/>
-                        <a:t>Funnel Entry Date</a:t>
-                      </a:r>
-                    </a:p>
-                  </a:txBody>
-                  <a:tcPr/>
-                </a:tc>
-                <a:tc>
-                  <a:txBody>
-                    <a:bodyPr/>
-                    <a:lstStyle/>
-                    <a:p>
-                      <a:r>
-                        <a:rPr lang="en-US" dirty="0"/>
-                        <a:t>February 1, 2024</a:t>
-                      </a:r>
-                    </a:p>
-                  </a:txBody>
-                  <a:tcPr/>
-                </a:tc>
-                <a:extLst>
-                  <a:ext uri="{0D108BD9-81ED-4DB2-BD59-A6C34878D82A}">
-                    <a16:rowId xmlns:a16="http://schemas.microsoft.com/office/drawing/2014/main" val="1092281396"/>
-                  </a:ext>
-                </a:extLst>
-              </a:tr>
-              <a:tr h="220586">
-                <a:tc>
-                  <a:txBody>
-                    <a:bodyPr/>
-                    <a:lstStyle/>
-                    <a:p>
-                      <a:r>
-                        <a:rPr lang="en-US" sz="1600" b="0" dirty="0"/>
-                        <a:t>Service Name</a:t>
-                      </a:r>
-                    </a:p>
-                  </a:txBody>
-                  <a:tcPr/>
-                </a:tc>
-                <a:tc>
-                  <a:txBody>
-                    <a:bodyPr/>
-                    <a:lstStyle/>
-                    <a:p>
-                      <a:pPr marL="0" marR="0" lvl="0" indent="0" algn="l" defTabSz="914400" rtl="0" eaLnBrk="1" fontAlgn="auto" latinLnBrk="0" hangingPunct="1">
-                        <a:lnSpc>
-                          <a:spcPct val="100000"/>
-                        </a:lnSpc>
-                        <a:spcBef>
-                          <a:spcPts val="0"/>
-                        </a:spcBef>
-                        <a:spcAft>
-                          <a:spcPts val="0"/>
-                        </a:spcAft>
-                        <a:buClr>
-                          <a:srgbClr val="000000"/>
-                        </a:buClr>
-                        <a:buSzTx/>
-                        <a:buFont typeface="Arial"/>
-                        <a:buNone/>
-                        <a:tabLst/>
-                        <a:defRPr/>
-                      </a:pPr>
-                      <a:r>
-                        <a:rPr lang="en-US" dirty="0"/>
-                        <a:t>Industry Innovation</a:t>
-                      </a:r>
-                    </a:p>
-                  </a:txBody>
-                  <a:tcPr/>
-                </a:tc>
-                <a:extLst>
-                  <a:ext uri="{0D108BD9-81ED-4DB2-BD59-A6C34878D82A}">
-                    <a16:rowId xmlns:a16="http://schemas.microsoft.com/office/drawing/2014/main" val="2029769333"/>
-                  </a:ext>
-                </a:extLst>
-              </a:tr>
-              <a:tr h="220586">
-                <a:tc>
-                  <a:txBody>
-                    <a:bodyPr/>
-                    <a:lstStyle/>
-                    <a:p>
-                      <a:r>
-                        <a:rPr lang="en-US" sz="1600" b="0" dirty="0"/>
-                        <a:t>Service Owner</a:t>
-                      </a:r>
-                    </a:p>
-                  </a:txBody>
-                  <a:tcPr/>
-                </a:tc>
-                <a:tc>
-                  <a:txBody>
-                    <a:bodyPr/>
-                    <a:lstStyle/>
-                    <a:p>
-                      <a:r>
-                        <a:rPr lang="en-US" dirty="0"/>
-                        <a:t>Industry Innovation Service Leader</a:t>
-                      </a:r>
-                    </a:p>
-                  </a:txBody>
-                  <a:tcPr/>
-                </a:tc>
-                <a:extLst>
-                  <a:ext uri="{0D108BD9-81ED-4DB2-BD59-A6C34878D82A}">
-                    <a16:rowId xmlns:a16="http://schemas.microsoft.com/office/drawing/2014/main" val="872717509"/>
-                  </a:ext>
-                </a:extLst>
-              </a:tr>
-              <a:tr h="1323514">
-                <a:tc>
-                  <a:txBody>
-                    <a:bodyPr/>
-                    <a:lstStyle/>
-                    <a:p>
-                      <a:r>
-                        <a:rPr lang="en-US" sz="1600" b="0" dirty="0"/>
-                        <a:t>Service Description</a:t>
-                      </a:r>
-                    </a:p>
-                  </a:txBody>
-                  <a:tcPr/>
-                </a:tc>
-                <a:tc>
-                  <a:txBody>
-                    <a:bodyPr/>
-                    <a:lstStyle/>
-                    <a:p>
-                      <a:pPr lvl="2"/>
-                      <a:r>
-                        <a:rPr lang="en-US" sz="1400" b="1" i="0" u="none" strike="noStrike" cap="none" dirty="0">
-                          <a:solidFill>
-                            <a:schemeClr val="tx1"/>
-                          </a:solidFill>
-                          <a:effectLst/>
-                          <a:latin typeface="+mn-lt"/>
-                          <a:ea typeface="+mn-ea"/>
-                          <a:cs typeface="+mn-cs"/>
-                          <a:sym typeface="Arial"/>
-                        </a:rPr>
-                        <a:t>FOR</a:t>
-                      </a:r>
-                      <a:r>
-                        <a:rPr lang="en-US" sz="1400" b="0" i="0" u="none" strike="noStrike" cap="none" dirty="0">
-                          <a:solidFill>
-                            <a:schemeClr val="tx1"/>
-                          </a:solidFill>
-                          <a:effectLst/>
-                          <a:latin typeface="+mn-lt"/>
-                          <a:ea typeface="+mn-ea"/>
-                          <a:cs typeface="+mn-cs"/>
-                          <a:sym typeface="Arial"/>
-                        </a:rPr>
-                        <a:t> enterprising leaders involved or interested in the Tech Services industry</a:t>
-                      </a:r>
-                    </a:p>
-                    <a:p>
-                      <a:pPr lvl="2"/>
-                      <a:r>
-                        <a:rPr lang="en-US" sz="1400" b="1" i="0" u="none" strike="noStrike" cap="none" dirty="0">
-                          <a:solidFill>
-                            <a:schemeClr val="tx1"/>
-                          </a:solidFill>
-                          <a:effectLst/>
-                          <a:latin typeface="+mn-lt"/>
-                          <a:ea typeface="+mn-ea"/>
-                          <a:cs typeface="+mn-cs"/>
-                          <a:sym typeface="Arial"/>
-                        </a:rPr>
-                        <a:t>WHO</a:t>
-                      </a:r>
-                      <a:r>
-                        <a:rPr lang="en-US" sz="1400" b="0" i="0" u="none" strike="noStrike" cap="none" dirty="0">
-                          <a:solidFill>
-                            <a:schemeClr val="tx1"/>
-                          </a:solidFill>
-                          <a:effectLst/>
-                          <a:latin typeface="+mn-lt"/>
-                          <a:ea typeface="+mn-ea"/>
-                          <a:cs typeface="+mn-cs"/>
-                          <a:sym typeface="Arial"/>
-                        </a:rPr>
-                        <a:t> want to improve their career opportunities and the Tech Services industry’s impact</a:t>
-                      </a:r>
-                    </a:p>
-                    <a:p>
-                      <a:pPr lvl="2"/>
-                      <a:r>
-                        <a:rPr lang="en-US" sz="1400" b="1" i="0" u="none" strike="noStrike" cap="none" dirty="0">
-                          <a:solidFill>
-                            <a:schemeClr val="tx1"/>
-                          </a:solidFill>
-                          <a:effectLst/>
-                          <a:latin typeface="+mn-lt"/>
-                          <a:ea typeface="+mn-ea"/>
-                          <a:cs typeface="+mn-cs"/>
-                          <a:sym typeface="Arial"/>
-                        </a:rPr>
-                        <a:t>THE</a:t>
-                      </a:r>
-                      <a:r>
-                        <a:rPr lang="en-US" sz="1400" b="0" i="0" u="none" strike="noStrike" cap="none" dirty="0">
-                          <a:solidFill>
-                            <a:schemeClr val="tx1"/>
-                          </a:solidFill>
-                          <a:effectLst/>
-                          <a:latin typeface="+mn-lt"/>
-                          <a:ea typeface="+mn-ea"/>
-                          <a:cs typeface="+mn-cs"/>
-                          <a:sym typeface="Arial"/>
-                        </a:rPr>
-                        <a:t> AccelRR8 Consortium Non-Profit’s Industry Innovation Service</a:t>
-                      </a:r>
-                    </a:p>
-                    <a:p>
-                      <a:pPr lvl="2"/>
-                      <a:r>
-                        <a:rPr lang="en-US" sz="1400" b="0" i="0" u="none" strike="noStrike" cap="none" dirty="0">
-                          <a:solidFill>
-                            <a:schemeClr val="tx1"/>
-                          </a:solidFill>
-                          <a:effectLst/>
-                          <a:latin typeface="+mn-lt"/>
-                          <a:ea typeface="+mn-ea"/>
-                          <a:cs typeface="+mn-cs"/>
-                          <a:sym typeface="Arial"/>
-                        </a:rPr>
-                        <a:t>I</a:t>
-                      </a:r>
-                      <a:r>
-                        <a:rPr lang="en-US" sz="1400" b="1" i="0" u="none" strike="noStrike" cap="none" dirty="0">
-                          <a:solidFill>
-                            <a:schemeClr val="tx1"/>
-                          </a:solidFill>
-                          <a:effectLst/>
-                          <a:latin typeface="+mn-lt"/>
-                          <a:ea typeface="+mn-ea"/>
-                          <a:cs typeface="+mn-cs"/>
-                          <a:sym typeface="Arial"/>
-                        </a:rPr>
-                        <a:t>S AN</a:t>
-                      </a:r>
-                      <a:r>
-                        <a:rPr lang="en-US" sz="1400" b="0" i="0" u="none" strike="noStrike" cap="none" dirty="0">
-                          <a:solidFill>
-                            <a:schemeClr val="tx1"/>
-                          </a:solidFill>
-                          <a:effectLst/>
-                          <a:latin typeface="+mn-lt"/>
-                          <a:ea typeface="+mn-ea"/>
-                          <a:cs typeface="+mn-cs"/>
-                          <a:sym typeface="Arial"/>
-                        </a:rPr>
-                        <a:t> </a:t>
-                      </a:r>
-                      <a:r>
-                        <a:rPr lang="en-US" sz="1400" b="1" i="0" u="none" strike="noStrike" cap="none" dirty="0">
-                          <a:solidFill>
-                            <a:schemeClr val="accent2"/>
-                          </a:solidFill>
-                          <a:effectLst/>
-                          <a:latin typeface="+mn-lt"/>
-                          <a:ea typeface="+mn-ea"/>
-                          <a:cs typeface="+mn-cs"/>
-                          <a:sym typeface="Arial"/>
-                        </a:rPr>
-                        <a:t>AI</a:t>
-                      </a:r>
-                      <a:r>
-                        <a:rPr lang="en-US" sz="1400" b="0" i="0" u="none" strike="noStrike" cap="none" dirty="0">
-                          <a:solidFill>
-                            <a:schemeClr val="tx1"/>
-                          </a:solidFill>
-                          <a:effectLst/>
-                          <a:latin typeface="+mn-lt"/>
-                          <a:ea typeface="+mn-ea"/>
-                          <a:cs typeface="+mn-cs"/>
-                          <a:sym typeface="Arial"/>
-                        </a:rPr>
-                        <a:t>-powered innovation support function</a:t>
-                      </a:r>
-                    </a:p>
-                    <a:p>
-                      <a:pPr lvl="2"/>
-                      <a:r>
-                        <a:rPr lang="en-US" sz="1400" b="1" i="0" u="none" strike="noStrike" cap="none" dirty="0">
-                          <a:solidFill>
-                            <a:schemeClr val="tx1"/>
-                          </a:solidFill>
-                          <a:effectLst/>
-                          <a:latin typeface="+mn-lt"/>
-                          <a:ea typeface="+mn-ea"/>
-                          <a:cs typeface="+mn-cs"/>
-                          <a:sym typeface="Arial"/>
-                        </a:rPr>
-                        <a:t>THAT</a:t>
-                      </a:r>
-                      <a:r>
-                        <a:rPr lang="en-US" sz="1400" b="0" i="0" u="none" strike="noStrike" cap="none" dirty="0">
-                          <a:solidFill>
-                            <a:schemeClr val="tx1"/>
-                          </a:solidFill>
-                          <a:effectLst/>
-                          <a:latin typeface="+mn-lt"/>
-                          <a:ea typeface="+mn-ea"/>
-                          <a:cs typeface="+mn-cs"/>
-                          <a:sym typeface="Arial"/>
-                        </a:rPr>
-                        <a:t> helps patron-supported innovation teams use proven accelerators to develop innovative solutions</a:t>
-                      </a:r>
-                      <a:r>
-                        <a:rPr lang="en-US" dirty="0"/>
-                        <a:t>.</a:t>
-                      </a:r>
-                      <a:endParaRPr lang="en-US" sz="1400" b="0" i="0" u="none" strike="noStrike" cap="none" dirty="0">
-                        <a:solidFill>
-                          <a:schemeClr val="tx1"/>
-                        </a:solidFill>
-                        <a:effectLst/>
-                        <a:latin typeface="+mn-lt"/>
-                        <a:ea typeface="+mn-ea"/>
-                        <a:cs typeface="+mn-cs"/>
-                        <a:sym typeface="Arial"/>
-                      </a:endParaRPr>
-                    </a:p>
-                    <a:p>
-                      <a:pPr lvl="2"/>
-                      <a:r>
-                        <a:rPr lang="en-US" sz="1400" b="1" i="0" u="none" strike="noStrike" cap="none" dirty="0">
-                          <a:solidFill>
-                            <a:schemeClr val="tx1"/>
-                          </a:solidFill>
-                          <a:effectLst/>
-                          <a:latin typeface="+mn-lt"/>
-                          <a:ea typeface="+mn-ea"/>
-                          <a:cs typeface="+mn-cs"/>
-                          <a:sym typeface="Arial"/>
-                        </a:rPr>
-                        <a:t>UNLIKE</a:t>
-                      </a:r>
-                      <a:r>
-                        <a:rPr lang="en-US" sz="1400" b="0" i="0" u="none" strike="noStrike" cap="none" dirty="0">
-                          <a:solidFill>
-                            <a:schemeClr val="tx1"/>
-                          </a:solidFill>
-                          <a:effectLst/>
-                          <a:latin typeface="+mn-lt"/>
-                          <a:ea typeface="+mn-ea"/>
-                          <a:cs typeface="+mn-cs"/>
-                          <a:sym typeface="Arial"/>
-                        </a:rPr>
-                        <a:t> other associations that support innovation,</a:t>
-                      </a:r>
-                    </a:p>
-                    <a:p>
-                      <a:pPr lvl="2"/>
-                      <a:r>
-                        <a:rPr lang="en-US" sz="1400" b="1" i="0" u="none" strike="noStrike" cap="none" dirty="0">
-                          <a:solidFill>
-                            <a:schemeClr val="tx1"/>
-                          </a:solidFill>
-                          <a:effectLst/>
-                          <a:latin typeface="+mn-lt"/>
-                          <a:ea typeface="+mn-ea"/>
-                          <a:cs typeface="+mn-cs"/>
-                          <a:sym typeface="Arial"/>
-                        </a:rPr>
-                        <a:t>OUR SERVICE’s</a:t>
-                      </a:r>
-                      <a:r>
-                        <a:rPr lang="en-US" sz="1400" b="0" i="0" u="none" strike="noStrike" cap="none" dirty="0">
-                          <a:solidFill>
-                            <a:schemeClr val="tx1"/>
-                          </a:solidFill>
-                          <a:effectLst/>
-                          <a:latin typeface="+mn-lt"/>
-                          <a:ea typeface="+mn-ea"/>
-                          <a:cs typeface="+mn-cs"/>
-                          <a:sym typeface="Arial"/>
-                        </a:rPr>
-                        <a:t> own success will be a key proof point of our Consortium’s core premise:  industry innovation teams, supported by </a:t>
-                      </a:r>
-                      <a:r>
-                        <a:rPr lang="en-US" sz="1400" b="1" i="0" u="none" strike="noStrike" cap="none" dirty="0">
-                          <a:solidFill>
-                            <a:srgbClr val="00B050"/>
-                          </a:solidFill>
-                          <a:effectLst/>
-                          <a:latin typeface="+mn-lt"/>
-                          <a:ea typeface="+mn-ea"/>
-                          <a:cs typeface="+mn-cs"/>
-                          <a:sym typeface="Arial"/>
-                        </a:rPr>
-                        <a:t>generative learning</a:t>
-                      </a:r>
-                      <a:r>
-                        <a:rPr lang="en-US" sz="1400" b="0" i="0" u="none" strike="noStrike" cap="none" dirty="0">
-                          <a:solidFill>
-                            <a:schemeClr val="tx1"/>
-                          </a:solidFill>
-                          <a:effectLst/>
-                          <a:latin typeface="+mn-lt"/>
-                          <a:ea typeface="+mn-ea"/>
-                          <a:cs typeface="+mn-cs"/>
-                          <a:sym typeface="Arial"/>
-                        </a:rPr>
-                        <a:t> and </a:t>
-                      </a:r>
-                      <a:r>
-                        <a:rPr lang="en-US" sz="1400" b="1" i="0" u="none" strike="noStrike" cap="none" dirty="0">
-                          <a:solidFill>
-                            <a:schemeClr val="accent2"/>
-                          </a:solidFill>
-                          <a:effectLst/>
-                          <a:latin typeface="+mn-lt"/>
-                          <a:ea typeface="+mn-ea"/>
-                          <a:cs typeface="+mn-cs"/>
-                          <a:sym typeface="Arial"/>
-                        </a:rPr>
-                        <a:t>AI</a:t>
-                      </a:r>
-                      <a:r>
-                        <a:rPr lang="en-US" sz="1400" b="0" i="0" u="none" strike="noStrike" cap="none" dirty="0">
-                          <a:solidFill>
-                            <a:schemeClr val="tx1"/>
-                          </a:solidFill>
-                          <a:effectLst/>
-                          <a:latin typeface="+mn-lt"/>
-                          <a:ea typeface="+mn-ea"/>
-                          <a:cs typeface="+mn-cs"/>
-                          <a:sym typeface="Arial"/>
-                        </a:rPr>
-                        <a:t>, use </a:t>
-                      </a:r>
-                      <a:r>
-                        <a:rPr lang="en-US" sz="1400" b="1" i="0" u="none" strike="noStrike" cap="none" dirty="0">
-                          <a:solidFill>
-                            <a:srgbClr val="00B050"/>
-                          </a:solidFill>
-                          <a:effectLst/>
-                          <a:latin typeface="+mn-lt"/>
-                          <a:ea typeface="+mn-ea"/>
-                          <a:cs typeface="+mn-cs"/>
-                          <a:sym typeface="Arial"/>
-                        </a:rPr>
-                        <a:t>compounding innovation</a:t>
-                      </a:r>
-                      <a:r>
-                        <a:rPr lang="en-US" sz="1400" b="0" i="0" u="none" strike="noStrike" cap="none" dirty="0">
-                          <a:solidFill>
-                            <a:schemeClr val="tx1"/>
-                          </a:solidFill>
-                          <a:effectLst/>
-                          <a:latin typeface="+mn-lt"/>
-                          <a:ea typeface="+mn-ea"/>
-                          <a:cs typeface="+mn-cs"/>
-                          <a:sym typeface="Arial"/>
-                        </a:rPr>
-                        <a:t> to develop solutions that address priority industry challenges, grow value exponentially, advance the state-of-the-art, and ultimately benefit humanity. </a:t>
-                      </a:r>
-                    </a:p>
-                  </a:txBody>
-                  <a:tcPr/>
-                </a:tc>
-                <a:extLst>
-                  <a:ext uri="{0D108BD9-81ED-4DB2-BD59-A6C34878D82A}">
-                    <a16:rowId xmlns:a16="http://schemas.microsoft.com/office/drawing/2014/main" val="2047728929"/>
-                  </a:ext>
-                </a:extLst>
-              </a:tr>
-              <a:tr h="481278">
-                <a:tc>
-                  <a:txBody>
-                    <a:bodyPr/>
-                    <a:lstStyle/>
-                    <a:p>
-                      <a:r>
-                        <a:rPr lang="en-US" sz="1600" b="0" dirty="0"/>
-                        <a:t>Business Outcomes</a:t>
-                      </a:r>
-                    </a:p>
-                  </a:txBody>
-                  <a:tcPr/>
-                </a:tc>
-                <a:tc>
-                  <a:txBody>
-                    <a:bodyPr/>
-                    <a:lstStyle/>
-                    <a:p>
-                      <a:pPr marL="125413" indent="-125413">
-                        <a:buFont typeface="Arial" panose="020B0604020202020204" pitchFamily="34" charset="0"/>
-                        <a:buChar char="•"/>
-                        <a:tabLst/>
-                      </a:pPr>
-                      <a:r>
-                        <a:rPr lang="en-US" b="1" dirty="0"/>
-                        <a:t>Subscribers and Patrons</a:t>
-                      </a:r>
-                      <a:r>
-                        <a:rPr lang="en-US" dirty="0"/>
-                        <a:t>:  improve their professional network, skills / capabilities, brand, and opportunities</a:t>
-                      </a:r>
-                    </a:p>
-                    <a:p>
-                      <a:pPr marL="125413" indent="-125413">
-                        <a:buFont typeface="Arial" panose="020B0604020202020204" pitchFamily="34" charset="0"/>
-                        <a:buChar char="•"/>
-                        <a:tabLst/>
-                      </a:pPr>
-                      <a:r>
-                        <a:rPr lang="en-US" b="1" dirty="0"/>
-                        <a:t>Tech Services industry</a:t>
-                      </a:r>
-                      <a:r>
-                        <a:rPr lang="en-US" dirty="0"/>
-                        <a:t>:  cross-company learning among leaders with scarce talents</a:t>
-                      </a:r>
-                    </a:p>
-                    <a:p>
-                      <a:pPr marL="125413" indent="-125413">
-                        <a:buFont typeface="Arial" panose="020B0604020202020204" pitchFamily="34" charset="0"/>
-                        <a:buChar char="•"/>
-                        <a:tabLst/>
-                      </a:pPr>
-                      <a:r>
-                        <a:rPr lang="en-US" b="1" dirty="0"/>
-                        <a:t>AccelRR8 Consortium</a:t>
-                      </a:r>
-                      <a:r>
-                        <a:rPr lang="en-US" dirty="0"/>
-                        <a:t>: exponential benefits via Market Network Effects (per </a:t>
-                      </a:r>
-                      <a:r>
-                        <a:rPr lang="en-US" dirty="0" err="1"/>
-                        <a:t>nfx.com</a:t>
-                      </a:r>
-                      <a:r>
-                        <a:rPr lang="en-US" dirty="0"/>
-                        <a:t>)</a:t>
-                      </a:r>
-                    </a:p>
-                  </a:txBody>
-                  <a:tcPr/>
-                </a:tc>
-                <a:extLst>
-                  <a:ext uri="{0D108BD9-81ED-4DB2-BD59-A6C34878D82A}">
-                    <a16:rowId xmlns:a16="http://schemas.microsoft.com/office/drawing/2014/main" val="2321847728"/>
-                  </a:ext>
-                </a:extLst>
-              </a:tr>
-              <a:tr h="220586">
-                <a:tc>
-                  <a:txBody>
-                    <a:bodyPr/>
-                    <a:lstStyle/>
-                    <a:p>
-                      <a:r>
-                        <a:rPr lang="en-US" sz="1600" b="0" dirty="0"/>
-                        <a:t>Leading Indicators</a:t>
-                      </a:r>
-                    </a:p>
-                  </a:txBody>
-                  <a:tcPr/>
-                </a:tc>
-                <a:tc>
-                  <a:txBody>
-                    <a:bodyPr/>
-                    <a:lstStyle/>
-                    <a:p>
-                      <a:r>
-                        <a:rPr lang="en-US" dirty="0"/>
-                        <a:t>1000 subscribers in the network who are net promoters of this service</a:t>
-                      </a:r>
-                    </a:p>
-                  </a:txBody>
-                  <a:tcPr/>
-                </a:tc>
-                <a:extLst>
-                  <a:ext uri="{0D108BD9-81ED-4DB2-BD59-A6C34878D82A}">
-                    <a16:rowId xmlns:a16="http://schemas.microsoft.com/office/drawing/2014/main" val="1735022269"/>
-                  </a:ext>
-                </a:extLst>
-              </a:tr>
-              <a:tr h="762023">
-                <a:tc>
-                  <a:txBody>
-                    <a:bodyPr/>
-                    <a:lstStyle/>
-                    <a:p>
-                      <a:r>
-                        <a:rPr lang="en-US" sz="1600" b="0" dirty="0"/>
-                        <a:t>Non-functional Requirements</a:t>
-                      </a:r>
-                    </a:p>
-                  </a:txBody>
-                  <a:tcPr/>
-                </a:tc>
-                <a:tc>
-                  <a:txBody>
-                    <a:bodyPr/>
-                    <a:lstStyle/>
-                    <a:p>
-                      <a:pPr marL="114300" indent="-114300">
-                        <a:buFont typeface="Arial" panose="020B0604020202020204" pitchFamily="34" charset="0"/>
-                        <a:buChar char="•"/>
-                        <a:tabLst/>
-                      </a:pPr>
-                      <a:r>
-                        <a:rPr lang="en-US" b="1" dirty="0"/>
-                        <a:t>Desirability:</a:t>
-                      </a:r>
-                      <a:r>
-                        <a:rPr lang="en-US" dirty="0"/>
-                        <a:t>  all want exponential success, few know how to generate it, and stakeholders like our values and culture</a:t>
-                      </a:r>
-                    </a:p>
-                    <a:p>
-                      <a:pPr marL="114300" indent="-114300">
-                        <a:buFont typeface="Arial" panose="020B0604020202020204" pitchFamily="34" charset="0"/>
-                        <a:buChar char="•"/>
-                        <a:tabLst/>
-                      </a:pPr>
-                      <a:r>
-                        <a:rPr lang="en-US" b="1" dirty="0"/>
-                        <a:t>Viability:</a:t>
-                      </a:r>
-                      <a:r>
-                        <a:rPr lang="en-US" dirty="0"/>
-                        <a:t>  the Consortium has the required capabilities and isn’t trying to boil the ocean</a:t>
-                      </a:r>
-                    </a:p>
-                    <a:p>
-                      <a:pPr marL="114300" indent="-114300">
-                        <a:buFont typeface="Arial" panose="020B0604020202020204" pitchFamily="34" charset="0"/>
-                        <a:buChar char="•"/>
-                        <a:tabLst/>
-                      </a:pPr>
-                      <a:r>
-                        <a:rPr lang="en-US" b="1" dirty="0"/>
-                        <a:t>Sustainability:</a:t>
-                      </a:r>
-                      <a:r>
-                        <a:rPr lang="en-US" dirty="0"/>
-                        <a:t>  the core premise (proven accelerators mathematically capable of exponential results) is enduring</a:t>
-                      </a:r>
-                    </a:p>
-                    <a:p>
-                      <a:pPr marL="114300" indent="-114300">
-                        <a:buFont typeface="Arial" panose="020B0604020202020204" pitchFamily="34" charset="0"/>
-                        <a:buChar char="•"/>
-                        <a:tabLst/>
-                      </a:pPr>
-                      <a:r>
-                        <a:rPr lang="en-US" b="1" dirty="0"/>
-                        <a:t>Performance:</a:t>
-                      </a:r>
-                      <a:r>
-                        <a:rPr lang="en-US" dirty="0"/>
-                        <a:t>  the Service’s own success will be a key proof of our core premise, creating a virtuous cycle</a:t>
-                      </a:r>
-                    </a:p>
-                    <a:p>
-                      <a:pPr marL="114300" indent="-114300">
-                        <a:buFont typeface="Arial" panose="020B0604020202020204" pitchFamily="34" charset="0"/>
-                        <a:buChar char="•"/>
-                        <a:tabLst/>
-                      </a:pPr>
-                      <a:r>
-                        <a:rPr lang="en-US" b="1" dirty="0"/>
-                        <a:t>Usability:</a:t>
-                      </a:r>
-                      <a:r>
-                        <a:rPr lang="en-US" dirty="0"/>
-                        <a:t>  participating in Industry Innovation as a subscriber and/or patron must be incredibly easy</a:t>
-                      </a:r>
-                    </a:p>
-                  </a:txBody>
-                  <a:tcPr/>
-                </a:tc>
-                <a:extLst>
-                  <a:ext uri="{0D108BD9-81ED-4DB2-BD59-A6C34878D82A}">
-                    <a16:rowId xmlns:a16="http://schemas.microsoft.com/office/drawing/2014/main" val="2256456919"/>
-                  </a:ext>
-                </a:extLst>
-              </a:tr>
-            </a:tbl>
-          </a:graphicData>
-        </a:graphic>
-      </p:graphicFrame>
       <p:sp>
         <p:nvSpPr>
           <p:cNvPr id="2" name="Rectangle 1">
@@ -26378,964 +21444,12 @@
             </a:pPr>
             <a:r>
               <a:rPr lang="en-US" dirty="0"/>
-              <a:t>Lean Business Case (1/5)</a:t>
+              <a:t>Lean Business Case</a:t>
             </a:r>
             <a:endParaRPr dirty="0"/>
           </a:p>
         </p:txBody>
       </p:sp>
-      <p:graphicFrame>
-        <p:nvGraphicFramePr>
-          <p:cNvPr id="2" name="Table 1">
-            <a:extLst>
-              <a:ext uri="{FF2B5EF4-FFF2-40B4-BE49-F238E27FC236}">
-                <a16:creationId xmlns:a16="http://schemas.microsoft.com/office/drawing/2014/main" id="{849548E0-A616-4177-21C8-C63119ADCD53}"/>
-              </a:ext>
-            </a:extLst>
-          </p:cNvPr>
-          <p:cNvGraphicFramePr>
-            <a:graphicFrameLocks noGrp="1"/>
-          </p:cNvGraphicFramePr>
-          <p:nvPr>
-            <p:extLst>
-              <p:ext uri="{D42A27DB-BD31-4B8C-83A1-F6EECF244321}">
-                <p14:modId xmlns:p14="http://schemas.microsoft.com/office/powerpoint/2010/main" val="60650120"/>
-              </p:ext>
-            </p:extLst>
-          </p:nvPr>
-        </p:nvGraphicFramePr>
-        <p:xfrm>
-          <a:off x="976428" y="1690688"/>
-          <a:ext cx="9971321" cy="4743786"/>
-        </p:xfrm>
-        <a:graphic>
-          <a:graphicData uri="http://schemas.openxmlformats.org/drawingml/2006/table">
-            <a:tbl>
-              <a:tblPr firstRow="1" firstCol="1" bandRow="1" bandCol="1">
-                <a:tableStyleId>{5940675A-B579-460E-94D1-54222C63F5DA}</a:tableStyleId>
-              </a:tblPr>
-              <a:tblGrid>
-                <a:gridCol w="3294489">
-                  <a:extLst>
-                    <a:ext uri="{9D8B030D-6E8A-4147-A177-3AD203B41FA5}">
-                      <a16:colId xmlns:a16="http://schemas.microsoft.com/office/drawing/2014/main" val="335540143"/>
-                    </a:ext>
-                  </a:extLst>
-                </a:gridCol>
-                <a:gridCol w="1235015">
-                  <a:extLst>
-                    <a:ext uri="{9D8B030D-6E8A-4147-A177-3AD203B41FA5}">
-                      <a16:colId xmlns:a16="http://schemas.microsoft.com/office/drawing/2014/main" val="3520678859"/>
-                    </a:ext>
-                  </a:extLst>
-                </a:gridCol>
-                <a:gridCol w="206139">
-                  <a:extLst>
-                    <a:ext uri="{9D8B030D-6E8A-4147-A177-3AD203B41FA5}">
-                      <a16:colId xmlns:a16="http://schemas.microsoft.com/office/drawing/2014/main" val="4207968209"/>
-                    </a:ext>
-                  </a:extLst>
-                </a:gridCol>
-                <a:gridCol w="5235678">
-                  <a:extLst>
-                    <a:ext uri="{9D8B030D-6E8A-4147-A177-3AD203B41FA5}">
-                      <a16:colId xmlns:a16="http://schemas.microsoft.com/office/drawing/2014/main" val="1867107964"/>
-                    </a:ext>
-                  </a:extLst>
-                </a:gridCol>
-              </a:tblGrid>
-              <a:tr h="1208629">
-                <a:tc>
-                  <a:txBody>
-                    <a:bodyPr/>
-                    <a:lstStyle/>
-                    <a:p>
-                      <a:pPr marL="0" marR="0">
-                        <a:lnSpc>
-                          <a:spcPct val="115000"/>
-                        </a:lnSpc>
-                        <a:spcBef>
-                          <a:spcPts val="0"/>
-                        </a:spcBef>
-                        <a:spcAft>
-                          <a:spcPts val="1000"/>
-                        </a:spcAft>
-                      </a:pPr>
-                      <a:r>
-                        <a:rPr lang="en-US" sz="1100" b="1" dirty="0">
-                          <a:solidFill>
-                            <a:schemeClr val="tx1"/>
-                          </a:solidFill>
-                          <a:effectLst/>
-                        </a:rPr>
-                        <a:t>Funnel Entry Date:   </a:t>
-                      </a:r>
-                    </a:p>
-                    <a:p>
-                      <a:pPr marL="0" marR="0">
-                        <a:lnSpc>
-                          <a:spcPct val="115000"/>
-                        </a:lnSpc>
-                        <a:spcBef>
-                          <a:spcPts val="0"/>
-                        </a:spcBef>
-                        <a:spcAft>
-                          <a:spcPts val="1000"/>
-                        </a:spcAft>
-                      </a:pPr>
-                      <a:r>
-                        <a:rPr lang="en-US" sz="1100" dirty="0">
-                          <a:solidFill>
-                            <a:schemeClr val="tx1"/>
-                          </a:solidFill>
-                          <a:effectLst/>
-                        </a:rPr>
-                        <a:t>February 1, 2024</a:t>
-                      </a:r>
-                    </a:p>
-                  </a:txBody>
-                  <a:tcPr marL="40793" marR="40793" marT="0" marB="0"/>
-                </a:tc>
-                <a:tc gridSpan="2">
-                  <a:txBody>
-                    <a:bodyPr/>
-                    <a:lstStyle/>
-                    <a:p>
-                      <a:pPr marL="0" marR="0">
-                        <a:lnSpc>
-                          <a:spcPct val="115000"/>
-                        </a:lnSpc>
-                        <a:spcBef>
-                          <a:spcPts val="0"/>
-                        </a:spcBef>
-                        <a:spcAft>
-                          <a:spcPts val="1000"/>
-                        </a:spcAft>
-                      </a:pPr>
-                      <a:r>
-                        <a:rPr lang="en-US" sz="1100" b="1" dirty="0">
-                          <a:solidFill>
-                            <a:schemeClr val="tx1"/>
-                          </a:solidFill>
-                          <a:effectLst/>
-                        </a:rPr>
-                        <a:t>Offering Owner:</a:t>
-                      </a:r>
-                    </a:p>
-                    <a:p>
-                      <a:pPr marL="0" marR="0">
-                        <a:lnSpc>
-                          <a:spcPct val="115000"/>
-                        </a:lnSpc>
-                        <a:spcBef>
-                          <a:spcPts val="0"/>
-                        </a:spcBef>
-                        <a:spcAft>
-                          <a:spcPts val="1000"/>
-                        </a:spcAft>
-                      </a:pPr>
-                      <a:r>
-                        <a:rPr lang="en-US" sz="1100" dirty="0">
-                          <a:solidFill>
-                            <a:schemeClr val="tx1"/>
-                          </a:solidFill>
-                          <a:effectLst/>
-                        </a:rPr>
-                        <a:t>Industry Innovation Service Leader</a:t>
-                      </a:r>
-                    </a:p>
-                  </a:txBody>
-                  <a:tcPr marL="40793" marR="40793" marT="0" marB="0"/>
-                </a:tc>
-                <a:tc hMerge="1">
-                  <a:txBody>
-                    <a:bodyPr/>
-                    <a:lstStyle/>
-                    <a:p>
-                      <a:endParaRPr lang="en-US"/>
-                    </a:p>
-                  </a:txBody>
-                  <a:tcPr/>
-                </a:tc>
-                <a:tc>
-                  <a:txBody>
-                    <a:bodyPr/>
-                    <a:lstStyle/>
-                    <a:p>
-                      <a:pPr marL="0" marR="0">
-                        <a:lnSpc>
-                          <a:spcPct val="115000"/>
-                        </a:lnSpc>
-                        <a:spcBef>
-                          <a:spcPts val="0"/>
-                        </a:spcBef>
-                        <a:spcAft>
-                          <a:spcPts val="1000"/>
-                        </a:spcAft>
-                      </a:pPr>
-                      <a:r>
-                        <a:rPr lang="en-US" sz="1100" b="1" dirty="0">
-                          <a:solidFill>
-                            <a:schemeClr val="tx1"/>
-                          </a:solidFill>
-                          <a:effectLst/>
-                        </a:rPr>
-                        <a:t>Key Stakeholders:</a:t>
-                      </a:r>
-                    </a:p>
-                    <a:p>
-                      <a:pPr marL="0" marR="0">
-                        <a:lnSpc>
-                          <a:spcPct val="115000"/>
-                        </a:lnSpc>
-                        <a:spcBef>
-                          <a:spcPts val="0"/>
-                        </a:spcBef>
-                        <a:spcAft>
-                          <a:spcPts val="1000"/>
-                        </a:spcAft>
-                      </a:pPr>
-                      <a:r>
-                        <a:rPr lang="en-US" sz="1100" dirty="0">
-                          <a:solidFill>
-                            <a:schemeClr val="tx1"/>
-                          </a:solidFill>
-                          <a:effectLst/>
-                        </a:rPr>
-                        <a:t>Core Boosters:  Board Members, Board Advisors</a:t>
-                      </a:r>
-                      <a:endParaRPr lang="en-US" sz="1100" dirty="0">
-                        <a:solidFill>
-                          <a:schemeClr val="tx1"/>
-                        </a:solidFill>
-                        <a:effectLst/>
-                        <a:latin typeface="Calibri" panose="020F0502020204030204" pitchFamily="34" charset="0"/>
-                        <a:ea typeface="MS Mincho" panose="02020609040205080304" pitchFamily="49" charset="-128"/>
-                        <a:cs typeface="Times New Roman" panose="02020603050405020304" pitchFamily="18" charset="0"/>
-                      </a:endParaRPr>
-                    </a:p>
-                  </a:txBody>
-                  <a:tcPr marL="40793" marR="40793" marT="0" marB="0"/>
-                </a:tc>
-                <a:extLst>
-                  <a:ext uri="{0D108BD9-81ED-4DB2-BD59-A6C34878D82A}">
-                    <a16:rowId xmlns:a16="http://schemas.microsoft.com/office/drawing/2014/main" val="3298821640"/>
-                  </a:ext>
-                </a:extLst>
-              </a:tr>
-              <a:tr h="1884556">
-                <a:tc gridSpan="4">
-                  <a:txBody>
-                    <a:bodyPr/>
-                    <a:lstStyle/>
-                    <a:p>
-                      <a:pPr marL="0" marR="0" lvl="0" indent="0" algn="l" defTabSz="914400" rtl="0" eaLnBrk="1" fontAlgn="auto" latinLnBrk="0" hangingPunct="1">
-                        <a:lnSpc>
-                          <a:spcPct val="115000"/>
-                        </a:lnSpc>
-                        <a:spcBef>
-                          <a:spcPts val="0"/>
-                        </a:spcBef>
-                        <a:spcAft>
-                          <a:spcPts val="1000"/>
-                        </a:spcAft>
-                        <a:buClr>
-                          <a:srgbClr val="000000"/>
-                        </a:buClr>
-                        <a:buSzTx/>
-                        <a:buFont typeface="Arial"/>
-                        <a:buNone/>
-                        <a:tabLst/>
-                        <a:defRPr/>
-                      </a:pPr>
-                      <a:r>
-                        <a:rPr lang="en-US" sz="1100" b="1" dirty="0">
-                          <a:solidFill>
-                            <a:schemeClr val="tx1"/>
-                          </a:solidFill>
-                          <a:effectLst/>
-                        </a:rPr>
-                        <a:t>Offering Description:</a:t>
-                      </a:r>
-                      <a:br>
-                        <a:rPr lang="en-US" sz="1100" dirty="0">
-                          <a:solidFill>
-                            <a:schemeClr val="tx1"/>
-                          </a:solidFill>
-                          <a:effectLst/>
-                          <a:latin typeface="Calibri" panose="020F0502020204030204" pitchFamily="34" charset="0"/>
-                          <a:ea typeface="MS Mincho" panose="02020609040205080304" pitchFamily="49" charset="-128"/>
-                          <a:cs typeface="Times New Roman" panose="02020603050405020304" pitchFamily="18" charset="0"/>
-                        </a:rPr>
-                      </a:br>
-                      <a:br>
-                        <a:rPr lang="en-US" sz="1100" dirty="0">
-                          <a:solidFill>
-                            <a:schemeClr val="tx1"/>
-                          </a:solidFill>
-                          <a:effectLst/>
-                          <a:latin typeface="Calibri" panose="020F0502020204030204" pitchFamily="34" charset="0"/>
-                          <a:ea typeface="MS Mincho" panose="02020609040205080304" pitchFamily="49" charset="-128"/>
-                          <a:cs typeface="Times New Roman" panose="02020603050405020304" pitchFamily="18" charset="0"/>
-                        </a:rPr>
-                      </a:br>
-                      <a:r>
-                        <a:rPr lang="en-US" sz="1100" b="1" i="0" u="none" strike="noStrike" cap="none" dirty="0">
-                          <a:solidFill>
-                            <a:schemeClr val="tx1"/>
-                          </a:solidFill>
-                          <a:effectLst/>
-                          <a:latin typeface="+mn-lt"/>
-                          <a:ea typeface="+mn-ea"/>
-                          <a:cs typeface="+mn-cs"/>
-                          <a:sym typeface="Arial"/>
-                        </a:rPr>
-                        <a:t>FOR </a:t>
-                      </a:r>
-                      <a:r>
-                        <a:rPr lang="en-US" sz="1100" b="0" i="0" u="none" strike="noStrike" cap="none" dirty="0">
-                          <a:solidFill>
-                            <a:schemeClr val="tx1"/>
-                          </a:solidFill>
-                          <a:effectLst/>
-                          <a:latin typeface="+mn-lt"/>
-                          <a:ea typeface="+mn-ea"/>
-                          <a:cs typeface="+mn-cs"/>
-                          <a:sym typeface="Arial"/>
-                        </a:rPr>
-                        <a:t>enterprising leaders involved or interested in the Tech Services industry </a:t>
-                      </a:r>
-                      <a:r>
-                        <a:rPr lang="en-US" sz="1100" b="1" i="0" u="none" strike="noStrike" cap="none" dirty="0">
-                          <a:solidFill>
-                            <a:schemeClr val="tx1"/>
-                          </a:solidFill>
-                          <a:effectLst/>
-                          <a:latin typeface="+mn-lt"/>
-                          <a:ea typeface="+mn-ea"/>
-                          <a:cs typeface="+mn-cs"/>
-                          <a:sym typeface="Arial"/>
-                        </a:rPr>
-                        <a:t>WHO </a:t>
-                      </a:r>
-                      <a:r>
-                        <a:rPr lang="en-US" sz="1100" b="0" i="0" u="none" strike="noStrike" cap="none" dirty="0">
-                          <a:solidFill>
-                            <a:schemeClr val="tx1"/>
-                          </a:solidFill>
-                          <a:effectLst/>
-                          <a:latin typeface="+mn-lt"/>
-                          <a:ea typeface="+mn-ea"/>
-                          <a:cs typeface="+mn-cs"/>
-                          <a:sym typeface="Arial"/>
-                        </a:rPr>
-                        <a:t>want to improve their career opportunities and the Tech Services industry’s impact </a:t>
-                      </a:r>
-                      <a:r>
-                        <a:rPr lang="en-US" sz="1100" b="1" i="0" u="none" strike="noStrike" cap="none" dirty="0">
-                          <a:solidFill>
-                            <a:schemeClr val="tx1"/>
-                          </a:solidFill>
-                          <a:effectLst/>
-                          <a:latin typeface="+mn-lt"/>
-                          <a:ea typeface="+mn-ea"/>
-                          <a:cs typeface="+mn-cs"/>
-                          <a:sym typeface="Arial"/>
-                        </a:rPr>
-                        <a:t>THE </a:t>
-                      </a:r>
-                      <a:r>
-                        <a:rPr lang="en-US" sz="1100" b="0" i="0" u="none" strike="noStrike" cap="none" dirty="0">
-                          <a:solidFill>
-                            <a:schemeClr val="tx1"/>
-                          </a:solidFill>
-                          <a:effectLst/>
-                          <a:latin typeface="+mn-lt"/>
-                          <a:ea typeface="+mn-ea"/>
-                          <a:cs typeface="+mn-cs"/>
-                          <a:sym typeface="Arial"/>
-                        </a:rPr>
-                        <a:t>AccelRR8 Consortium Non-Profit’s Industry Innovation Service </a:t>
-                      </a:r>
-                      <a:r>
-                        <a:rPr lang="en-US" sz="1100" b="1" i="0" u="none" strike="noStrike" cap="none" dirty="0">
-                          <a:solidFill>
-                            <a:schemeClr val="tx1"/>
-                          </a:solidFill>
-                          <a:effectLst/>
-                          <a:latin typeface="+mn-lt"/>
-                          <a:ea typeface="+mn-ea"/>
-                          <a:cs typeface="+mn-cs"/>
-                          <a:sym typeface="Arial"/>
-                        </a:rPr>
-                        <a:t>IS AN </a:t>
-                      </a:r>
-                      <a:r>
-                        <a:rPr lang="en-US" sz="1100" b="1" i="0" u="none" strike="noStrike" cap="none" dirty="0">
-                          <a:solidFill>
-                            <a:schemeClr val="accent2"/>
-                          </a:solidFill>
-                          <a:effectLst/>
-                          <a:latin typeface="+mn-lt"/>
-                          <a:ea typeface="+mn-ea"/>
-                          <a:cs typeface="+mn-cs"/>
-                          <a:sym typeface="Arial"/>
-                        </a:rPr>
-                        <a:t>AI</a:t>
-                      </a:r>
-                      <a:r>
-                        <a:rPr lang="en-US" sz="1100" b="0" i="0" u="none" strike="noStrike" cap="none" dirty="0">
-                          <a:solidFill>
-                            <a:schemeClr val="tx1"/>
-                          </a:solidFill>
-                          <a:effectLst/>
-                          <a:latin typeface="+mn-lt"/>
-                          <a:ea typeface="+mn-ea"/>
-                          <a:cs typeface="+mn-cs"/>
-                          <a:sym typeface="Arial"/>
-                        </a:rPr>
-                        <a:t>-powered innovation support function </a:t>
-                      </a:r>
-                      <a:r>
-                        <a:rPr lang="en-US" sz="1100" b="1" i="0" u="none" strike="noStrike" cap="none" dirty="0">
-                          <a:solidFill>
-                            <a:schemeClr val="tx1"/>
-                          </a:solidFill>
-                          <a:effectLst/>
-                          <a:latin typeface="+mn-lt"/>
-                          <a:ea typeface="+mn-ea"/>
-                          <a:cs typeface="+mn-cs"/>
-                          <a:sym typeface="Arial"/>
-                        </a:rPr>
-                        <a:t>THAT </a:t>
-                      </a:r>
-                      <a:r>
-                        <a:rPr lang="en-US" sz="1100" b="0" i="0" u="none" strike="noStrike" cap="none" dirty="0">
-                          <a:solidFill>
-                            <a:schemeClr val="tx1"/>
-                          </a:solidFill>
-                          <a:effectLst/>
-                          <a:latin typeface="+mn-lt"/>
-                          <a:ea typeface="+mn-ea"/>
-                          <a:cs typeface="+mn-cs"/>
-                          <a:sym typeface="Arial"/>
-                        </a:rPr>
-                        <a:t>helps patron-supported innovation teams use proven accelerators to develop innovative solutions. </a:t>
-                      </a:r>
-                      <a:endParaRPr lang="en-US" sz="1100" b="1" i="0" u="none" strike="noStrike" cap="none" dirty="0">
-                        <a:solidFill>
-                          <a:schemeClr val="tx1"/>
-                        </a:solidFill>
-                        <a:effectLst/>
-                        <a:latin typeface="+mn-lt"/>
-                        <a:ea typeface="+mn-ea"/>
-                        <a:cs typeface="+mn-cs"/>
-                        <a:sym typeface="Arial"/>
-                      </a:endParaRPr>
-                    </a:p>
-                    <a:p>
-                      <a:pPr marL="0" marR="0" lvl="0" indent="0" algn="l" defTabSz="914400" rtl="0" eaLnBrk="1" fontAlgn="auto" latinLnBrk="0" hangingPunct="1">
-                        <a:lnSpc>
-                          <a:spcPct val="115000"/>
-                        </a:lnSpc>
-                        <a:spcBef>
-                          <a:spcPts val="0"/>
-                        </a:spcBef>
-                        <a:spcAft>
-                          <a:spcPts val="1000"/>
-                        </a:spcAft>
-                        <a:buClr>
-                          <a:srgbClr val="000000"/>
-                        </a:buClr>
-                        <a:buSzTx/>
-                        <a:buFont typeface="Arial"/>
-                        <a:buNone/>
-                        <a:tabLst/>
-                        <a:defRPr/>
-                      </a:pPr>
-                      <a:r>
-                        <a:rPr lang="en-US" sz="1100" b="1" i="0" u="none" strike="noStrike" cap="none" dirty="0">
-                          <a:solidFill>
-                            <a:schemeClr val="tx1"/>
-                          </a:solidFill>
-                          <a:effectLst/>
-                          <a:latin typeface="+mn-lt"/>
-                          <a:ea typeface="+mn-ea"/>
-                          <a:cs typeface="+mn-cs"/>
-                          <a:sym typeface="Arial"/>
-                        </a:rPr>
-                        <a:t>UNLIKE </a:t>
-                      </a:r>
-                      <a:r>
-                        <a:rPr lang="en-US" sz="1100" b="0" i="0" u="none" strike="noStrike" cap="none" dirty="0">
-                          <a:solidFill>
-                            <a:schemeClr val="tx1"/>
-                          </a:solidFill>
-                          <a:effectLst/>
-                          <a:latin typeface="+mn-lt"/>
-                          <a:ea typeface="+mn-ea"/>
-                          <a:cs typeface="+mn-cs"/>
-                          <a:sym typeface="Arial"/>
-                        </a:rPr>
-                        <a:t>other associations that support innovation, </a:t>
-                      </a:r>
-                      <a:r>
-                        <a:rPr lang="en-US" sz="1100" b="1" i="0" u="none" strike="noStrike" cap="none" dirty="0">
-                          <a:solidFill>
-                            <a:schemeClr val="tx1"/>
-                          </a:solidFill>
-                          <a:effectLst/>
-                          <a:latin typeface="+mn-lt"/>
-                          <a:ea typeface="+mn-ea"/>
-                          <a:cs typeface="+mn-cs"/>
-                          <a:sym typeface="Arial"/>
-                        </a:rPr>
-                        <a:t>OUR SERVICE’s </a:t>
-                      </a:r>
-                      <a:r>
-                        <a:rPr lang="en-US" sz="1100" b="0" i="0" u="none" strike="noStrike" cap="none" dirty="0">
-                          <a:solidFill>
-                            <a:schemeClr val="tx1"/>
-                          </a:solidFill>
-                          <a:effectLst/>
-                          <a:latin typeface="+mn-lt"/>
-                          <a:ea typeface="+mn-ea"/>
-                          <a:cs typeface="+mn-cs"/>
-                          <a:sym typeface="Arial"/>
-                        </a:rPr>
-                        <a:t>own success will be a key proof point of our Consortium’s core premise:  industry innovation teams, supported by </a:t>
-                      </a:r>
-                      <a:r>
-                        <a:rPr lang="en-US" sz="1100" b="1" i="0" u="none" strike="noStrike" cap="none" dirty="0">
-                          <a:solidFill>
-                            <a:srgbClr val="00B050"/>
-                          </a:solidFill>
-                          <a:effectLst/>
-                          <a:latin typeface="+mn-lt"/>
-                          <a:ea typeface="+mn-ea"/>
-                          <a:cs typeface="+mn-cs"/>
-                          <a:sym typeface="Arial"/>
-                        </a:rPr>
-                        <a:t>generative learning</a:t>
-                      </a:r>
-                      <a:r>
-                        <a:rPr lang="en-US" sz="1100" b="0" i="0" u="none" strike="noStrike" cap="none" dirty="0">
-                          <a:solidFill>
-                            <a:schemeClr val="tx1"/>
-                          </a:solidFill>
-                          <a:effectLst/>
-                          <a:latin typeface="+mn-lt"/>
-                          <a:ea typeface="+mn-ea"/>
-                          <a:cs typeface="+mn-cs"/>
-                          <a:sym typeface="Arial"/>
-                        </a:rPr>
-                        <a:t> and </a:t>
-                      </a:r>
-                      <a:r>
-                        <a:rPr lang="en-US" sz="1100" b="1" i="0" u="none" strike="noStrike" cap="none" dirty="0">
-                          <a:solidFill>
-                            <a:schemeClr val="accent2"/>
-                          </a:solidFill>
-                          <a:effectLst/>
-                          <a:latin typeface="+mn-lt"/>
-                          <a:ea typeface="+mn-ea"/>
-                          <a:cs typeface="+mn-cs"/>
-                          <a:sym typeface="Arial"/>
-                        </a:rPr>
-                        <a:t>AI</a:t>
-                      </a:r>
-                      <a:r>
-                        <a:rPr lang="en-US" sz="1100" b="0" i="0" u="none" strike="noStrike" cap="none" dirty="0">
-                          <a:solidFill>
-                            <a:schemeClr val="tx1"/>
-                          </a:solidFill>
-                          <a:effectLst/>
-                          <a:latin typeface="+mn-lt"/>
-                          <a:ea typeface="+mn-ea"/>
-                          <a:cs typeface="+mn-cs"/>
-                          <a:sym typeface="Arial"/>
-                        </a:rPr>
-                        <a:t>, use </a:t>
-                      </a:r>
-                      <a:r>
-                        <a:rPr lang="en-US" sz="1100" b="1" i="0" u="none" strike="noStrike" cap="none" dirty="0">
-                          <a:solidFill>
-                            <a:srgbClr val="00B050"/>
-                          </a:solidFill>
-                          <a:effectLst/>
-                          <a:latin typeface="+mn-lt"/>
-                          <a:ea typeface="+mn-ea"/>
-                          <a:cs typeface="+mn-cs"/>
-                          <a:sym typeface="Arial"/>
-                        </a:rPr>
-                        <a:t>compounding innovation</a:t>
-                      </a:r>
-                      <a:r>
-                        <a:rPr lang="en-US" sz="1100" b="0" i="0" u="none" strike="noStrike" cap="none" dirty="0">
-                          <a:solidFill>
-                            <a:schemeClr val="tx1"/>
-                          </a:solidFill>
-                          <a:effectLst/>
-                          <a:latin typeface="+mn-lt"/>
-                          <a:ea typeface="+mn-ea"/>
-                          <a:cs typeface="+mn-cs"/>
-                          <a:sym typeface="Arial"/>
-                        </a:rPr>
-                        <a:t> to develop solutions that address priority industry challenges, grow value exponentially, advance the state-of-the-art, and ultimately benefit humanity.</a:t>
-                      </a:r>
-                      <a:endParaRPr lang="en-US" sz="1100" b="1" i="0" u="none" strike="noStrike" cap="none" dirty="0">
-                        <a:solidFill>
-                          <a:schemeClr val="tx1"/>
-                        </a:solidFill>
-                        <a:effectLst/>
-                        <a:latin typeface="+mn-lt"/>
-                        <a:ea typeface="+mn-ea"/>
-                        <a:cs typeface="+mn-cs"/>
-                        <a:sym typeface="Arial"/>
-                      </a:endParaRPr>
-                    </a:p>
-                    <a:p>
-                      <a:pPr marL="0" marR="0" lvl="0" indent="0" algn="l" defTabSz="914400" rtl="0" eaLnBrk="1" fontAlgn="auto" latinLnBrk="0" hangingPunct="1">
-                        <a:lnSpc>
-                          <a:spcPct val="115000"/>
-                        </a:lnSpc>
-                        <a:spcBef>
-                          <a:spcPts val="0"/>
-                        </a:spcBef>
-                        <a:spcAft>
-                          <a:spcPts val="1000"/>
-                        </a:spcAft>
-                        <a:buClr>
-                          <a:srgbClr val="000000"/>
-                        </a:buClr>
-                        <a:buSzTx/>
-                        <a:buFont typeface="Arial"/>
-                        <a:buNone/>
-                        <a:tabLst/>
-                        <a:defRPr/>
-                      </a:pPr>
-                      <a:endParaRPr lang="en-US" sz="1100" b="0" i="0" u="none" strike="noStrike" cap="none" dirty="0">
-                        <a:solidFill>
-                          <a:schemeClr val="tx1"/>
-                        </a:solidFill>
-                        <a:effectLst/>
-                        <a:latin typeface="+mn-lt"/>
-                        <a:ea typeface="+mn-ea"/>
-                        <a:cs typeface="+mn-cs"/>
-                        <a:sym typeface="Arial"/>
-                      </a:endParaRPr>
-                    </a:p>
-                  </a:txBody>
-                  <a:tcPr marL="40793" marR="40793" marT="0" marB="0"/>
-                </a:tc>
-                <a:tc hMerge="1">
-                  <a:txBody>
-                    <a:bodyPr/>
-                    <a:lstStyle/>
-                    <a:p>
-                      <a:endParaRPr lang="en-US"/>
-                    </a:p>
-                  </a:txBody>
-                  <a:tcPr/>
-                </a:tc>
-                <a:tc hMerge="1">
-                  <a:txBody>
-                    <a:bodyPr/>
-                    <a:lstStyle/>
-                    <a:p>
-                      <a:endParaRPr lang="en-US"/>
-                    </a:p>
-                  </a:txBody>
-                  <a:tcPr/>
-                </a:tc>
-                <a:tc hMerge="1">
-                  <a:txBody>
-                    <a:bodyPr/>
-                    <a:lstStyle/>
-                    <a:p>
-                      <a:endParaRPr lang="en-US"/>
-                    </a:p>
-                  </a:txBody>
-                  <a:tcPr/>
-                </a:tc>
-                <a:extLst>
-                  <a:ext uri="{0D108BD9-81ED-4DB2-BD59-A6C34878D82A}">
-                    <a16:rowId xmlns:a16="http://schemas.microsoft.com/office/drawing/2014/main" val="1064933647"/>
-                  </a:ext>
-                </a:extLst>
-              </a:tr>
-              <a:tr h="1562466">
-                <a:tc gridSpan="2">
-                  <a:txBody>
-                    <a:bodyPr/>
-                    <a:lstStyle/>
-                    <a:p>
-                      <a:pPr marL="0" marR="0">
-                        <a:lnSpc>
-                          <a:spcPct val="115000"/>
-                        </a:lnSpc>
-                        <a:spcBef>
-                          <a:spcPts val="0"/>
-                        </a:spcBef>
-                        <a:spcAft>
-                          <a:spcPts val="1000"/>
-                        </a:spcAft>
-                      </a:pPr>
-                      <a:r>
-                        <a:rPr lang="en-US" sz="1100" b="1" dirty="0">
-                          <a:solidFill>
-                            <a:schemeClr val="tx1"/>
-                          </a:solidFill>
-                          <a:effectLst/>
-                        </a:rPr>
-                        <a:t>Business Outcome Hypothesis:</a:t>
-                      </a:r>
-                    </a:p>
-                    <a:p>
-                      <a:pPr marL="0" marR="0">
-                        <a:lnSpc>
-                          <a:spcPct val="115000"/>
-                        </a:lnSpc>
-                        <a:spcBef>
-                          <a:spcPts val="0"/>
-                        </a:spcBef>
-                        <a:spcAft>
-                          <a:spcPts val="1000"/>
-                        </a:spcAft>
-                      </a:pPr>
-                      <a:r>
-                        <a:rPr lang="en-US" sz="1100" b="1" dirty="0">
-                          <a:solidFill>
-                            <a:schemeClr val="tx1"/>
-                          </a:solidFill>
-                          <a:effectLst/>
-                        </a:rPr>
-                        <a:t>Subscribers and Patrons: </a:t>
-                      </a:r>
-                      <a:r>
-                        <a:rPr lang="en-US" sz="1100" dirty="0">
-                          <a:solidFill>
-                            <a:schemeClr val="tx1"/>
-                          </a:solidFill>
-                          <a:effectLst/>
-                        </a:rPr>
-                        <a:t>improve their professional network, skills / capabilities, brand, and opportunities as measured via survey</a:t>
-                      </a:r>
-                      <a:br>
-                        <a:rPr lang="en-US" sz="1100" dirty="0">
-                          <a:solidFill>
-                            <a:schemeClr val="tx1"/>
-                          </a:solidFill>
-                          <a:effectLst/>
-                        </a:rPr>
-                      </a:br>
-                      <a:r>
-                        <a:rPr lang="en-US" sz="1100" b="1" dirty="0">
-                          <a:solidFill>
-                            <a:schemeClr val="tx1"/>
-                          </a:solidFill>
-                          <a:effectLst/>
-                        </a:rPr>
-                        <a:t>The Tech Services industry: </a:t>
-                      </a:r>
-                      <a:r>
-                        <a:rPr lang="en-US" sz="1100" dirty="0">
-                          <a:solidFill>
-                            <a:schemeClr val="tx1"/>
-                          </a:solidFill>
-                          <a:effectLst/>
-                        </a:rPr>
-                        <a:t>cross-company learning among leaders with scarce talents as measured via survey of subscribers</a:t>
-                      </a:r>
-                      <a:br>
-                        <a:rPr lang="en-US" sz="1100" dirty="0">
-                          <a:solidFill>
-                            <a:schemeClr val="tx1"/>
-                          </a:solidFill>
-                          <a:effectLst/>
-                        </a:rPr>
-                      </a:br>
-                      <a:r>
-                        <a:rPr lang="en-US" sz="1100" b="1" dirty="0">
-                          <a:solidFill>
-                            <a:schemeClr val="tx1"/>
-                          </a:solidFill>
-                          <a:effectLst/>
-                        </a:rPr>
-                        <a:t>AccelRR8 Consortium: </a:t>
-                      </a:r>
-                      <a:r>
-                        <a:rPr lang="en-US" sz="1100" dirty="0">
-                          <a:solidFill>
-                            <a:schemeClr val="tx1"/>
-                          </a:solidFill>
-                          <a:effectLst/>
-                        </a:rPr>
-                        <a:t>exponential benefits via Market Network Effects (per </a:t>
-                      </a:r>
-                      <a:r>
-                        <a:rPr lang="en-US" sz="1100" dirty="0" err="1">
-                          <a:solidFill>
-                            <a:schemeClr val="tx1"/>
-                          </a:solidFill>
-                          <a:effectLst/>
-                        </a:rPr>
-                        <a:t>nfx.com</a:t>
-                      </a:r>
-                      <a:r>
-                        <a:rPr lang="en-US" sz="1100" dirty="0">
-                          <a:solidFill>
-                            <a:schemeClr val="tx1"/>
-                          </a:solidFill>
-                          <a:effectLst/>
-                        </a:rPr>
-                        <a:t>) as measured via survey of subscribers</a:t>
-                      </a:r>
-                    </a:p>
-                  </a:txBody>
-                  <a:tcPr marL="40793" marR="40793" marT="0" marB="0"/>
-                </a:tc>
-                <a:tc hMerge="1">
-                  <a:txBody>
-                    <a:bodyPr/>
-                    <a:lstStyle/>
-                    <a:p>
-                      <a:endParaRPr lang="en-US"/>
-                    </a:p>
-                  </a:txBody>
-                  <a:tcPr/>
-                </a:tc>
-                <a:tc gridSpan="2">
-                  <a:txBody>
-                    <a:bodyPr/>
-                    <a:lstStyle/>
-                    <a:p>
-                      <a:pPr marL="0" marR="0">
-                        <a:lnSpc>
-                          <a:spcPct val="115000"/>
-                        </a:lnSpc>
-                        <a:spcBef>
-                          <a:spcPts val="0"/>
-                        </a:spcBef>
-                        <a:spcAft>
-                          <a:spcPts val="1000"/>
-                        </a:spcAft>
-                      </a:pPr>
-                      <a:r>
-                        <a:rPr lang="en-US" sz="1100" b="1" dirty="0">
-                          <a:solidFill>
-                            <a:schemeClr val="tx1"/>
-                          </a:solidFill>
-                          <a:effectLst/>
-                        </a:rPr>
-                        <a:t>Leading Indicators:</a:t>
-                      </a:r>
-                    </a:p>
-                    <a:p>
-                      <a:pPr marL="0" marR="0">
-                        <a:lnSpc>
-                          <a:spcPct val="115000"/>
-                        </a:lnSpc>
-                        <a:spcBef>
-                          <a:spcPts val="0"/>
-                        </a:spcBef>
-                        <a:spcAft>
-                          <a:spcPts val="1000"/>
-                        </a:spcAft>
-                      </a:pPr>
-                      <a:r>
-                        <a:rPr lang="en-US" sz="1100" dirty="0">
-                          <a:solidFill>
-                            <a:schemeClr val="tx1"/>
-                          </a:solidFill>
-                          <a:effectLst/>
-                        </a:rPr>
-                        <a:t>1000 subscribers </a:t>
-                      </a:r>
-                      <a:br>
-                        <a:rPr lang="en-US" sz="1100" dirty="0">
-                          <a:solidFill>
-                            <a:schemeClr val="tx1"/>
-                          </a:solidFill>
-                          <a:effectLst/>
-                        </a:rPr>
-                      </a:br>
-                      <a:r>
-                        <a:rPr lang="en-US" sz="1100" dirty="0">
-                          <a:solidFill>
-                            <a:schemeClr val="tx1"/>
-                          </a:solidFill>
-                          <a:effectLst/>
-                        </a:rPr>
-                        <a:t>- are participating in the AccelRR8 Consortium professional network, </a:t>
-                      </a:r>
-                      <a:br>
-                        <a:rPr lang="en-US" sz="1100" dirty="0">
-                          <a:solidFill>
-                            <a:schemeClr val="tx1"/>
-                          </a:solidFill>
-                          <a:effectLst/>
-                        </a:rPr>
-                      </a:br>
-                      <a:r>
-                        <a:rPr lang="en-US" sz="1100" dirty="0">
-                          <a:solidFill>
-                            <a:schemeClr val="tx1"/>
-                          </a:solidFill>
-                          <a:effectLst/>
-                        </a:rPr>
-                        <a:t>- have followed the AccelRR8 Consortium organization in LinkedIn, and </a:t>
-                      </a:r>
-                      <a:br>
-                        <a:rPr lang="en-US" sz="1100" dirty="0">
-                          <a:solidFill>
-                            <a:schemeClr val="tx1"/>
-                          </a:solidFill>
-                          <a:effectLst/>
-                        </a:rPr>
-                      </a:br>
-                      <a:r>
-                        <a:rPr lang="en-US" sz="1100" dirty="0">
-                          <a:solidFill>
-                            <a:schemeClr val="tx1"/>
-                          </a:solidFill>
-                          <a:effectLst/>
-                        </a:rPr>
-                        <a:t>- are Net Promoters as measured via survey of subscribers.</a:t>
-                      </a:r>
-                      <a:endParaRPr lang="en-US" sz="1100" dirty="0">
-                        <a:solidFill>
-                          <a:schemeClr val="tx1"/>
-                        </a:solidFill>
-                        <a:effectLst/>
-                        <a:latin typeface="Calibri" panose="020F0502020204030204" pitchFamily="34" charset="0"/>
-                        <a:ea typeface="MS Mincho" panose="02020609040205080304" pitchFamily="49" charset="-128"/>
-                        <a:cs typeface="Times New Roman" panose="02020603050405020304" pitchFamily="18" charset="0"/>
-                      </a:endParaRPr>
-                    </a:p>
-                  </a:txBody>
-                  <a:tcPr marL="40793" marR="40793" marT="0" marB="0"/>
-                </a:tc>
-                <a:tc hMerge="1">
-                  <a:txBody>
-                    <a:bodyPr/>
-                    <a:lstStyle/>
-                    <a:p>
-                      <a:endParaRPr lang="en-US"/>
-                    </a:p>
-                  </a:txBody>
-                  <a:tcPr/>
-                </a:tc>
-                <a:extLst>
-                  <a:ext uri="{0D108BD9-81ED-4DB2-BD59-A6C34878D82A}">
-                    <a16:rowId xmlns:a16="http://schemas.microsoft.com/office/drawing/2014/main" val="2522614672"/>
-                  </a:ext>
-                </a:extLst>
-              </a:tr>
-            </a:tbl>
-          </a:graphicData>
-        </a:graphic>
-      </p:graphicFrame>
       <p:sp>
         <p:nvSpPr>
           <p:cNvPr id="3" name="Rectangle 2">
@@ -27805,7 +21919,14 @@
             </a:pPr>
             <a:r>
               <a:rPr lang="en-US" dirty="0"/>
-              <a:t>Lean Business Case (2/5)</a:t>
+              <a:t>Service MVP </a:t>
+            </a:r>
+            <a:br>
+              <a:rPr lang="en-US" dirty="0"/>
+            </a:br>
+            <a:r>
+              <a:rPr lang="en-US" dirty="0"/>
+              <a:t>Component Descriptions</a:t>
             </a:r>
             <a:endParaRPr dirty="0"/>
           </a:p>
@@ -27813,10 +21934,10 @@
       </p:sp>
       <p:graphicFrame>
         <p:nvGraphicFramePr>
-          <p:cNvPr id="2" name="Table 1">
+          <p:cNvPr id="5" name="Table 4">
             <a:extLst>
               <a:ext uri="{FF2B5EF4-FFF2-40B4-BE49-F238E27FC236}">
-                <a16:creationId xmlns:a16="http://schemas.microsoft.com/office/drawing/2014/main" id="{849548E0-A616-4177-21C8-C63119ADCD53}"/>
+                <a16:creationId xmlns:a16="http://schemas.microsoft.com/office/drawing/2014/main" id="{4B70F3A5-8062-29A2-30D0-2783CB3DFCCA}"/>
               </a:ext>
             </a:extLst>
           </p:cNvPr>
@@ -27826,723 +21947,295 @@
           <p:nvPr>
             <p:extLst>
               <p:ext uri="{D42A27DB-BD31-4B8C-83A1-F6EECF244321}">
-                <p14:modId xmlns:p14="http://schemas.microsoft.com/office/powerpoint/2010/main" val="1400341906"/>
+                <p14:modId xmlns:p14="http://schemas.microsoft.com/office/powerpoint/2010/main" val="2424982169"/>
               </p:ext>
             </p:extLst>
           </p:nvPr>
         </p:nvGraphicFramePr>
         <p:xfrm>
-          <a:off x="389965" y="1591460"/>
-          <a:ext cx="11510682" cy="4764890"/>
+          <a:off x="969319" y="1690687"/>
+          <a:ext cx="10806369" cy="4609754"/>
         </p:xfrm>
         <a:graphic>
           <a:graphicData uri="http://schemas.openxmlformats.org/drawingml/2006/table">
             <a:tbl>
-              <a:tblPr firstRow="1" firstCol="1" bandRow="1" bandCol="1">
+              <a:tblPr firstRow="1" bandRow="1">
                 <a:tableStyleId>{5940675A-B579-460E-94D1-54222C63F5DA}</a:tableStyleId>
               </a:tblPr>
               <a:tblGrid>
-                <a:gridCol w="1680882">
+                <a:gridCol w="1929998">
                   <a:extLst>
                     <a:ext uri="{9D8B030D-6E8A-4147-A177-3AD203B41FA5}">
-                      <a16:colId xmlns:a16="http://schemas.microsoft.com/office/drawing/2014/main" val="335540143"/>
+                      <a16:colId xmlns:a16="http://schemas.microsoft.com/office/drawing/2014/main" val="533583650"/>
                     </a:ext>
                   </a:extLst>
                 </a:gridCol>
-                <a:gridCol w="2541494">
+                <a:gridCol w="8876371">
                   <a:extLst>
                     <a:ext uri="{9D8B030D-6E8A-4147-A177-3AD203B41FA5}">
-                      <a16:colId xmlns:a16="http://schemas.microsoft.com/office/drawing/2014/main" val="298461284"/>
-                    </a:ext>
-                  </a:extLst>
-                </a:gridCol>
-                <a:gridCol w="1048871">
-                  <a:extLst>
-                    <a:ext uri="{9D8B030D-6E8A-4147-A177-3AD203B41FA5}">
-                      <a16:colId xmlns:a16="http://schemas.microsoft.com/office/drawing/2014/main" val="3497628273"/>
-                    </a:ext>
-                  </a:extLst>
-                </a:gridCol>
-                <a:gridCol w="6239435">
-                  <a:extLst>
-                    <a:ext uri="{9D8B030D-6E8A-4147-A177-3AD203B41FA5}">
-                      <a16:colId xmlns:a16="http://schemas.microsoft.com/office/drawing/2014/main" val="355084519"/>
+                      <a16:colId xmlns:a16="http://schemas.microsoft.com/office/drawing/2014/main" val="20127695"/>
                     </a:ext>
                   </a:extLst>
                 </a:gridCol>
               </a:tblGrid>
-              <a:tr h="1968175">
+              <a:tr h="393080">
                 <a:tc>
                   <a:txBody>
                     <a:bodyPr/>
                     <a:lstStyle/>
                     <a:p>
-                      <a:pPr marL="0" marR="0">
-                        <a:lnSpc>
-                          <a:spcPct val="115000"/>
-                        </a:lnSpc>
-                        <a:spcBef>
-                          <a:spcPts val="0"/>
-                        </a:spcBef>
-                        <a:spcAft>
-                          <a:spcPts val="1000"/>
-                        </a:spcAft>
-                      </a:pPr>
                       <a:r>
-                        <a:rPr lang="en-US" sz="1100" b="1" dirty="0">
-                          <a:solidFill>
-                            <a:schemeClr val="tx1"/>
-                          </a:solidFill>
-                          <a:effectLst/>
-                        </a:rPr>
-                        <a:t>In Scope:</a:t>
+                        <a:rPr lang="en-US" sz="1600" b="0" dirty="0"/>
+                        <a:t>Service Name</a:t>
                       </a:r>
                     </a:p>
-                    <a:p>
-                      <a:pPr marL="119063" lvl="2" indent="-119063">
-                        <a:buFont typeface="Arial" panose="020B0604020202020204" pitchFamily="34" charset="0"/>
-                        <a:buChar char="•"/>
-                        <a:tabLst/>
-                      </a:pPr>
-                      <a:r>
-                        <a:rPr lang="en-US" sz="1100" b="0" i="0" u="none" strike="noStrike" cap="none" dirty="0">
-                          <a:solidFill>
-                            <a:schemeClr val="tx1"/>
-                          </a:solidFill>
-                          <a:effectLst/>
-                          <a:latin typeface="+mn-lt"/>
-                          <a:ea typeface="+mn-ea"/>
-                          <a:cs typeface="+mn-cs"/>
-                          <a:sym typeface="Arial"/>
-                        </a:rPr>
-                        <a:t>Patron organizations and individuals can join the AccelRR8 Consortium network as advocates (free advertising, e.g., Bronze Tier)</a:t>
-                      </a:r>
-                      <a:endParaRPr lang="en-US" sz="1100" dirty="0">
-                        <a:solidFill>
-                          <a:schemeClr val="tx1"/>
-                        </a:solidFill>
-                        <a:effectLst/>
-                      </a:endParaRPr>
-                    </a:p>
                   </a:txBody>
-                  <a:tcPr marL="40793" marR="40793" marT="0" marB="0"/>
+                  <a:tcPr/>
                 </a:tc>
                 <a:tc>
                   <a:txBody>
                     <a:bodyPr/>
                     <a:lstStyle/>
                     <a:p>
-                      <a:pPr marL="0" marR="0">
-                        <a:lnSpc>
-                          <a:spcPct val="115000"/>
-                        </a:lnSpc>
-                        <a:spcBef>
-                          <a:spcPts val="0"/>
-                        </a:spcBef>
-                        <a:spcAft>
-                          <a:spcPts val="1000"/>
-                        </a:spcAft>
-                      </a:pPr>
                       <a:r>
-                        <a:rPr lang="en-US" sz="1100" b="1" dirty="0">
-                          <a:solidFill>
-                            <a:schemeClr val="tx1"/>
-                          </a:solidFill>
-                          <a:effectLst/>
-                        </a:rPr>
-                        <a:t>Out of Scope:</a:t>
-                      </a:r>
-                    </a:p>
-                    <a:p>
-                      <a:pPr marL="123825" marR="0" lvl="0" indent="-123825">
-                        <a:lnSpc>
-                          <a:spcPct val="115000"/>
-                        </a:lnSpc>
-                        <a:spcBef>
-                          <a:spcPts val="0"/>
-                        </a:spcBef>
-                        <a:spcAft>
-                          <a:spcPts val="0"/>
-                        </a:spcAft>
-                        <a:buFont typeface="Symbol" pitchFamily="2" charset="2"/>
-                        <a:buChar char=""/>
-                        <a:tabLst/>
-                      </a:pPr>
-                      <a:r>
-                        <a:rPr lang="en-US" sz="1100" dirty="0">
-                          <a:solidFill>
-                            <a:schemeClr val="tx1"/>
-                          </a:solidFill>
-                          <a:effectLst/>
-                        </a:rPr>
-                        <a:t>Patron organizations and individuals can pay an annual fee and become higher-level patrons (e.g., Diamond, Platinum, Gold, Silver) to co-develop exponential solutions for priority industry challenges</a:t>
+                        <a:rPr lang="en-US" dirty="0"/>
+                        <a:t>Industry Innovation</a:t>
                       </a:r>
                     </a:p>
                   </a:txBody>
-                  <a:tcPr marL="40793" marR="40793" marT="0" marB="0"/>
+                  <a:tcPr/>
                 </a:tc>
-                <a:tc gridSpan="2">
+                <a:extLst>
+                  <a:ext uri="{0D108BD9-81ED-4DB2-BD59-A6C34878D82A}">
+                    <a16:rowId xmlns:a16="http://schemas.microsoft.com/office/drawing/2014/main" val="2683780345"/>
+                  </a:ext>
+                </a:extLst>
+              </a:tr>
+              <a:tr h="393080">
+                <a:tc>
                   <a:txBody>
                     <a:bodyPr/>
                     <a:lstStyle/>
                     <a:p>
-                      <a:pPr marL="0" marR="0">
-                        <a:lnSpc>
-                          <a:spcPct val="115000"/>
-                        </a:lnSpc>
-                        <a:spcBef>
-                          <a:spcPts val="0"/>
-                        </a:spcBef>
-                        <a:spcAft>
-                          <a:spcPts val="1000"/>
-                        </a:spcAft>
-                      </a:pPr>
                       <a:r>
-                        <a:rPr lang="en-US" sz="1100" b="1" dirty="0">
-                          <a:solidFill>
-                            <a:schemeClr val="tx1"/>
-                          </a:solidFill>
-                          <a:effectLst/>
-                        </a:rPr>
-                        <a:t>Nonfunctional Requirements:</a:t>
+                        <a:rPr lang="en-US" sz="1600" b="0" dirty="0"/>
+                        <a:t>Service Strategy</a:t>
                       </a:r>
-                    </a:p>
-                    <a:p>
-                      <a:pPr marL="123825" marR="0" lvl="0" indent="-123825" algn="l" rtl="0">
-                        <a:lnSpc>
-                          <a:spcPct val="115000"/>
-                        </a:lnSpc>
-                        <a:spcBef>
-                          <a:spcPts val="0"/>
-                        </a:spcBef>
-                        <a:spcAft>
-                          <a:spcPts val="0"/>
-                        </a:spcAft>
-                        <a:buClr>
-                          <a:srgbClr val="000000"/>
-                        </a:buClr>
-                        <a:buFont typeface="Symbol" pitchFamily="2" charset="2"/>
-                        <a:buChar char=""/>
-                        <a:tabLst/>
-                      </a:pPr>
-                      <a:r>
-                        <a:rPr lang="en-US" sz="1100" b="1" i="0" u="none" strike="noStrike" cap="none" dirty="0">
-                          <a:solidFill>
-                            <a:schemeClr val="tx1"/>
-                          </a:solidFill>
-                          <a:effectLst/>
-                          <a:latin typeface="+mn-lt"/>
-                          <a:ea typeface="+mn-ea"/>
-                          <a:cs typeface="+mn-cs"/>
-                          <a:sym typeface="Arial"/>
-                        </a:rPr>
-                        <a:t>Desirability:  </a:t>
-                      </a:r>
-                      <a:r>
-                        <a:rPr lang="en-US" sz="1100" b="0" i="0" u="none" strike="noStrike" cap="none" dirty="0">
-                          <a:solidFill>
-                            <a:schemeClr val="tx1"/>
-                          </a:solidFill>
-                          <a:effectLst/>
-                          <a:latin typeface="+mn-lt"/>
-                          <a:ea typeface="+mn-ea"/>
-                          <a:cs typeface="+mn-cs"/>
-                          <a:sym typeface="Arial"/>
-                        </a:rPr>
-                        <a:t>all want exponential success, few know how to generate it, and stakeholders like our values and culture</a:t>
-                      </a:r>
-                    </a:p>
-                    <a:p>
-                      <a:pPr marL="123825" marR="0" lvl="0" indent="-123825" algn="l" rtl="0">
-                        <a:lnSpc>
-                          <a:spcPct val="115000"/>
-                        </a:lnSpc>
-                        <a:spcBef>
-                          <a:spcPts val="0"/>
-                        </a:spcBef>
-                        <a:spcAft>
-                          <a:spcPts val="0"/>
-                        </a:spcAft>
-                        <a:buClr>
-                          <a:srgbClr val="000000"/>
-                        </a:buClr>
-                        <a:buFont typeface="Symbol" pitchFamily="2" charset="2"/>
-                        <a:buChar char=""/>
-                        <a:tabLst/>
-                      </a:pPr>
-                      <a:r>
-                        <a:rPr lang="en-US" sz="1100" b="1" i="0" u="none" strike="noStrike" cap="none" dirty="0">
-                          <a:solidFill>
-                            <a:schemeClr val="tx1"/>
-                          </a:solidFill>
-                          <a:effectLst/>
-                          <a:latin typeface="+mn-lt"/>
-                          <a:ea typeface="+mn-ea"/>
-                          <a:cs typeface="+mn-cs"/>
-                          <a:sym typeface="Arial"/>
-                        </a:rPr>
-                        <a:t>Viability:  </a:t>
-                      </a:r>
-                      <a:r>
-                        <a:rPr lang="en-US" sz="1100" b="0" i="0" u="none" strike="noStrike" cap="none" dirty="0">
-                          <a:solidFill>
-                            <a:schemeClr val="tx1"/>
-                          </a:solidFill>
-                          <a:effectLst/>
-                          <a:latin typeface="+mn-lt"/>
-                          <a:ea typeface="+mn-ea"/>
-                          <a:cs typeface="+mn-cs"/>
-                          <a:sym typeface="Arial"/>
-                        </a:rPr>
-                        <a:t>the Consortium has the required capabilities and isn’t trying to boil the ocean</a:t>
-                      </a:r>
-                    </a:p>
-                    <a:p>
-                      <a:pPr marL="123825" marR="0" lvl="0" indent="-123825" algn="l" rtl="0">
-                        <a:lnSpc>
-                          <a:spcPct val="115000"/>
-                        </a:lnSpc>
-                        <a:spcBef>
-                          <a:spcPts val="0"/>
-                        </a:spcBef>
-                        <a:spcAft>
-                          <a:spcPts val="0"/>
-                        </a:spcAft>
-                        <a:buClr>
-                          <a:srgbClr val="000000"/>
-                        </a:buClr>
-                        <a:buFont typeface="Symbol" pitchFamily="2" charset="2"/>
-                        <a:buChar char=""/>
-                        <a:tabLst/>
-                      </a:pPr>
-                      <a:r>
-                        <a:rPr lang="en-US" sz="1100" b="1" i="0" u="none" strike="noStrike" cap="none" dirty="0">
-                          <a:solidFill>
-                            <a:schemeClr val="tx1"/>
-                          </a:solidFill>
-                          <a:effectLst/>
-                          <a:latin typeface="+mn-lt"/>
-                          <a:ea typeface="+mn-ea"/>
-                          <a:cs typeface="+mn-cs"/>
-                          <a:sym typeface="Arial"/>
-                        </a:rPr>
-                        <a:t>Sustainability:  </a:t>
-                      </a:r>
-                      <a:r>
-                        <a:rPr lang="en-US" sz="1100" b="0" i="0" u="none" strike="noStrike" cap="none" dirty="0">
-                          <a:solidFill>
-                            <a:schemeClr val="tx1"/>
-                          </a:solidFill>
-                          <a:effectLst/>
-                          <a:latin typeface="+mn-lt"/>
-                          <a:ea typeface="+mn-ea"/>
-                          <a:cs typeface="+mn-cs"/>
-                          <a:sym typeface="Arial"/>
-                        </a:rPr>
-                        <a:t>the core premise (proven accelerators mathematically capable of exponential results) is enduring</a:t>
-                      </a:r>
-                    </a:p>
-                    <a:p>
-                      <a:pPr marL="123825" marR="0" lvl="0" indent="-123825" algn="l" rtl="0">
-                        <a:lnSpc>
-                          <a:spcPct val="115000"/>
-                        </a:lnSpc>
-                        <a:spcBef>
-                          <a:spcPts val="0"/>
-                        </a:spcBef>
-                        <a:spcAft>
-                          <a:spcPts val="0"/>
-                        </a:spcAft>
-                        <a:buClr>
-                          <a:srgbClr val="000000"/>
-                        </a:buClr>
-                        <a:buFont typeface="Symbol" pitchFamily="2" charset="2"/>
-                        <a:buChar char=""/>
-                        <a:tabLst/>
-                      </a:pPr>
-                      <a:r>
-                        <a:rPr lang="en-US" sz="1100" b="1" i="0" u="none" strike="noStrike" cap="none" dirty="0">
-                          <a:solidFill>
-                            <a:schemeClr val="tx1"/>
-                          </a:solidFill>
-                          <a:effectLst/>
-                          <a:latin typeface="+mn-lt"/>
-                          <a:ea typeface="+mn-ea"/>
-                          <a:cs typeface="+mn-cs"/>
-                          <a:sym typeface="Arial"/>
-                        </a:rPr>
-                        <a:t>Performance:  </a:t>
-                      </a:r>
-                      <a:r>
-                        <a:rPr lang="en-US" sz="1100" b="0" i="0" u="none" strike="noStrike" cap="none" dirty="0">
-                          <a:solidFill>
-                            <a:schemeClr val="tx1"/>
-                          </a:solidFill>
-                          <a:effectLst/>
-                          <a:latin typeface="+mn-lt"/>
-                          <a:ea typeface="+mn-ea"/>
-                          <a:cs typeface="+mn-cs"/>
-                          <a:sym typeface="Arial"/>
-                        </a:rPr>
-                        <a:t>the Service’s own success will be a key proof of our core premise, creating a virtuous cycle</a:t>
-                      </a:r>
-                    </a:p>
-                    <a:p>
-                      <a:pPr marL="123825" marR="0" lvl="0" indent="-123825" algn="l" rtl="0">
-                        <a:lnSpc>
-                          <a:spcPct val="115000"/>
-                        </a:lnSpc>
-                        <a:spcBef>
-                          <a:spcPts val="0"/>
-                        </a:spcBef>
-                        <a:spcAft>
-                          <a:spcPts val="0"/>
-                        </a:spcAft>
-                        <a:buClr>
-                          <a:srgbClr val="000000"/>
-                        </a:buClr>
-                        <a:buFont typeface="Symbol" pitchFamily="2" charset="2"/>
-                        <a:buChar char=""/>
-                        <a:tabLst/>
-                      </a:pPr>
-                      <a:r>
-                        <a:rPr lang="en-US" sz="1100" b="1" i="0" u="none" strike="noStrike" cap="none" dirty="0">
-                          <a:solidFill>
-                            <a:schemeClr val="tx1"/>
-                          </a:solidFill>
-                          <a:effectLst/>
-                          <a:latin typeface="+mn-lt"/>
-                          <a:ea typeface="+mn-ea"/>
-                          <a:cs typeface="+mn-cs"/>
-                          <a:sym typeface="Arial"/>
-                        </a:rPr>
-                        <a:t>Usability:  </a:t>
-                      </a:r>
-                      <a:r>
-                        <a:rPr lang="en-US" sz="1100" dirty="0"/>
-                        <a:t>participating in Industry Innovation as a subscriber and/or patron must be incredibly easy</a:t>
-                      </a:r>
-                      <a:r>
-                        <a:rPr lang="en-US" sz="1100" dirty="0">
-                          <a:solidFill>
-                            <a:schemeClr val="tx1"/>
-                          </a:solidFill>
-                          <a:effectLst/>
-                        </a:rPr>
-                        <a:t> </a:t>
-                      </a:r>
-                      <a:endParaRPr lang="en-US" dirty="0"/>
-                    </a:p>
-                  </a:txBody>
-                  <a:tcPr marL="40793" marR="40793" marT="0" marB="0"/>
-                </a:tc>
-                <a:tc hMerge="1">
-                  <a:txBody>
-                    <a:bodyPr/>
-                    <a:lstStyle/>
-                    <a:p>
-                      <a:pPr marL="123825" marR="0" lvl="0" indent="-123825" algn="l" rtl="0">
-                        <a:lnSpc>
-                          <a:spcPct val="115000"/>
-                        </a:lnSpc>
-                        <a:spcBef>
-                          <a:spcPts val="0"/>
-                        </a:spcBef>
-                        <a:spcAft>
-                          <a:spcPts val="0"/>
-                        </a:spcAft>
-                        <a:buClr>
-                          <a:srgbClr val="000000"/>
-                        </a:buClr>
-                        <a:buFont typeface="Symbol" pitchFamily="2" charset="2"/>
-                        <a:buChar char=""/>
-                        <a:tabLst/>
-                      </a:pPr>
-                      <a:endParaRPr lang="en-US" dirty="0"/>
-                    </a:p>
-                  </a:txBody>
-                  <a:tcPr marL="40793" marR="40793" marT="0" marB="0"/>
-                </a:tc>
-                <a:extLst>
-                  <a:ext uri="{0D108BD9-81ED-4DB2-BD59-A6C34878D82A}">
-                    <a16:rowId xmlns:a16="http://schemas.microsoft.com/office/drawing/2014/main" val="1803020786"/>
-                  </a:ext>
-                </a:extLst>
-              </a:tr>
-              <a:tr h="1452061">
-                <a:tc gridSpan="3">
-                  <a:txBody>
-                    <a:bodyPr/>
-                    <a:lstStyle/>
-                    <a:p>
-                      <a:pPr marL="0" marR="0">
-                        <a:lnSpc>
-                          <a:spcPct val="115000"/>
-                        </a:lnSpc>
-                        <a:spcBef>
-                          <a:spcPts val="0"/>
-                        </a:spcBef>
-                        <a:spcAft>
-                          <a:spcPts val="1000"/>
-                        </a:spcAft>
-                      </a:pPr>
-                      <a:r>
-                        <a:rPr lang="en-US" sz="1100" b="1" dirty="0">
-                          <a:solidFill>
-                            <a:schemeClr val="tx1"/>
-                          </a:solidFill>
-                          <a:effectLst/>
-                        </a:rPr>
-                        <a:t>Minimum Viable Product (MVP) Features</a:t>
-                      </a:r>
-                    </a:p>
-                    <a:p>
-                      <a:pPr marL="123825" marR="0" lvl="0" indent="-123825">
-                        <a:lnSpc>
-                          <a:spcPct val="115000"/>
-                        </a:lnSpc>
-                        <a:spcBef>
-                          <a:spcPts val="0"/>
-                        </a:spcBef>
-                        <a:spcAft>
-                          <a:spcPts val="0"/>
-                        </a:spcAft>
-                        <a:buFont typeface="Symbol" pitchFamily="2" charset="2"/>
-                        <a:buChar char=""/>
-                        <a:tabLst/>
-                      </a:pPr>
-                      <a:r>
-                        <a:rPr lang="en-US" sz="1100" dirty="0">
-                          <a:solidFill>
-                            <a:schemeClr val="tx1"/>
-                          </a:solidFill>
-                          <a:effectLst/>
-                        </a:rPr>
-                        <a:t>Patron organizations and individuals simply click to identify as an advocate for an innovation team in the AccelRR8 Consortium’s free electronic platform</a:t>
-                      </a:r>
-                    </a:p>
-                    <a:p>
-                      <a:pPr marL="123825" marR="0" lvl="0" indent="-123825">
-                        <a:lnSpc>
-                          <a:spcPct val="115000"/>
-                        </a:lnSpc>
-                        <a:spcBef>
-                          <a:spcPts val="0"/>
-                        </a:spcBef>
-                        <a:spcAft>
-                          <a:spcPts val="0"/>
-                        </a:spcAft>
-                        <a:buFont typeface="Symbol" pitchFamily="2" charset="2"/>
-                        <a:buChar char=""/>
-                        <a:tabLst/>
-                      </a:pPr>
-                      <a:r>
-                        <a:rPr lang="en-US" sz="1100" dirty="0">
-                          <a:solidFill>
-                            <a:schemeClr val="tx1"/>
-                          </a:solidFill>
-                          <a:effectLst/>
-                        </a:rPr>
-                        <a:t>Subscribers simply click to join sponsored innovation teams </a:t>
-                      </a:r>
-                      <a:endParaRPr lang="en-US" sz="1100" dirty="0">
-                        <a:solidFill>
-                          <a:schemeClr val="tx1"/>
-                        </a:solidFill>
-                        <a:effectLst/>
-                        <a:latin typeface="Calibri" panose="020F0502020204030204" pitchFamily="34" charset="0"/>
-                        <a:ea typeface="MS Mincho" panose="02020609040205080304" pitchFamily="49" charset="-128"/>
-                        <a:cs typeface="Times New Roman" panose="02020603050405020304" pitchFamily="18" charset="0"/>
-                      </a:endParaRPr>
-                    </a:p>
-                  </a:txBody>
-                  <a:tcPr marL="40793" marR="40793" marT="0" marB="0"/>
-                </a:tc>
-                <a:tc hMerge="1">
-                  <a:txBody>
-                    <a:bodyPr/>
-                    <a:lstStyle/>
-                    <a:p>
-                      <a:endParaRPr lang="en-US"/>
                     </a:p>
                   </a:txBody>
                   <a:tcPr/>
-                </a:tc>
-                <a:tc hMerge="1">
-                  <a:txBody>
-                    <a:bodyPr/>
-                    <a:lstStyle/>
-                    <a:p>
-                      <a:pPr marL="123825" marR="0" lvl="0" indent="-123825">
-                        <a:lnSpc>
-                          <a:spcPct val="115000"/>
-                        </a:lnSpc>
-                        <a:spcBef>
-                          <a:spcPts val="0"/>
-                        </a:spcBef>
-                        <a:spcAft>
-                          <a:spcPts val="0"/>
-                        </a:spcAft>
-                        <a:buFont typeface="Symbol" pitchFamily="2" charset="2"/>
-                        <a:buChar char=""/>
-                        <a:tabLst/>
-                      </a:pPr>
-                      <a:endParaRPr lang="en-US" sz="1100" dirty="0">
-                        <a:solidFill>
-                          <a:schemeClr val="tx1"/>
-                        </a:solidFill>
-                        <a:effectLst/>
-                        <a:latin typeface="Calibri" panose="020F0502020204030204" pitchFamily="34" charset="0"/>
-                        <a:ea typeface="MS Mincho" panose="02020609040205080304" pitchFamily="49" charset="-128"/>
-                        <a:cs typeface="Times New Roman" panose="02020603050405020304" pitchFamily="18" charset="0"/>
-                      </a:endParaRPr>
-                    </a:p>
-                  </a:txBody>
-                  <a:tcPr marL="40793" marR="40793" marT="0" marB="0"/>
                 </a:tc>
                 <a:tc>
                   <a:txBody>
                     <a:bodyPr/>
                     <a:lstStyle/>
                     <a:p>
-                      <a:pPr marL="0" marR="0">
-                        <a:lnSpc>
-                          <a:spcPct val="115000"/>
-                        </a:lnSpc>
-                        <a:spcBef>
-                          <a:spcPts val="0"/>
-                        </a:spcBef>
-                        <a:spcAft>
-                          <a:spcPts val="1000"/>
-                        </a:spcAft>
-                      </a:pPr>
                       <a:r>
-                        <a:rPr lang="en-US" sz="1100" b="1" dirty="0">
-                          <a:solidFill>
-                            <a:schemeClr val="tx1"/>
-                          </a:solidFill>
-                          <a:effectLst/>
-                        </a:rPr>
-                        <a:t>Additional Potential Features</a:t>
+                        <a:rPr lang="en-US" dirty="0"/>
+                        <a:t>&lt;3-Horizon Strategy for the Service&gt;</a:t>
                       </a:r>
                     </a:p>
-                    <a:p>
-                      <a:pPr marL="123825" marR="0" lvl="0" indent="-123825">
-                        <a:lnSpc>
-                          <a:spcPct val="115000"/>
-                        </a:lnSpc>
-                        <a:spcBef>
-                          <a:spcPts val="0"/>
-                        </a:spcBef>
-                        <a:spcAft>
-                          <a:spcPts val="0"/>
-                        </a:spcAft>
-                        <a:buFont typeface="Symbol" pitchFamily="2" charset="2"/>
-                        <a:buChar char=""/>
-                        <a:tabLst/>
-                      </a:pPr>
-                      <a:r>
-                        <a:rPr lang="en-US" sz="1100" dirty="0">
-                          <a:solidFill>
-                            <a:schemeClr val="tx1"/>
-                          </a:solidFill>
-                          <a:effectLst/>
-                        </a:rPr>
-                        <a:t>Free platform that facilitates collaboration among innovation team members (e.g., Discord)</a:t>
-                      </a:r>
-                    </a:p>
-                    <a:p>
-                      <a:pPr marL="0" marR="0">
-                        <a:lnSpc>
-                          <a:spcPct val="115000"/>
-                        </a:lnSpc>
-                        <a:spcBef>
-                          <a:spcPts val="0"/>
-                        </a:spcBef>
-                        <a:spcAft>
-                          <a:spcPts val="1000"/>
-                        </a:spcAft>
-                      </a:pPr>
-                      <a:r>
-                        <a:rPr lang="en-US" sz="1100" dirty="0">
-                          <a:solidFill>
-                            <a:schemeClr val="tx1"/>
-                          </a:solidFill>
-                          <a:effectLst/>
-                        </a:rPr>
-                        <a:t> </a:t>
-                      </a:r>
-                      <a:endParaRPr lang="en-US" sz="1100" dirty="0">
-                        <a:solidFill>
-                          <a:schemeClr val="tx1"/>
-                        </a:solidFill>
-                        <a:effectLst/>
-                        <a:latin typeface="Calibri" panose="020F0502020204030204" pitchFamily="34" charset="0"/>
-                        <a:ea typeface="MS Mincho" panose="02020609040205080304" pitchFamily="49" charset="-128"/>
-                        <a:cs typeface="Times New Roman" panose="02020603050405020304" pitchFamily="18" charset="0"/>
-                      </a:endParaRPr>
-                    </a:p>
                   </a:txBody>
-                  <a:tcPr marL="40793" marR="40793" marT="0" marB="0"/>
+                  <a:tcPr/>
                 </a:tc>
                 <a:extLst>
                   <a:ext uri="{0D108BD9-81ED-4DB2-BD59-A6C34878D82A}">
-                    <a16:rowId xmlns:a16="http://schemas.microsoft.com/office/drawing/2014/main" val="2776873087"/>
+                    <a16:rowId xmlns:a16="http://schemas.microsoft.com/office/drawing/2014/main" val="2707085893"/>
                   </a:ext>
                 </a:extLst>
               </a:tr>
-              <a:tr h="1344654">
-                <a:tc gridSpan="3">
+              <a:tr h="607487">
+                <a:tc>
                   <a:txBody>
                     <a:bodyPr/>
                     <a:lstStyle/>
                     <a:p>
-                      <a:pPr marL="0" marR="0">
-                        <a:lnSpc>
-                          <a:spcPct val="115000"/>
-                        </a:lnSpc>
-                        <a:spcBef>
-                          <a:spcPts val="0"/>
-                        </a:spcBef>
-                        <a:spcAft>
-                          <a:spcPts val="1000"/>
-                        </a:spcAft>
-                      </a:pPr>
                       <a:r>
-                        <a:rPr lang="en-US" sz="1100" b="1" dirty="0">
-                          <a:solidFill>
-                            <a:schemeClr val="tx1"/>
-                          </a:solidFill>
-                          <a:effectLst/>
-                        </a:rPr>
-                        <a:t>Analysis Summary: </a:t>
+                        <a:rPr lang="en-US" sz="1600" b="0" dirty="0"/>
+                        <a:t>Service Context</a:t>
                       </a:r>
                     </a:p>
+                  </a:txBody>
+                  <a:tcPr/>
+                </a:tc>
+                <a:tc>
+                  <a:txBody>
+                    <a:bodyPr/>
+                    <a:lstStyle/>
                     <a:p>
-                      <a:pPr marL="114300" marR="0" indent="-114300">
-                        <a:lnSpc>
-                          <a:spcPct val="115000"/>
-                        </a:lnSpc>
-                        <a:spcBef>
-                          <a:spcPts val="0"/>
-                        </a:spcBef>
-                        <a:spcAft>
-                          <a:spcPts val="0"/>
-                        </a:spcAft>
-                        <a:buFont typeface="Arial" panose="020B0604020202020204" pitchFamily="34" charset="0"/>
-                        <a:buChar char="•"/>
-                        <a:tabLst/>
-                      </a:pPr>
                       <a:r>
-                        <a:rPr lang="en-US" sz="1100" dirty="0">
-                          <a:solidFill>
-                            <a:schemeClr val="tx1"/>
-                          </a:solidFill>
-                          <a:effectLst/>
+                        <a:rPr lang="en-US" dirty="0"/>
+                        <a:t>&lt;See SAFe Solution Context at </a:t>
+                      </a:r>
+                      <a:r>
+                        <a:rPr lang="en-US" dirty="0">
+                          <a:hlinkClick r:id="rId3"/>
                         </a:rPr>
-                        <a:t>MVP desirability, viability, feasibility, and sustainability were verified by the Board of Directors as well as a subset of Advisors and Initial Subscribers.</a:t>
+                        <a:t>this link</a:t>
                       </a:r>
-                      <a:endParaRPr lang="en-US" sz="1100" b="0" i="0" u="none" strike="noStrike" cap="none" dirty="0">
+                      <a:r>
+                        <a:rPr lang="en-US" dirty="0"/>
+                        <a:t>&gt;</a:t>
+                      </a:r>
+                    </a:p>
+                  </a:txBody>
+                  <a:tcPr/>
+                </a:tc>
+                <a:extLst>
+                  <a:ext uri="{0D108BD9-81ED-4DB2-BD59-A6C34878D82A}">
+                    <a16:rowId xmlns:a16="http://schemas.microsoft.com/office/drawing/2014/main" val="1092281396"/>
+                  </a:ext>
+                </a:extLst>
+              </a:tr>
+              <a:tr h="607487">
+                <a:tc>
+                  <a:txBody>
+                    <a:bodyPr/>
+                    <a:lstStyle/>
+                    <a:p>
+                      <a:r>
+                        <a:rPr lang="en-US" sz="1600" b="0" dirty="0"/>
+                        <a:t>Service Intent</a:t>
+                      </a:r>
+                    </a:p>
+                  </a:txBody>
+                  <a:tcPr/>
+                </a:tc>
+                <a:tc>
+                  <a:txBody>
+                    <a:bodyPr/>
+                    <a:lstStyle/>
+                    <a:p>
+                      <a:r>
+                        <a:rPr lang="en-US" dirty="0"/>
+                        <a:t>&lt;See SAFe Solution Intent at </a:t>
+                      </a:r>
+                      <a:r>
+                        <a:rPr lang="en-US" dirty="0">
+                          <a:hlinkClick r:id="rId4"/>
+                        </a:rPr>
+                        <a:t>this link</a:t>
+                      </a:r>
+                      <a:r>
+                        <a:rPr lang="en-US" dirty="0"/>
+                        <a:t>&gt;</a:t>
+                      </a:r>
+                    </a:p>
+                  </a:txBody>
+                  <a:tcPr/>
+                </a:tc>
+                <a:extLst>
+                  <a:ext uri="{0D108BD9-81ED-4DB2-BD59-A6C34878D82A}">
+                    <a16:rowId xmlns:a16="http://schemas.microsoft.com/office/drawing/2014/main" val="2029769333"/>
+                  </a:ext>
+                </a:extLst>
+              </a:tr>
+              <a:tr h="393080">
+                <a:tc>
+                  <a:txBody>
+                    <a:bodyPr/>
+                    <a:lstStyle/>
+                    <a:p>
+                      <a:r>
+                        <a:rPr lang="en-US" sz="1600" b="0" dirty="0"/>
+                        <a:t>Development Kit</a:t>
+                      </a:r>
+                    </a:p>
+                  </a:txBody>
+                  <a:tcPr/>
+                </a:tc>
+                <a:tc>
+                  <a:txBody>
+                    <a:bodyPr/>
+                    <a:lstStyle/>
+                    <a:p>
+                      <a:r>
+                        <a:rPr lang="en-US" dirty="0"/>
+                        <a:t>&lt;Descriptions of Collateral and Tools used by the Products team to develop the service&gt;</a:t>
+                      </a:r>
+                    </a:p>
+                  </a:txBody>
+                  <a:tcPr/>
+                </a:tc>
+                <a:extLst>
+                  <a:ext uri="{0D108BD9-81ED-4DB2-BD59-A6C34878D82A}">
+                    <a16:rowId xmlns:a16="http://schemas.microsoft.com/office/drawing/2014/main" val="52804956"/>
+                  </a:ext>
+                </a:extLst>
+              </a:tr>
+              <a:tr h="857628">
+                <a:tc>
+                  <a:txBody>
+                    <a:bodyPr/>
+                    <a:lstStyle/>
+                    <a:p>
+                      <a:r>
+                        <a:rPr lang="en-US" sz="1600" b="0" dirty="0"/>
+                        <a:t>Demand </a:t>
+                      </a:r>
+                      <a:br>
+                        <a:rPr lang="en-US" sz="1600" b="0" dirty="0"/>
+                      </a:br>
+                      <a:r>
+                        <a:rPr lang="en-US" sz="1600" b="0" dirty="0"/>
+                        <a:t>Generation Kit</a:t>
+                      </a:r>
+                    </a:p>
+                  </a:txBody>
+                  <a:tcPr/>
+                </a:tc>
+                <a:tc>
+                  <a:txBody>
+                    <a:bodyPr/>
+                    <a:lstStyle/>
+                    <a:p>
+                      <a:r>
+                        <a:rPr lang="en-US" dirty="0"/>
+                        <a:t>&lt;Descriptions of Collateral and Tools used by Demand Generation to engage with potential beneficiaries in market segments about the service&gt;</a:t>
+                      </a:r>
+                    </a:p>
+                  </a:txBody>
+                  <a:tcPr/>
+                </a:tc>
+                <a:extLst>
+                  <a:ext uri="{0D108BD9-81ED-4DB2-BD59-A6C34878D82A}">
+                    <a16:rowId xmlns:a16="http://schemas.microsoft.com/office/drawing/2014/main" val="872717509"/>
+                  </a:ext>
+                </a:extLst>
+              </a:tr>
+              <a:tr h="678956">
+                <a:tc>
+                  <a:txBody>
+                    <a:bodyPr/>
+                    <a:lstStyle/>
+                    <a:p>
+                      <a:r>
+                        <a:rPr lang="en-US" sz="1600" b="0" dirty="0"/>
+                        <a:t>Beneficiaries Engagement Kit</a:t>
+                      </a:r>
+                    </a:p>
+                  </a:txBody>
+                  <a:tcPr/>
+                </a:tc>
+                <a:tc>
+                  <a:txBody>
+                    <a:bodyPr/>
+                    <a:lstStyle/>
+                    <a:p>
+                      <a:pPr lvl="2"/>
+                      <a:r>
+                        <a:rPr lang="en-US" dirty="0"/>
+                        <a:t>&lt;Descriptions of Collateral and Tools used by </a:t>
+                      </a:r>
+                      <a:r>
+                        <a:rPr lang="en-US" dirty="0" err="1"/>
+                        <a:t>Benficiaries</a:t>
+                      </a:r>
+                      <a:r>
+                        <a:rPr lang="en-US" dirty="0"/>
+                        <a:t> Engagement to engage with specific potential beneficiaries about the service&gt;</a:t>
+                      </a:r>
+                      <a:endParaRPr lang="en-US" sz="1400" b="0" i="0" u="none" strike="noStrike" cap="none" dirty="0">
                         <a:solidFill>
                           <a:schemeClr val="tx1"/>
                         </a:solidFill>
@@ -28554,24 +22247,31 @@
                       </a:endParaRPr>
                     </a:p>
                   </a:txBody>
-                  <a:tcPr marL="40793" marR="40793" marT="0" marB="0"/>
+                  <a:tcPr/>
                 </a:tc>
-                <a:tc hMerge="1">
+                <a:extLst>
+                  <a:ext uri="{0D108BD9-81ED-4DB2-BD59-A6C34878D82A}">
+                    <a16:rowId xmlns:a16="http://schemas.microsoft.com/office/drawing/2014/main" val="2047728929"/>
+                  </a:ext>
+                </a:extLst>
+              </a:tr>
+              <a:tr h="678956">
+                <a:tc>
                   <a:txBody>
                     <a:bodyPr/>
                     <a:lstStyle/>
                     <a:p>
-                      <a:endParaRPr lang="en-US"/>
-                    </a:p>
-                  </a:txBody>
-                  <a:tcPr/>
-                </a:tc>
-                <a:tc hMerge="1">
-                  <a:txBody>
-                    <a:bodyPr/>
-                    <a:lstStyle/>
-                    <a:p>
-                      <a:endParaRPr lang="en-US"/>
+                      <a:r>
+                        <a:rPr lang="en-US" sz="1600" b="0" dirty="0"/>
+                        <a:t>Delivery of</a:t>
+                      </a:r>
+                      <a:br>
+                        <a:rPr lang="en-US" sz="1600" b="0" dirty="0"/>
+                      </a:br>
+                      <a:r>
+                        <a:rPr lang="en-US" sz="1600" b="0" dirty="0"/>
+                        <a:t>Service Kit</a:t>
+                      </a:r>
                     </a:p>
                   </a:txBody>
                   <a:tcPr/>
@@ -28581,64 +22281,17 @@
                     <a:bodyPr/>
                     <a:lstStyle/>
                     <a:p>
-                      <a:pPr marL="0" marR="0">
-                        <a:lnSpc>
-                          <a:spcPct val="115000"/>
-                        </a:lnSpc>
-                        <a:spcBef>
-                          <a:spcPts val="0"/>
-                        </a:spcBef>
-                        <a:spcAft>
-                          <a:spcPts val="1000"/>
-                        </a:spcAft>
-                      </a:pPr>
                       <a:r>
-                        <a:rPr lang="en-US" sz="1100" b="1" dirty="0">
-                          <a:solidFill>
-                            <a:schemeClr val="tx1"/>
-                          </a:solidFill>
-                          <a:effectLst/>
-                        </a:rPr>
-                        <a:t>Go / No-Go:</a:t>
+                        <a:rPr lang="en-US" dirty="0"/>
+                        <a:t>&lt;Descriptions of Collateral and Tools used by Delivery of Service to engage with beneficiaries about the service&gt;</a:t>
                       </a:r>
                     </a:p>
-                    <a:p>
-                      <a:pPr marL="0" marR="0">
-                        <a:lnSpc>
-                          <a:spcPct val="115000"/>
-                        </a:lnSpc>
-                        <a:spcBef>
-                          <a:spcPts val="0"/>
-                        </a:spcBef>
-                        <a:spcAft>
-                          <a:spcPts val="1000"/>
-                        </a:spcAft>
-                      </a:pPr>
-                      <a:r>
-                        <a:rPr lang="en-US" sz="1100" dirty="0">
-                          <a:solidFill>
-                            <a:schemeClr val="tx1"/>
-                          </a:solidFill>
-                          <a:effectLst/>
-                        </a:rPr>
-                        <a:t>Go!</a:t>
-                      </a:r>
-                      <a:endParaRPr lang="en-US" sz="1100" dirty="0">
-                        <a:solidFill>
-                          <a:schemeClr val="tx1"/>
-                        </a:solidFill>
-                        <a:effectLst/>
-                        <a:latin typeface="Calibri" panose="020F0502020204030204" pitchFamily="34" charset="0"/>
-                        <a:ea typeface="MS Mincho" panose="02020609040205080304" pitchFamily="49" charset="-128"/>
-                        <a:cs typeface="Times New Roman" panose="02020603050405020304" pitchFamily="18" charset="0"/>
-                      </a:endParaRPr>
-                    </a:p>
                   </a:txBody>
-                  <a:tcPr marL="40793" marR="40793" marT="0" marB="0"/>
+                  <a:tcPr/>
                 </a:tc>
                 <a:extLst>
                   <a:ext uri="{0D108BD9-81ED-4DB2-BD59-A6C34878D82A}">
-                    <a16:rowId xmlns:a16="http://schemas.microsoft.com/office/drawing/2014/main" val="121679053"/>
+                    <a16:rowId xmlns:a16="http://schemas.microsoft.com/office/drawing/2014/main" val="2321847728"/>
                   </a:ext>
                 </a:extLst>
               </a:tr>
@@ -28648,10 +22301,10 @@
       </p:graphicFrame>
       <p:sp>
         <p:nvSpPr>
-          <p:cNvPr id="3" name="Rectangle 2">
+          <p:cNvPr id="6" name="Rectangle 5">
             <a:extLst>
               <a:ext uri="{FF2B5EF4-FFF2-40B4-BE49-F238E27FC236}">
-                <a16:creationId xmlns:a16="http://schemas.microsoft.com/office/drawing/2014/main" id="{BE23F6AA-4D57-B5E8-FD4A-210108E1ABAD}"/>
+                <a16:creationId xmlns:a16="http://schemas.microsoft.com/office/drawing/2014/main" id="{A7372D81-FEF0-F693-D686-F9DF46C1643F}"/>
               </a:ext>
             </a:extLst>
           </p:cNvPr>
@@ -28690,40 +22343,12 @@
           <a:bodyPr rtlCol="0" anchor="ctr"/>
           <a:lstStyle/>
           <a:p>
-            <a:pPr marL="0" marR="0" lvl="0" indent="0" algn="ctr" defTabSz="914400" rtl="0" eaLnBrk="1" fontAlgn="auto" latinLnBrk="0" hangingPunct="1">
-              <a:lnSpc>
-                <a:spcPct val="100000"/>
-              </a:lnSpc>
-              <a:spcBef>
-                <a:spcPts val="0"/>
-              </a:spcBef>
-              <a:spcAft>
-                <a:spcPts val="0"/>
-              </a:spcAft>
-              <a:buClr>
-                <a:srgbClr val="000000"/>
-              </a:buClr>
-              <a:buSzTx/>
-              <a:buFont typeface="Arial"/>
-              <a:buNone/>
-              <a:tabLst/>
-              <a:defRPr/>
-            </a:pPr>
+            <a:pPr algn="ctr"/>
             <a:r>
-              <a:rPr kumimoji="0" lang="en-US" sz="1400" b="0" i="0" u="none" strike="noStrike" kern="0" cap="none" spc="0" normalizeH="0" baseline="0" noProof="0" dirty="0">
-                <a:ln>
-                  <a:noFill/>
-                </a:ln>
+              <a:rPr lang="en-US" dirty="0">
                 <a:solidFill>
-                  <a:srgbClr val="000000"/>
+                  <a:schemeClr val="tx1"/>
                 </a:solidFill>
-                <a:effectLst/>
-                <a:uLnTx/>
-                <a:uFillTx/>
-                <a:latin typeface="Arial"/>
-                <a:ea typeface="+mn-ea"/>
-                <a:cs typeface="+mn-cs"/>
-                <a:sym typeface="Arial"/>
               </a:rPr>
               <a:t>Reviewing Stage</a:t>
             </a:r>
@@ -28732,10 +22357,10 @@
       </p:sp>
       <p:sp>
         <p:nvSpPr>
-          <p:cNvPr id="4" name="Rectangle 3">
+          <p:cNvPr id="7" name="Rectangle 6">
             <a:extLst>
               <a:ext uri="{FF2B5EF4-FFF2-40B4-BE49-F238E27FC236}">
-                <a16:creationId xmlns:a16="http://schemas.microsoft.com/office/drawing/2014/main" id="{84E8032F-651C-8A52-1D58-700E366B6B54}"/>
+                <a16:creationId xmlns:a16="http://schemas.microsoft.com/office/drawing/2014/main" id="{CF9C5A52-20CA-F258-B608-01820FE0C522}"/>
               </a:ext>
             </a:extLst>
           </p:cNvPr>
@@ -28774,40 +22399,12 @@
           <a:bodyPr rtlCol="0" anchor="ctr"/>
           <a:lstStyle/>
           <a:p>
-            <a:pPr marL="0" marR="0" lvl="0" indent="0" algn="ctr" defTabSz="914400" rtl="0" eaLnBrk="1" fontAlgn="auto" latinLnBrk="0" hangingPunct="1">
-              <a:lnSpc>
-                <a:spcPct val="100000"/>
-              </a:lnSpc>
-              <a:spcBef>
-                <a:spcPts val="0"/>
-              </a:spcBef>
-              <a:spcAft>
-                <a:spcPts val="0"/>
-              </a:spcAft>
-              <a:buClr>
-                <a:srgbClr val="000000"/>
-              </a:buClr>
-              <a:buSzTx/>
-              <a:buFont typeface="Arial"/>
-              <a:buNone/>
-              <a:tabLst/>
-              <a:defRPr/>
-            </a:pPr>
+            <a:pPr algn="ctr"/>
             <a:r>
-              <a:rPr kumimoji="0" lang="en-US" sz="1400" b="0" i="0" u="none" strike="noStrike" kern="0" cap="none" spc="0" normalizeH="0" baseline="0" noProof="0" dirty="0">
-                <a:ln>
-                  <a:noFill/>
-                </a:ln>
+              <a:rPr lang="en-US" dirty="0">
                 <a:solidFill>
-                  <a:srgbClr val="FFFFFF"/>
+                  <a:schemeClr val="bg1"/>
                 </a:solidFill>
-                <a:effectLst/>
-                <a:uLnTx/>
-                <a:uFillTx/>
-                <a:latin typeface="Arial"/>
-                <a:ea typeface="+mn-ea"/>
-                <a:cs typeface="+mn-cs"/>
-                <a:sym typeface="Arial"/>
               </a:rPr>
               <a:t>Analysis Stage</a:t>
             </a:r>
@@ -28816,10 +22413,10 @@
       </p:sp>
       <p:sp>
         <p:nvSpPr>
-          <p:cNvPr id="5" name="Rectangle 4">
+          <p:cNvPr id="8" name="Rectangle 7">
             <a:extLst>
               <a:ext uri="{FF2B5EF4-FFF2-40B4-BE49-F238E27FC236}">
-                <a16:creationId xmlns:a16="http://schemas.microsoft.com/office/drawing/2014/main" id="{2675ACFC-BED3-CE2E-BF13-5AF5D03D4A75}"/>
+                <a16:creationId xmlns:a16="http://schemas.microsoft.com/office/drawing/2014/main" id="{5A08F55C-5399-5D3A-6145-A00CC01B7E5F}"/>
               </a:ext>
             </a:extLst>
           </p:cNvPr>
@@ -28858,193 +22455,22 @@
           <a:bodyPr rtlCol="0" anchor="ctr"/>
           <a:lstStyle/>
           <a:p>
-            <a:pPr marL="0" marR="0" lvl="0" indent="0" algn="ctr" defTabSz="914400" rtl="0" eaLnBrk="1" fontAlgn="auto" latinLnBrk="0" hangingPunct="1">
-              <a:lnSpc>
-                <a:spcPct val="100000"/>
-              </a:lnSpc>
-              <a:spcBef>
-                <a:spcPts val="0"/>
-              </a:spcBef>
-              <a:spcAft>
-                <a:spcPts val="0"/>
-              </a:spcAft>
-              <a:buClr>
-                <a:srgbClr val="000000"/>
-              </a:buClr>
-              <a:buSzTx/>
-              <a:buFont typeface="Arial"/>
-              <a:buNone/>
-              <a:tabLst/>
-              <a:defRPr/>
-            </a:pPr>
+            <a:pPr algn="ctr"/>
             <a:r>
-              <a:rPr kumimoji="0" lang="en-US" sz="1400" b="0" i="0" u="none" strike="noStrike" kern="0" cap="none" spc="0" normalizeH="0" baseline="0" noProof="0" dirty="0">
-                <a:ln>
-                  <a:noFill/>
-                </a:ln>
+              <a:rPr lang="en-US" dirty="0">
                 <a:solidFill>
-                  <a:srgbClr val="000000"/>
+                  <a:schemeClr val="tx1"/>
                 </a:solidFill>
-                <a:effectLst/>
-                <a:uLnTx/>
-                <a:uFillTx/>
-                <a:latin typeface="Arial"/>
-                <a:ea typeface="+mn-ea"/>
-                <a:cs typeface="+mn-cs"/>
-                <a:sym typeface="Arial"/>
               </a:rPr>
               <a:t>Implementing - MVP Stage</a:t>
             </a:r>
           </a:p>
         </p:txBody>
       </p:sp>
-      <p:sp>
-        <p:nvSpPr>
-          <p:cNvPr id="7" name="Google Shape;18;p9">
-            <a:extLst>
-              <a:ext uri="{FF2B5EF4-FFF2-40B4-BE49-F238E27FC236}">
-                <a16:creationId xmlns:a16="http://schemas.microsoft.com/office/drawing/2014/main" id="{31CA48FC-F211-DAFD-902B-5D682C6B56DD}"/>
-              </a:ext>
-            </a:extLst>
-          </p:cNvPr>
-          <p:cNvSpPr txBox="1">
-            <a:spLocks noGrp="1"/>
-          </p:cNvSpPr>
-          <p:nvPr>
-            <p:ph type="ftr" idx="11"/>
-          </p:nvPr>
-        </p:nvSpPr>
-        <p:spPr>
-          <a:xfrm>
-            <a:off x="4038600" y="6540375"/>
-            <a:ext cx="4114800" cy="365125"/>
-          </a:xfrm>
-          <a:prstGeom prst="rect">
-            <a:avLst/>
-          </a:prstGeom>
-          <a:noFill/>
-          <a:ln>
-            <a:noFill/>
-          </a:ln>
-        </p:spPr>
-        <p:txBody>
-          <a:bodyPr spcFirstLastPara="1" wrap="square" lIns="91425" tIns="45700" rIns="91425" bIns="45700" anchor="ctr" anchorCtr="0">
-            <a:noAutofit/>
-          </a:bodyPr>
-          <a:lstStyle>
-            <a:lvl1pPr lvl="0" algn="ctr">
-              <a:spcBef>
-                <a:spcPts val="0"/>
-              </a:spcBef>
-              <a:spcAft>
-                <a:spcPts val="0"/>
-              </a:spcAft>
-              <a:buSzPts val="1400"/>
-              <a:buNone/>
-              <a:defRPr/>
-            </a:lvl1pPr>
-            <a:lvl2pPr lvl="1" algn="l">
-              <a:spcBef>
-                <a:spcPts val="0"/>
-              </a:spcBef>
-              <a:spcAft>
-                <a:spcPts val="0"/>
-              </a:spcAft>
-              <a:buSzPts val="1400"/>
-              <a:buNone/>
-              <a:defRPr/>
-            </a:lvl2pPr>
-            <a:lvl3pPr lvl="2" algn="l">
-              <a:spcBef>
-                <a:spcPts val="0"/>
-              </a:spcBef>
-              <a:spcAft>
-                <a:spcPts val="0"/>
-              </a:spcAft>
-              <a:buSzPts val="1400"/>
-              <a:buNone/>
-              <a:defRPr/>
-            </a:lvl3pPr>
-            <a:lvl4pPr lvl="3" algn="l">
-              <a:spcBef>
-                <a:spcPts val="0"/>
-              </a:spcBef>
-              <a:spcAft>
-                <a:spcPts val="0"/>
-              </a:spcAft>
-              <a:buSzPts val="1400"/>
-              <a:buNone/>
-              <a:defRPr/>
-            </a:lvl4pPr>
-            <a:lvl5pPr lvl="4" algn="l">
-              <a:spcBef>
-                <a:spcPts val="0"/>
-              </a:spcBef>
-              <a:spcAft>
-                <a:spcPts val="0"/>
-              </a:spcAft>
-              <a:buSzPts val="1400"/>
-              <a:buNone/>
-              <a:defRPr/>
-            </a:lvl5pPr>
-            <a:lvl6pPr lvl="5" algn="l">
-              <a:spcBef>
-                <a:spcPts val="0"/>
-              </a:spcBef>
-              <a:spcAft>
-                <a:spcPts val="0"/>
-              </a:spcAft>
-              <a:buSzPts val="1400"/>
-              <a:buNone/>
-              <a:defRPr/>
-            </a:lvl6pPr>
-            <a:lvl7pPr lvl="6" algn="l">
-              <a:spcBef>
-                <a:spcPts val="0"/>
-              </a:spcBef>
-              <a:spcAft>
-                <a:spcPts val="0"/>
-              </a:spcAft>
-              <a:buSzPts val="1400"/>
-              <a:buNone/>
-              <a:defRPr/>
-            </a:lvl7pPr>
-            <a:lvl8pPr lvl="7" algn="l">
-              <a:spcBef>
-                <a:spcPts val="0"/>
-              </a:spcBef>
-              <a:spcAft>
-                <a:spcPts val="0"/>
-              </a:spcAft>
-              <a:buSzPts val="1400"/>
-              <a:buNone/>
-              <a:defRPr/>
-            </a:lvl8pPr>
-            <a:lvl9pPr lvl="8" algn="l">
-              <a:spcBef>
-                <a:spcPts val="0"/>
-              </a:spcBef>
-              <a:spcAft>
-                <a:spcPts val="0"/>
-              </a:spcAft>
-              <a:buSzPts val="1400"/>
-              <a:buNone/>
-              <a:defRPr/>
-            </a:lvl9pPr>
-          </a:lstStyle>
-          <a:p>
-            <a:r>
-              <a:rPr lang="en-US" dirty="0"/>
-              <a:t>Proprietary and Confidential Information</a:t>
-            </a:r>
-            <a:endParaRPr dirty="0"/>
-          </a:p>
-        </p:txBody>
-      </p:sp>
     </p:spTree>
     <p:extLst>
       <p:ext uri="{BB962C8B-B14F-4D97-AF65-F5344CB8AC3E}">
-        <p14:creationId xmlns:p14="http://schemas.microsoft.com/office/powerpoint/2010/main" val="450257364"/>
+        <p14:creationId xmlns:p14="http://schemas.microsoft.com/office/powerpoint/2010/main" val="3960435043"/>
       </p:ext>
     </p:extLst>
   </p:cSld>
